--- a/Mapped Curriculum Lessons/Grade 8/Lesson 34 - Several Functions/Several Functions - Slides.pptx
+++ b/Mapped Curriculum Lessons/Grade 8/Lesson 34 - Several Functions/Several Functions - Slides.pptx
@@ -2,28 +2,28 @@
 <file path=ppt/presentation.xml><?xml version="1.0" encoding="utf-8"?>
 <p:presentation xmlns:p="http://schemas.openxmlformats.org/presentationml/2006/main" embedTrueTypeFonts="1" saveSubsetFonts="0">
   <p:sldMasterIdLst>
-    <p:sldMasterId xmlns:r="http://schemas.openxmlformats.org/officeDocument/2006/relationships" id="2147483648" r:id="Raad8b359ba0e4461"/>
+    <p:sldMasterId xmlns:r="http://schemas.openxmlformats.org/officeDocument/2006/relationships" id="2147483648" r:id="R5fe03c37d29a44d8"/>
   </p:sldMasterIdLst>
   <p:notesMasterIdLst>
-    <p:notesMasterId xmlns:r="http://schemas.openxmlformats.org/officeDocument/2006/relationships" r:id="Rb4ae807931d0497e"/>
+    <p:notesMasterId xmlns:r="http://schemas.openxmlformats.org/officeDocument/2006/relationships" r:id="R6c35eb6d084f48ad"/>
   </p:notesMasterIdLst>
   <p:sldIdLst>
-    <p:sldId xmlns:r="http://schemas.openxmlformats.org/officeDocument/2006/relationships" id="256" r:id="R7d23ec34d7c34f21"/>
-    <p:sldId xmlns:r="http://schemas.openxmlformats.org/officeDocument/2006/relationships" id="257" r:id="Rc20d65f745334ce3"/>
-    <p:sldId xmlns:r="http://schemas.openxmlformats.org/officeDocument/2006/relationships" id="258" r:id="R2e07cbc2922d4182"/>
-    <p:sldId xmlns:r="http://schemas.openxmlformats.org/officeDocument/2006/relationships" id="259" r:id="R6de1f4390c1c409b"/>
-    <p:sldId xmlns:r="http://schemas.openxmlformats.org/officeDocument/2006/relationships" id="260" r:id="Rf47f9fdd9410444d"/>
-    <p:sldId xmlns:r="http://schemas.openxmlformats.org/officeDocument/2006/relationships" id="261" r:id="Rd4f161a1fa3b402f"/>
-    <p:sldId xmlns:r="http://schemas.openxmlformats.org/officeDocument/2006/relationships" id="262" r:id="R7b52201eff194a85"/>
-    <p:sldId xmlns:r="http://schemas.openxmlformats.org/officeDocument/2006/relationships" id="263" r:id="R2cdccdd31a5e4169"/>
-    <p:sldId xmlns:r="http://schemas.openxmlformats.org/officeDocument/2006/relationships" id="264" r:id="Rf8c51b85f12d4df8"/>
+    <p:sldId xmlns:r="http://schemas.openxmlformats.org/officeDocument/2006/relationships" id="256" r:id="Rd4b616a9de1f4a03"/>
+    <p:sldId xmlns:r="http://schemas.openxmlformats.org/officeDocument/2006/relationships" id="257" r:id="Ra8bb95132f274869"/>
+    <p:sldId xmlns:r="http://schemas.openxmlformats.org/officeDocument/2006/relationships" id="258" r:id="Rff9fbbb302c24aae"/>
+    <p:sldId xmlns:r="http://schemas.openxmlformats.org/officeDocument/2006/relationships" id="259" r:id="R4a287d86ec524ee3"/>
+    <p:sldId xmlns:r="http://schemas.openxmlformats.org/officeDocument/2006/relationships" id="260" r:id="R9b9dce2571f74110"/>
+    <p:sldId xmlns:r="http://schemas.openxmlformats.org/officeDocument/2006/relationships" id="261" r:id="Rdbc6b6b77a3e4b1e"/>
+    <p:sldId xmlns:r="http://schemas.openxmlformats.org/officeDocument/2006/relationships" id="262" r:id="R8c263e72a4a64f67"/>
+    <p:sldId xmlns:r="http://schemas.openxmlformats.org/officeDocument/2006/relationships" id="263" r:id="R24f9253208e2473a"/>
+    <p:sldId xmlns:r="http://schemas.openxmlformats.org/officeDocument/2006/relationships" id="264" r:id="R5b60d7e9a9de419e"/>
   </p:sldIdLst>
   <p:sldSz cx="12192000" cy="6858000"/>
   <p:notesSz cx="6858000" cy="9144000"/>
   <p:embeddedFontLst>
     <p:embeddedFont>
       <p:font typeface="JetBrains Mono"/>
-      <p:regular xmlns:r="http://schemas.openxmlformats.org/officeDocument/2006/relationships" r:id="Rba766e9521fc479a"/>
+      <p:regular xmlns:r="http://schemas.openxmlformats.org/officeDocument/2006/relationships" r:id="R477a054f92b945c2"/>
     </p:embeddedFont>
   </p:embeddedFontLst>
 </p:presentation>
@@ -1071,7 +1071,7 @@
           <p:nvPr/>
         </p:nvPicPr>
         <p:blipFill rotWithShape="1">
-          <a:blip xmlns:r="http://schemas.openxmlformats.org/officeDocument/2006/relationships" xmlns:a="http://schemas.openxmlformats.org/drawingml/2006/main" r:embed="R3e9ec45a40ad46d9"/>
+          <a:blip xmlns:r="http://schemas.openxmlformats.org/officeDocument/2006/relationships" xmlns:a="http://schemas.openxmlformats.org/drawingml/2006/main" r:embed="Rbb55ee32063c4fe9"/>
           <a:stretch xmlns:a="http://schemas.openxmlformats.org/drawingml/2006/main"/>
         </p:blipFill>
         <p:spPr>
@@ -1451,7 +1451,7 @@
           <p:nvPr/>
         </p:nvPicPr>
         <p:blipFill rotWithShape="1">
-          <a:blip xmlns:r="http://schemas.openxmlformats.org/officeDocument/2006/relationships" xmlns:a="http://schemas.openxmlformats.org/drawingml/2006/main" r:embed="R1dcbee2891f24171">
+          <a:blip xmlns:r="http://schemas.openxmlformats.org/officeDocument/2006/relationships" xmlns:a="http://schemas.openxmlformats.org/drawingml/2006/main" r:embed="Rcbb4561251b94615">
             <a:alphaModFix amt="28000"/>
           </a:blip>
           <a:stretch xmlns:a="http://schemas.openxmlformats.org/drawingml/2006/main"/>
@@ -1664,7 +1664,7 @@
           <p:nvPr/>
         </p:nvPicPr>
         <p:blipFill rotWithShape="1">
-          <a:blip xmlns:r="http://schemas.openxmlformats.org/officeDocument/2006/relationships" xmlns:a="http://schemas.openxmlformats.org/drawingml/2006/main" r:embed="R11afe0e23162422e">
+          <a:blip xmlns:r="http://schemas.openxmlformats.org/officeDocument/2006/relationships" xmlns:a="http://schemas.openxmlformats.org/drawingml/2006/main" r:embed="Rffcc9011057a4f1f">
             <a:alphaModFix amt="28000"/>
           </a:blip>
           <a:stretch xmlns:a="http://schemas.openxmlformats.org/drawingml/2006/main"/>
@@ -1899,7 +1899,7 @@
           <p:nvPr/>
         </p:nvPicPr>
         <p:blipFill rotWithShape="1">
-          <a:blip xmlns:r="http://schemas.openxmlformats.org/officeDocument/2006/relationships" xmlns:a="http://schemas.openxmlformats.org/drawingml/2006/main" r:embed="R4a7b7670d7ca43de">
+          <a:blip xmlns:r="http://schemas.openxmlformats.org/officeDocument/2006/relationships" xmlns:a="http://schemas.openxmlformats.org/drawingml/2006/main" r:embed="R9534da39267d4749">
             <a:alphaModFix amt="28000"/>
           </a:blip>
           <a:stretch xmlns:a="http://schemas.openxmlformats.org/drawingml/2006/main"/>
@@ -2176,7 +2176,7 @@
           <p:nvPr/>
         </p:nvPicPr>
         <p:blipFill rotWithShape="1">
-          <a:blip xmlns:r="http://schemas.openxmlformats.org/officeDocument/2006/relationships" xmlns:a="http://schemas.openxmlformats.org/drawingml/2006/main" r:embed="R8a32089cc6654ada">
+          <a:blip xmlns:r="http://schemas.openxmlformats.org/officeDocument/2006/relationships" xmlns:a="http://schemas.openxmlformats.org/drawingml/2006/main" r:embed="R5d063770a68348a9">
             <a:alphaModFix amt="28000"/>
           </a:blip>
           <a:stretch xmlns:a="http://schemas.openxmlformats.org/drawingml/2006/main"/>
@@ -2451,7 +2451,7 @@
           <p:nvPr/>
         </p:nvPicPr>
         <p:blipFill rotWithShape="1">
-          <a:blip xmlns:r="http://schemas.openxmlformats.org/officeDocument/2006/relationships" xmlns:a="http://schemas.openxmlformats.org/drawingml/2006/main" r:embed="R9d55e9e87c2e4828">
+          <a:blip xmlns:r="http://schemas.openxmlformats.org/officeDocument/2006/relationships" xmlns:a="http://schemas.openxmlformats.org/drawingml/2006/main" r:embed="R57f9e8c453b14b05">
             <a:alphaModFix amt="28000"/>
           </a:blip>
           <a:stretch xmlns:a="http://schemas.openxmlformats.org/drawingml/2006/main"/>
@@ -2875,7 +2875,7 @@
           <p:nvPr/>
         </p:nvPicPr>
         <p:blipFill rotWithShape="1">
-          <a:blip xmlns:r="http://schemas.openxmlformats.org/officeDocument/2006/relationships" xmlns:a="http://schemas.openxmlformats.org/drawingml/2006/main" r:embed="Rb1e3322bc7324c47">
+          <a:blip xmlns:r="http://schemas.openxmlformats.org/officeDocument/2006/relationships" xmlns:a="http://schemas.openxmlformats.org/drawingml/2006/main" r:embed="R9a443d2b688f4e14">
             <a:alphaModFix amt="28000"/>
           </a:blip>
           <a:stretch xmlns:a="http://schemas.openxmlformats.org/drawingml/2006/main"/>
@@ -3016,7 +3016,7 @@
           <p:nvPr/>
         </p:nvPicPr>
         <p:blipFill rotWithShape="1">
-          <a:blip xmlns:r="http://schemas.openxmlformats.org/officeDocument/2006/relationships" xmlns:a="http://schemas.openxmlformats.org/drawingml/2006/main" r:embed="Rf944ffd83e6e4697">
+          <a:blip xmlns:r="http://schemas.openxmlformats.org/officeDocument/2006/relationships" xmlns:a="http://schemas.openxmlformats.org/drawingml/2006/main" r:embed="R1cfcb5b90bf24cbc">
             <a:alphaModFix amt="28000"/>
           </a:blip>
           <a:stretch xmlns:a="http://schemas.openxmlformats.org/drawingml/2006/main"/>
@@ -3130,7 +3130,7 @@
           <p:nvPr/>
         </p:nvPicPr>
         <p:blipFill rotWithShape="1">
-          <a:blip xmlns:r="http://schemas.openxmlformats.org/officeDocument/2006/relationships" xmlns:a="http://schemas.openxmlformats.org/drawingml/2006/main" r:embed="R860fcd97ef9b40fc">
+          <a:blip xmlns:r="http://schemas.openxmlformats.org/officeDocument/2006/relationships" xmlns:a="http://schemas.openxmlformats.org/drawingml/2006/main" r:embed="R0af4c7cb8f9f4f75">
             <a:alphaModFix amt="28000"/>
           </a:blip>
           <a:stretch xmlns:a="http://schemas.openxmlformats.org/drawingml/2006/main"/>
@@ -3457,7 +3457,7 @@
           <p:nvPr/>
         </p:nvPicPr>
         <p:blipFill rotWithShape="1">
-          <a:blip xmlns:r="http://schemas.openxmlformats.org/officeDocument/2006/relationships" xmlns:a="http://schemas.openxmlformats.org/drawingml/2006/main" r:embed="R197220c20cae4914">
+          <a:blip xmlns:r="http://schemas.openxmlformats.org/officeDocument/2006/relationships" xmlns:a="http://schemas.openxmlformats.org/drawingml/2006/main" r:embed="Rb123856b23dd4ba1">
             <a:alphaModFix amt="28000"/>
           </a:blip>
           <a:stretch xmlns:a="http://schemas.openxmlformats.org/drawingml/2006/main"/>
@@ -3745,7 +3745,7 @@
           <p:nvPr/>
         </p:nvPicPr>
         <p:blipFill rotWithShape="1">
-          <a:blip xmlns:r="http://schemas.openxmlformats.org/officeDocument/2006/relationships" xmlns:a="http://schemas.openxmlformats.org/drawingml/2006/main" r:embed="R21650c002eb84f05">
+          <a:blip xmlns:r="http://schemas.openxmlformats.org/officeDocument/2006/relationships" xmlns:a="http://schemas.openxmlformats.org/drawingml/2006/main" r:embed="R7f51b23069fe4473">
             <a:alphaModFix amt="28000"/>
           </a:blip>
           <a:stretch xmlns:a="http://schemas.openxmlformats.org/drawingml/2006/main"/>
@@ -3982,17 +3982,17 @@
   </p:cSld>
   <p:clrMap bg1="lt1" tx1="dk1" bg2="lt2" tx2="dk2" accent1="accent1" accent2="accent2" accent3="accent3" accent4="accent4" accent5="accent5" accent6="accent6" hlink="hlink" folHlink="folHlink"/>
   <p:sldLayoutIdLst>
-    <p:sldLayoutId xmlns:r="http://schemas.openxmlformats.org/officeDocument/2006/relationships" id="2147483649" r:id="Rd116eff2628f48ee"/>
-    <p:sldLayoutId xmlns:r="http://schemas.openxmlformats.org/officeDocument/2006/relationships" id="2147483650" r:id="Ra6eebc9c82114bb9"/>
-    <p:sldLayoutId xmlns:r="http://schemas.openxmlformats.org/officeDocument/2006/relationships" id="2147483651" r:id="R269adb412cdd42ef"/>
-    <p:sldLayoutId xmlns:r="http://schemas.openxmlformats.org/officeDocument/2006/relationships" id="2147483652" r:id="R27a5327d2b034ded"/>
-    <p:sldLayoutId xmlns:r="http://schemas.openxmlformats.org/officeDocument/2006/relationships" id="2147483653" r:id="Rb7d1590c227048d3"/>
-    <p:sldLayoutId xmlns:r="http://schemas.openxmlformats.org/officeDocument/2006/relationships" id="2147483654" r:id="Ra044540fb4e644d9"/>
-    <p:sldLayoutId xmlns:r="http://schemas.openxmlformats.org/officeDocument/2006/relationships" id="2147483655" r:id="R497992eba98d4abd"/>
-    <p:sldLayoutId xmlns:r="http://schemas.openxmlformats.org/officeDocument/2006/relationships" id="2147483656" r:id="Rcbed21a8558644e4"/>
-    <p:sldLayoutId xmlns:r="http://schemas.openxmlformats.org/officeDocument/2006/relationships" id="2147483657" r:id="Rb57f028d46ba4a11"/>
-    <p:sldLayoutId xmlns:r="http://schemas.openxmlformats.org/officeDocument/2006/relationships" id="2147483658" r:id="Ra1f407e33c414dd5"/>
-    <p:sldLayoutId xmlns:r="http://schemas.openxmlformats.org/officeDocument/2006/relationships" id="2147483659" r:id="R1ac5757f859e4ecf"/>
+    <p:sldLayoutId xmlns:r="http://schemas.openxmlformats.org/officeDocument/2006/relationships" id="2147483649" r:id="Rc0351ac7dbca4256"/>
+    <p:sldLayoutId xmlns:r="http://schemas.openxmlformats.org/officeDocument/2006/relationships" id="2147483650" r:id="Re6cd73feaee341d7"/>
+    <p:sldLayoutId xmlns:r="http://schemas.openxmlformats.org/officeDocument/2006/relationships" id="2147483651" r:id="Rd199f14e25d24c92"/>
+    <p:sldLayoutId xmlns:r="http://schemas.openxmlformats.org/officeDocument/2006/relationships" id="2147483652" r:id="Rcff4866724514919"/>
+    <p:sldLayoutId xmlns:r="http://schemas.openxmlformats.org/officeDocument/2006/relationships" id="2147483653" r:id="R57158e7a5ea94f19"/>
+    <p:sldLayoutId xmlns:r="http://schemas.openxmlformats.org/officeDocument/2006/relationships" id="2147483654" r:id="R861cc8acf3d94f4e"/>
+    <p:sldLayoutId xmlns:r="http://schemas.openxmlformats.org/officeDocument/2006/relationships" id="2147483655" r:id="R9890ce925d3f4838"/>
+    <p:sldLayoutId xmlns:r="http://schemas.openxmlformats.org/officeDocument/2006/relationships" id="2147483656" r:id="Ra7444683f62b4d91"/>
+    <p:sldLayoutId xmlns:r="http://schemas.openxmlformats.org/officeDocument/2006/relationships" id="2147483657" r:id="R60286c5eb56a4082"/>
+    <p:sldLayoutId xmlns:r="http://schemas.openxmlformats.org/officeDocument/2006/relationships" id="2147483658" r:id="Ra2ba984c72f94b21"/>
+    <p:sldLayoutId xmlns:r="http://schemas.openxmlformats.org/officeDocument/2006/relationships" id="2147483659" r:id="Ra86136ea93194167"/>
   </p:sldLayoutIdLst>
   <p:hf hdr="0" ftr="0" dt="0"/>
   <p:txStyles>
@@ -8423,29 +8423,7 @@
                 <a:ea typeface="Calibri"/>
                 <a:cs typeface="Calibri"/>
               </a:rPr>
-              <a:t>, update menu route 2, and make choice 2 with value 6 display </a:t>
-            </a:r>
-            <a:r>
-              <a:rPr sz="2400" b="0">
-                <a:solidFill>
-                  <a:srgbClr val="067D17"/>
-                </a:solidFill>
-                <a:latin typeface="JetBrains Mono"/>
-                <a:ea typeface="JetBrains Mono"/>
-                <a:cs typeface="JetBrains Mono"/>
-              </a:rPr>
-              <a:t>"Result:"</a:t>
-            </a:r>
-            <a:r>
-              <a:rPr sz="2400" b="0">
-                <a:solidFill>
-                  <a:srgbClr val="080808"/>
-                </a:solidFill>
-                <a:latin typeface="Calibri"/>
-                <a:ea typeface="Calibri"/>
-                <a:cs typeface="Calibri"/>
-              </a:rPr>
-              <a:t> 18.</a:t>
+              <a:t>, update menu route 2, and make choice 2 with value 6 display Result: 18.</a:t>
             </a:r>
           </a:p>
         </p:txBody>

--- a/Mapped Curriculum Lessons/Grade 8/Lesson 34 - Several Functions/Several Functions - Slides.pptx
+++ b/Mapped Curriculum Lessons/Grade 8/Lesson 34 - Several Functions/Several Functions - Slides.pptx
@@ -2,28 +2,28 @@
 <file path=ppt/presentation.xml><?xml version="1.0" encoding="utf-8"?>
 <p:presentation xmlns:p="http://schemas.openxmlformats.org/presentationml/2006/main" embedTrueTypeFonts="1" saveSubsetFonts="0">
   <p:sldMasterIdLst>
-    <p:sldMasterId xmlns:r="http://schemas.openxmlformats.org/officeDocument/2006/relationships" id="2147483648" r:id="R5fe03c37d29a44d8"/>
+    <p:sldMasterId xmlns:r="http://schemas.openxmlformats.org/officeDocument/2006/relationships" id="2147483648" r:id="R45ffe869a63f4c96"/>
   </p:sldMasterIdLst>
   <p:notesMasterIdLst>
-    <p:notesMasterId xmlns:r="http://schemas.openxmlformats.org/officeDocument/2006/relationships" r:id="R6c35eb6d084f48ad"/>
+    <p:notesMasterId xmlns:r="http://schemas.openxmlformats.org/officeDocument/2006/relationships" r:id="Re5bc289951e94848"/>
   </p:notesMasterIdLst>
   <p:sldIdLst>
-    <p:sldId xmlns:r="http://schemas.openxmlformats.org/officeDocument/2006/relationships" id="256" r:id="Rd4b616a9de1f4a03"/>
-    <p:sldId xmlns:r="http://schemas.openxmlformats.org/officeDocument/2006/relationships" id="257" r:id="Ra8bb95132f274869"/>
-    <p:sldId xmlns:r="http://schemas.openxmlformats.org/officeDocument/2006/relationships" id="258" r:id="Rff9fbbb302c24aae"/>
-    <p:sldId xmlns:r="http://schemas.openxmlformats.org/officeDocument/2006/relationships" id="259" r:id="R4a287d86ec524ee3"/>
-    <p:sldId xmlns:r="http://schemas.openxmlformats.org/officeDocument/2006/relationships" id="260" r:id="R9b9dce2571f74110"/>
-    <p:sldId xmlns:r="http://schemas.openxmlformats.org/officeDocument/2006/relationships" id="261" r:id="Rdbc6b6b77a3e4b1e"/>
-    <p:sldId xmlns:r="http://schemas.openxmlformats.org/officeDocument/2006/relationships" id="262" r:id="R8c263e72a4a64f67"/>
-    <p:sldId xmlns:r="http://schemas.openxmlformats.org/officeDocument/2006/relationships" id="263" r:id="R24f9253208e2473a"/>
-    <p:sldId xmlns:r="http://schemas.openxmlformats.org/officeDocument/2006/relationships" id="264" r:id="R5b60d7e9a9de419e"/>
+    <p:sldId xmlns:r="http://schemas.openxmlformats.org/officeDocument/2006/relationships" id="256" r:id="Rbdfa514a8d144a2c"/>
+    <p:sldId xmlns:r="http://schemas.openxmlformats.org/officeDocument/2006/relationships" id="257" r:id="R0459351472cb472e"/>
+    <p:sldId xmlns:r="http://schemas.openxmlformats.org/officeDocument/2006/relationships" id="258" r:id="R345b265596ce4054"/>
+    <p:sldId xmlns:r="http://schemas.openxmlformats.org/officeDocument/2006/relationships" id="259" r:id="Rc14e0d567411460d"/>
+    <p:sldId xmlns:r="http://schemas.openxmlformats.org/officeDocument/2006/relationships" id="260" r:id="R329648580a574155"/>
+    <p:sldId xmlns:r="http://schemas.openxmlformats.org/officeDocument/2006/relationships" id="261" r:id="Ra1b31507783646c6"/>
+    <p:sldId xmlns:r="http://schemas.openxmlformats.org/officeDocument/2006/relationships" id="262" r:id="Rb6472a912367452d"/>
+    <p:sldId xmlns:r="http://schemas.openxmlformats.org/officeDocument/2006/relationships" id="263" r:id="Rf248d7f78fa64101"/>
+    <p:sldId xmlns:r="http://schemas.openxmlformats.org/officeDocument/2006/relationships" id="264" r:id="R44e48fe08a8e45cc"/>
   </p:sldIdLst>
   <p:sldSz cx="12192000" cy="6858000"/>
   <p:notesSz cx="6858000" cy="9144000"/>
   <p:embeddedFontLst>
     <p:embeddedFont>
       <p:font typeface="JetBrains Mono"/>
-      <p:regular xmlns:r="http://schemas.openxmlformats.org/officeDocument/2006/relationships" r:id="R477a054f92b945c2"/>
+      <p:regular xmlns:r="http://schemas.openxmlformats.org/officeDocument/2006/relationships" r:id="R94ee8ff948a14d13"/>
     </p:embeddedFont>
   </p:embeddedFontLst>
 </p:presentation>
@@ -1071,7 +1071,7 @@
           <p:nvPr/>
         </p:nvPicPr>
         <p:blipFill rotWithShape="1">
-          <a:blip xmlns:r="http://schemas.openxmlformats.org/officeDocument/2006/relationships" xmlns:a="http://schemas.openxmlformats.org/drawingml/2006/main" r:embed="Rbb55ee32063c4fe9"/>
+          <a:blip xmlns:r="http://schemas.openxmlformats.org/officeDocument/2006/relationships" xmlns:a="http://schemas.openxmlformats.org/drawingml/2006/main" r:embed="R57054305f33946a8"/>
           <a:stretch xmlns:a="http://schemas.openxmlformats.org/drawingml/2006/main"/>
         </p:blipFill>
         <p:spPr>
@@ -1451,7 +1451,7 @@
           <p:nvPr/>
         </p:nvPicPr>
         <p:blipFill rotWithShape="1">
-          <a:blip xmlns:r="http://schemas.openxmlformats.org/officeDocument/2006/relationships" xmlns:a="http://schemas.openxmlformats.org/drawingml/2006/main" r:embed="Rcbb4561251b94615">
+          <a:blip xmlns:r="http://schemas.openxmlformats.org/officeDocument/2006/relationships" xmlns:a="http://schemas.openxmlformats.org/drawingml/2006/main" r:embed="R0ba15e93714444e4">
             <a:alphaModFix amt="28000"/>
           </a:blip>
           <a:stretch xmlns:a="http://schemas.openxmlformats.org/drawingml/2006/main"/>
@@ -1664,7 +1664,7 @@
           <p:nvPr/>
         </p:nvPicPr>
         <p:blipFill rotWithShape="1">
-          <a:blip xmlns:r="http://schemas.openxmlformats.org/officeDocument/2006/relationships" xmlns:a="http://schemas.openxmlformats.org/drawingml/2006/main" r:embed="Rffcc9011057a4f1f">
+          <a:blip xmlns:r="http://schemas.openxmlformats.org/officeDocument/2006/relationships" xmlns:a="http://schemas.openxmlformats.org/drawingml/2006/main" r:embed="R65ac0b43aa5f45aa">
             <a:alphaModFix amt="28000"/>
           </a:blip>
           <a:stretch xmlns:a="http://schemas.openxmlformats.org/drawingml/2006/main"/>
@@ -1899,7 +1899,7 @@
           <p:nvPr/>
         </p:nvPicPr>
         <p:blipFill rotWithShape="1">
-          <a:blip xmlns:r="http://schemas.openxmlformats.org/officeDocument/2006/relationships" xmlns:a="http://schemas.openxmlformats.org/drawingml/2006/main" r:embed="R9534da39267d4749">
+          <a:blip xmlns:r="http://schemas.openxmlformats.org/officeDocument/2006/relationships" xmlns:a="http://schemas.openxmlformats.org/drawingml/2006/main" r:embed="Rff00d1551db14cee">
             <a:alphaModFix amt="28000"/>
           </a:blip>
           <a:stretch xmlns:a="http://schemas.openxmlformats.org/drawingml/2006/main"/>
@@ -2176,7 +2176,7 @@
           <p:nvPr/>
         </p:nvPicPr>
         <p:blipFill rotWithShape="1">
-          <a:blip xmlns:r="http://schemas.openxmlformats.org/officeDocument/2006/relationships" xmlns:a="http://schemas.openxmlformats.org/drawingml/2006/main" r:embed="R5d063770a68348a9">
+          <a:blip xmlns:r="http://schemas.openxmlformats.org/officeDocument/2006/relationships" xmlns:a="http://schemas.openxmlformats.org/drawingml/2006/main" r:embed="R2d8469a7d7c84a49">
             <a:alphaModFix amt="28000"/>
           </a:blip>
           <a:stretch xmlns:a="http://schemas.openxmlformats.org/drawingml/2006/main"/>
@@ -2451,7 +2451,7 @@
           <p:nvPr/>
         </p:nvPicPr>
         <p:blipFill rotWithShape="1">
-          <a:blip xmlns:r="http://schemas.openxmlformats.org/officeDocument/2006/relationships" xmlns:a="http://schemas.openxmlformats.org/drawingml/2006/main" r:embed="R57f9e8c453b14b05">
+          <a:blip xmlns:r="http://schemas.openxmlformats.org/officeDocument/2006/relationships" xmlns:a="http://schemas.openxmlformats.org/drawingml/2006/main" r:embed="R8a2078b4468b4208">
             <a:alphaModFix amt="28000"/>
           </a:blip>
           <a:stretch xmlns:a="http://schemas.openxmlformats.org/drawingml/2006/main"/>
@@ -2875,7 +2875,7 @@
           <p:nvPr/>
         </p:nvPicPr>
         <p:blipFill rotWithShape="1">
-          <a:blip xmlns:r="http://schemas.openxmlformats.org/officeDocument/2006/relationships" xmlns:a="http://schemas.openxmlformats.org/drawingml/2006/main" r:embed="R9a443d2b688f4e14">
+          <a:blip xmlns:r="http://schemas.openxmlformats.org/officeDocument/2006/relationships" xmlns:a="http://schemas.openxmlformats.org/drawingml/2006/main" r:embed="R2008bbdc780343f2">
             <a:alphaModFix amt="28000"/>
           </a:blip>
           <a:stretch xmlns:a="http://schemas.openxmlformats.org/drawingml/2006/main"/>
@@ -3016,7 +3016,7 @@
           <p:nvPr/>
         </p:nvPicPr>
         <p:blipFill rotWithShape="1">
-          <a:blip xmlns:r="http://schemas.openxmlformats.org/officeDocument/2006/relationships" xmlns:a="http://schemas.openxmlformats.org/drawingml/2006/main" r:embed="R1cfcb5b90bf24cbc">
+          <a:blip xmlns:r="http://schemas.openxmlformats.org/officeDocument/2006/relationships" xmlns:a="http://schemas.openxmlformats.org/drawingml/2006/main" r:embed="R253b84dc1b5b4374">
             <a:alphaModFix amt="28000"/>
           </a:blip>
           <a:stretch xmlns:a="http://schemas.openxmlformats.org/drawingml/2006/main"/>
@@ -3130,7 +3130,7 @@
           <p:nvPr/>
         </p:nvPicPr>
         <p:blipFill rotWithShape="1">
-          <a:blip xmlns:r="http://schemas.openxmlformats.org/officeDocument/2006/relationships" xmlns:a="http://schemas.openxmlformats.org/drawingml/2006/main" r:embed="R0af4c7cb8f9f4f75">
+          <a:blip xmlns:r="http://schemas.openxmlformats.org/officeDocument/2006/relationships" xmlns:a="http://schemas.openxmlformats.org/drawingml/2006/main" r:embed="R7a48d4b586fe426c">
             <a:alphaModFix amt="28000"/>
           </a:blip>
           <a:stretch xmlns:a="http://schemas.openxmlformats.org/drawingml/2006/main"/>
@@ -3457,7 +3457,7 @@
           <p:nvPr/>
         </p:nvPicPr>
         <p:blipFill rotWithShape="1">
-          <a:blip xmlns:r="http://schemas.openxmlformats.org/officeDocument/2006/relationships" xmlns:a="http://schemas.openxmlformats.org/drawingml/2006/main" r:embed="Rb123856b23dd4ba1">
+          <a:blip xmlns:r="http://schemas.openxmlformats.org/officeDocument/2006/relationships" xmlns:a="http://schemas.openxmlformats.org/drawingml/2006/main" r:embed="R0434315b86c7498f">
             <a:alphaModFix amt="28000"/>
           </a:blip>
           <a:stretch xmlns:a="http://schemas.openxmlformats.org/drawingml/2006/main"/>
@@ -3745,7 +3745,7 @@
           <p:nvPr/>
         </p:nvPicPr>
         <p:blipFill rotWithShape="1">
-          <a:blip xmlns:r="http://schemas.openxmlformats.org/officeDocument/2006/relationships" xmlns:a="http://schemas.openxmlformats.org/drawingml/2006/main" r:embed="R7f51b23069fe4473">
+          <a:blip xmlns:r="http://schemas.openxmlformats.org/officeDocument/2006/relationships" xmlns:a="http://schemas.openxmlformats.org/drawingml/2006/main" r:embed="R7cce93803806475c">
             <a:alphaModFix amt="28000"/>
           </a:blip>
           <a:stretch xmlns:a="http://schemas.openxmlformats.org/drawingml/2006/main"/>
@@ -3982,17 +3982,17 @@
   </p:cSld>
   <p:clrMap bg1="lt1" tx1="dk1" bg2="lt2" tx2="dk2" accent1="accent1" accent2="accent2" accent3="accent3" accent4="accent4" accent5="accent5" accent6="accent6" hlink="hlink" folHlink="folHlink"/>
   <p:sldLayoutIdLst>
-    <p:sldLayoutId xmlns:r="http://schemas.openxmlformats.org/officeDocument/2006/relationships" id="2147483649" r:id="Rc0351ac7dbca4256"/>
-    <p:sldLayoutId xmlns:r="http://schemas.openxmlformats.org/officeDocument/2006/relationships" id="2147483650" r:id="Re6cd73feaee341d7"/>
-    <p:sldLayoutId xmlns:r="http://schemas.openxmlformats.org/officeDocument/2006/relationships" id="2147483651" r:id="Rd199f14e25d24c92"/>
-    <p:sldLayoutId xmlns:r="http://schemas.openxmlformats.org/officeDocument/2006/relationships" id="2147483652" r:id="Rcff4866724514919"/>
-    <p:sldLayoutId xmlns:r="http://schemas.openxmlformats.org/officeDocument/2006/relationships" id="2147483653" r:id="R57158e7a5ea94f19"/>
-    <p:sldLayoutId xmlns:r="http://schemas.openxmlformats.org/officeDocument/2006/relationships" id="2147483654" r:id="R861cc8acf3d94f4e"/>
-    <p:sldLayoutId xmlns:r="http://schemas.openxmlformats.org/officeDocument/2006/relationships" id="2147483655" r:id="R9890ce925d3f4838"/>
-    <p:sldLayoutId xmlns:r="http://schemas.openxmlformats.org/officeDocument/2006/relationships" id="2147483656" r:id="Ra7444683f62b4d91"/>
-    <p:sldLayoutId xmlns:r="http://schemas.openxmlformats.org/officeDocument/2006/relationships" id="2147483657" r:id="R60286c5eb56a4082"/>
-    <p:sldLayoutId xmlns:r="http://schemas.openxmlformats.org/officeDocument/2006/relationships" id="2147483658" r:id="Ra2ba984c72f94b21"/>
-    <p:sldLayoutId xmlns:r="http://schemas.openxmlformats.org/officeDocument/2006/relationships" id="2147483659" r:id="Ra86136ea93194167"/>
+    <p:sldLayoutId xmlns:r="http://schemas.openxmlformats.org/officeDocument/2006/relationships" id="2147483649" r:id="Rf2946a541e284372"/>
+    <p:sldLayoutId xmlns:r="http://schemas.openxmlformats.org/officeDocument/2006/relationships" id="2147483650" r:id="R3fa25fb34be84239"/>
+    <p:sldLayoutId xmlns:r="http://schemas.openxmlformats.org/officeDocument/2006/relationships" id="2147483651" r:id="R85c9ae4b4fec4318"/>
+    <p:sldLayoutId xmlns:r="http://schemas.openxmlformats.org/officeDocument/2006/relationships" id="2147483652" r:id="R1b2b0146f99f4760"/>
+    <p:sldLayoutId xmlns:r="http://schemas.openxmlformats.org/officeDocument/2006/relationships" id="2147483653" r:id="R53b944c9f2334b5c"/>
+    <p:sldLayoutId xmlns:r="http://schemas.openxmlformats.org/officeDocument/2006/relationships" id="2147483654" r:id="R99e71ef4f61c4372"/>
+    <p:sldLayoutId xmlns:r="http://schemas.openxmlformats.org/officeDocument/2006/relationships" id="2147483655" r:id="R077a04e139c74bc0"/>
+    <p:sldLayoutId xmlns:r="http://schemas.openxmlformats.org/officeDocument/2006/relationships" id="2147483656" r:id="R99749ca92d6344ae"/>
+    <p:sldLayoutId xmlns:r="http://schemas.openxmlformats.org/officeDocument/2006/relationships" id="2147483657" r:id="Rb4aee104bf524c4f"/>
+    <p:sldLayoutId xmlns:r="http://schemas.openxmlformats.org/officeDocument/2006/relationships" id="2147483658" r:id="R3f662266912e4887"/>
+    <p:sldLayoutId xmlns:r="http://schemas.openxmlformats.org/officeDocument/2006/relationships" id="2147483659" r:id="Rb9df7c9c3d8a461b"/>
   </p:sldLayoutIdLst>
   <p:hf hdr="0" ftr="0" dt="0"/>
   <p:txStyles>
@@ -8379,7 +8379,7 @@
                 <a:ea typeface="Calibri"/>
                 <a:cs typeface="Calibri"/>
               </a:rPr>
-              <a:t>Change </a:t>
+              <a:t>Rename </a:t>
             </a:r>
             <a:r>
               <a:rPr sz="2400" b="0">
@@ -8390,7 +8390,7 @@
                 <a:ea typeface="JetBrains Mono"/>
                 <a:cs typeface="JetBrains Mono"/>
               </a:rPr>
-              <a:t>square()</a:t>
+              <a:t>square</a:t>
             </a:r>
             <a:r>
               <a:rPr sz="2400" b="0">
@@ -8401,7 +8401,7 @@
                 <a:ea typeface="Calibri"/>
                 <a:cs typeface="Calibri"/>
               </a:rPr>
-              <a:t> into </a:t>
+              <a:t>(number) to </a:t>
             </a:r>
             <a:r>
               <a:rPr sz="2400" b="0">
@@ -8412,7 +8412,7 @@
                 <a:ea typeface="JetBrains Mono"/>
                 <a:cs typeface="JetBrains Mono"/>
               </a:rPr>
-              <a:t>triple()</a:t>
+              <a:t>triple</a:t>
             </a:r>
             <a:r>
               <a:rPr sz="2400" b="0">
@@ -8423,7 +8423,161 @@
                 <a:ea typeface="Calibri"/>
                 <a:cs typeface="Calibri"/>
               </a:rPr>
-              <a:t>, update menu route 2, and make choice 2 with value 6 display Result: 18.</a:t>
+              <a:t>(number) and </a:t>
+            </a:r>
+            <a:r>
+              <a:rPr sz="2400" b="0">
+                <a:solidFill>
+                  <a:srgbClr val="1750EB"/>
+                </a:solidFill>
+                <a:latin typeface="JetBrains Mono"/>
+                <a:ea typeface="JetBrains Mono"/>
+                <a:cs typeface="JetBrains Mono"/>
+              </a:rPr>
+              <a:t>return</a:t>
+            </a:r>
+            <a:r>
+              <a:rPr sz="2400" b="0">
+                <a:solidFill>
+                  <a:srgbClr val="080808"/>
+                </a:solidFill>
+                <a:latin typeface="Calibri"/>
+                <a:ea typeface="Calibri"/>
+                <a:cs typeface="Calibri"/>
+              </a:rPr>
+              <a:t> number * 3. Change menu option 2 from </a:t>
+            </a:r>
+            <a:r>
+              <a:rPr sz="2400" b="0">
+                <a:solidFill>
+                  <a:srgbClr val="067D17"/>
+                </a:solidFill>
+                <a:latin typeface="JetBrains Mono"/>
+                <a:ea typeface="JetBrains Mono"/>
+                <a:cs typeface="JetBrains Mono"/>
+              </a:rPr>
+              <a:t>"square"</a:t>
+            </a:r>
+            <a:r>
+              <a:rPr sz="2400" b="0">
+                <a:solidFill>
+                  <a:srgbClr val="080808"/>
+                </a:solidFill>
+                <a:latin typeface="Calibri"/>
+                <a:ea typeface="Calibri"/>
+                <a:cs typeface="Calibri"/>
+              </a:rPr>
+              <a:t> to </a:t>
+            </a:r>
+            <a:r>
+              <a:rPr sz="2400" b="0">
+                <a:solidFill>
+                  <a:srgbClr val="067D17"/>
+                </a:solidFill>
+                <a:latin typeface="JetBrains Mono"/>
+                <a:ea typeface="JetBrains Mono"/>
+                <a:cs typeface="JetBrains Mono"/>
+              </a:rPr>
+              <a:t>"triple"</a:t>
+            </a:r>
+            <a:r>
+              <a:rPr sz="2400" b="0">
+                <a:solidFill>
+                  <a:srgbClr val="080808"/>
+                </a:solidFill>
+                <a:latin typeface="Calibri"/>
+                <a:ea typeface="Calibri"/>
+                <a:cs typeface="Calibri"/>
+              </a:rPr>
+              <a:t>, then call </a:t>
+            </a:r>
+            <a:r>
+              <a:rPr sz="2400" b="0">
+                <a:solidFill>
+                  <a:srgbClr val="1750EB"/>
+                </a:solidFill>
+                <a:latin typeface="JetBrains Mono"/>
+                <a:ea typeface="JetBrains Mono"/>
+                <a:cs typeface="JetBrains Mono"/>
+              </a:rPr>
+              <a:t>triple</a:t>
+            </a:r>
+            <a:r>
+              <a:rPr sz="2400" b="0">
+                <a:solidFill>
+                  <a:srgbClr val="080808"/>
+                </a:solidFill>
+                <a:latin typeface="Calibri"/>
+                <a:ea typeface="Calibri"/>
+                <a:cs typeface="Calibri"/>
+              </a:rPr>
+              <a:t>(value) when [choice] is </a:t>
+            </a:r>
+            <a:r>
+              <a:rPr sz="2400" b="0">
+                <a:solidFill>
+                  <a:srgbClr val="067D17"/>
+                </a:solidFill>
+                <a:latin typeface="JetBrains Mono"/>
+                <a:ea typeface="JetBrains Mono"/>
+                <a:cs typeface="JetBrains Mono"/>
+              </a:rPr>
+              <a:t>"2"</a:t>
+            </a:r>
+            <a:r>
+              <a:rPr sz="2400" b="0">
+                <a:solidFill>
+                  <a:srgbClr val="080808"/>
+                </a:solidFill>
+                <a:latin typeface="Calibri"/>
+                <a:ea typeface="Calibri"/>
+                <a:cs typeface="Calibri"/>
+              </a:rPr>
+              <a:t>. Test </a:t>
+            </a:r>
+            <a:r>
+              <a:rPr sz="2400" b="0">
+                <a:solidFill>
+                  <a:srgbClr val="067D17"/>
+                </a:solidFill>
+                <a:latin typeface="JetBrains Mono"/>
+                <a:ea typeface="JetBrains Mono"/>
+                <a:cs typeface="JetBrains Mono"/>
+              </a:rPr>
+              <a:t>"2"</a:t>
+            </a:r>
+            <a:r>
+              <a:rPr sz="2400" b="0">
+                <a:solidFill>
+                  <a:srgbClr val="080808"/>
+                </a:solidFill>
+                <a:latin typeface="Calibri"/>
+                <a:ea typeface="Calibri"/>
+                <a:cs typeface="Calibri"/>
+              </a:rPr>
+              <a:t> and 6; display </a:t>
+            </a:r>
+            <a:r>
+              <a:rPr sz="2400" b="0">
+                <a:solidFill>
+                  <a:srgbClr val="067D17"/>
+                </a:solidFill>
+                <a:latin typeface="JetBrains Mono"/>
+                <a:ea typeface="JetBrains Mono"/>
+                <a:cs typeface="JetBrains Mono"/>
+              </a:rPr>
+              <a:t>"Result: 18"</a:t>
+            </a:r>
+            <a:r>
+              <a:rPr sz="2400" b="0">
+                <a:solidFill>
+                  <a:srgbClr val="080808"/>
+                </a:solidFill>
+                <a:latin typeface="Calibri"/>
+                <a:ea typeface="Calibri"/>
+                <a:cs typeface="Calibri"/>
+              </a:rPr>
+              <a:t>.</a:t>
             </a:r>
           </a:p>
         </p:txBody>
@@ -9382,7 +9536,7 @@
                 <a:ea typeface="Calibri"/>
                 <a:cs typeface="Calibri"/>
               </a:rPr>
-              <a:t>Add a third function called </a:t>
+              <a:t>Add a function called </a:t>
             </a:r>
             <a:r>
               <a:rPr sz="2400" b="0">
@@ -9404,7 +9558,216 @@
                 <a:ea typeface="Calibri"/>
                 <a:cs typeface="Calibri"/>
               </a:rPr>
-              <a:t>(number) that returns number / 2. Add menu route 3 and an invalid-choice message. Test 3 with 5 and x with 5.</a:t>
+              <a:t>(number) that returns number / 2. Add </a:t>
+            </a:r>
+            <a:r>
+              <a:rPr sz="2400" b="0">
+                <a:solidFill>
+                  <a:srgbClr val="067D17"/>
+                </a:solidFill>
+                <a:latin typeface="JetBrains Mono"/>
+                <a:ea typeface="JetBrains Mono"/>
+                <a:cs typeface="JetBrains Mono"/>
+              </a:rPr>
+              <a:t>"3: half"</a:t>
+            </a:r>
+            <a:r>
+              <a:rPr sz="2400" b="0">
+                <a:solidFill>
+                  <a:srgbClr val="080808"/>
+                </a:solidFill>
+                <a:latin typeface="Calibri"/>
+                <a:ea typeface="Calibri"/>
+                <a:cs typeface="Calibri"/>
+              </a:rPr>
+              <a:t> to the menu and use an </a:t>
+            </a:r>
+            <a:r>
+              <a:rPr sz="2400" b="0">
+                <a:solidFill>
+                  <a:srgbClr val="1750EB"/>
+                </a:solidFill>
+                <a:latin typeface="JetBrains Mono"/>
+                <a:ea typeface="JetBrains Mono"/>
+                <a:cs typeface="JetBrains Mono"/>
+              </a:rPr>
+              <a:t>elif</a:t>
+            </a:r>
+            <a:r>
+              <a:rPr sz="2400" b="0">
+                <a:solidFill>
+                  <a:srgbClr val="080808"/>
+                </a:solidFill>
+                <a:latin typeface="Calibri"/>
+                <a:ea typeface="Calibri"/>
+                <a:cs typeface="Calibri"/>
+              </a:rPr>
+              <a:t> condition to call </a:t>
+            </a:r>
+            <a:r>
+              <a:rPr sz="2400" b="0">
+                <a:solidFill>
+                  <a:srgbClr val="1750EB"/>
+                </a:solidFill>
+                <a:latin typeface="JetBrains Mono"/>
+                <a:ea typeface="JetBrains Mono"/>
+                <a:cs typeface="JetBrains Mono"/>
+              </a:rPr>
+              <a:t>half</a:t>
+            </a:r>
+            <a:r>
+              <a:rPr sz="2400" b="0">
+                <a:solidFill>
+                  <a:srgbClr val="080808"/>
+                </a:solidFill>
+                <a:latin typeface="Calibri"/>
+                <a:ea typeface="Calibri"/>
+                <a:cs typeface="Calibri"/>
+              </a:rPr>
+              <a:t>(value) when [choice] is </a:t>
+            </a:r>
+            <a:r>
+              <a:rPr sz="2400" b="0">
+                <a:solidFill>
+                  <a:srgbClr val="067D17"/>
+                </a:solidFill>
+                <a:latin typeface="JetBrains Mono"/>
+                <a:ea typeface="JetBrains Mono"/>
+                <a:cs typeface="JetBrains Mono"/>
+              </a:rPr>
+              <a:t>"3"</a:t>
+            </a:r>
+            <a:r>
+              <a:rPr sz="2400" b="0">
+                <a:solidFill>
+                  <a:srgbClr val="080808"/>
+                </a:solidFill>
+                <a:latin typeface="Calibri"/>
+                <a:ea typeface="Calibri"/>
+                <a:cs typeface="Calibri"/>
+              </a:rPr>
+              <a:t>. Add an </a:t>
+            </a:r>
+            <a:r>
+              <a:rPr sz="2400" b="0">
+                <a:solidFill>
+                  <a:srgbClr val="1750EB"/>
+                </a:solidFill>
+                <a:latin typeface="JetBrains Mono"/>
+                <a:ea typeface="JetBrains Mono"/>
+                <a:cs typeface="JetBrains Mono"/>
+              </a:rPr>
+              <a:t>else</a:t>
+            </a:r>
+            <a:r>
+              <a:rPr sz="2400" b="0">
+                <a:solidFill>
+                  <a:srgbClr val="080808"/>
+                </a:solidFill>
+                <a:latin typeface="Calibri"/>
+                <a:ea typeface="Calibri"/>
+                <a:cs typeface="Calibri"/>
+              </a:rPr>
+              <a:t> block that displays </a:t>
+            </a:r>
+            <a:r>
+              <a:rPr sz="2400" b="0">
+                <a:solidFill>
+                  <a:srgbClr val="067D17"/>
+                </a:solidFill>
+                <a:latin typeface="JetBrains Mono"/>
+                <a:ea typeface="JetBrains Mono"/>
+                <a:cs typeface="JetBrains Mono"/>
+              </a:rPr>
+              <a:t>"Invalid choice."</a:t>
+            </a:r>
+            <a:r>
+              <a:rPr sz="2400" b="0">
+                <a:solidFill>
+                  <a:srgbClr val="080808"/>
+                </a:solidFill>
+                <a:latin typeface="Calibri"/>
+                <a:ea typeface="Calibri"/>
+                <a:cs typeface="Calibri"/>
+              </a:rPr>
+              <a:t> Test </a:t>
+            </a:r>
+            <a:r>
+              <a:rPr sz="2400" b="0">
+                <a:solidFill>
+                  <a:srgbClr val="067D17"/>
+                </a:solidFill>
+                <a:latin typeface="JetBrains Mono"/>
+                <a:ea typeface="JetBrains Mono"/>
+                <a:cs typeface="JetBrains Mono"/>
+              </a:rPr>
+              <a:t>"3"</a:t>
+            </a:r>
+            <a:r>
+              <a:rPr sz="2400" b="0">
+                <a:solidFill>
+                  <a:srgbClr val="080808"/>
+                </a:solidFill>
+                <a:latin typeface="Calibri"/>
+                <a:ea typeface="Calibri"/>
+                <a:cs typeface="Calibri"/>
+              </a:rPr>
+              <a:t> and 5; display </a:t>
+            </a:r>
+            <a:r>
+              <a:rPr sz="2400" b="0">
+                <a:solidFill>
+                  <a:srgbClr val="067D17"/>
+                </a:solidFill>
+                <a:latin typeface="JetBrains Mono"/>
+                <a:ea typeface="JetBrains Mono"/>
+                <a:cs typeface="JetBrains Mono"/>
+              </a:rPr>
+              <a:t>"Result: 2.5"</a:t>
+            </a:r>
+            <a:r>
+              <a:rPr sz="2400" b="0">
+                <a:solidFill>
+                  <a:srgbClr val="080808"/>
+                </a:solidFill>
+                <a:latin typeface="Calibri"/>
+                <a:ea typeface="Calibri"/>
+                <a:cs typeface="Calibri"/>
+              </a:rPr>
+              <a:t>. Test </a:t>
+            </a:r>
+            <a:r>
+              <a:rPr sz="2400" b="0">
+                <a:solidFill>
+                  <a:srgbClr val="067D17"/>
+                </a:solidFill>
+                <a:latin typeface="JetBrains Mono"/>
+                <a:ea typeface="JetBrains Mono"/>
+                <a:cs typeface="JetBrains Mono"/>
+              </a:rPr>
+              <a:t>"x"</a:t>
+            </a:r>
+            <a:r>
+              <a:rPr sz="2400" b="0">
+                <a:solidFill>
+                  <a:srgbClr val="080808"/>
+                </a:solidFill>
+                <a:latin typeface="Calibri"/>
+                <a:ea typeface="Calibri"/>
+                <a:cs typeface="Calibri"/>
+              </a:rPr>
+              <a:t> and 5; display </a:t>
+            </a:r>
+            <a:r>
+              <a:rPr sz="2400" b="0">
+                <a:solidFill>
+                  <a:srgbClr val="067D17"/>
+                </a:solidFill>
+                <a:latin typeface="JetBrains Mono"/>
+                <a:ea typeface="JetBrains Mono"/>
+                <a:cs typeface="JetBrains Mono"/>
+              </a:rPr>
+              <a:t>"Invalid choice."</a:t>
             </a:r>
           </a:p>
         </p:txBody>
@@ -10344,7 +10707,7 @@
         </p:spPr>
         <p:txBody>
           <a:bodyPr xmlns:a="http://schemas.openxmlformats.org/drawingml/2006/main">
-            <a:normAutofit fontScale="100000"/>
+            <a:normAutofit fontScale="76855"/>
           </a:bodyPr>
           <a:lstStyle xmlns:a="http://schemas.openxmlformats.org/drawingml/2006/main"/>
           <a:p xmlns:a="http://schemas.openxmlformats.org/drawingml/2006/main">
@@ -10363,7 +10726,392 @@
                 <a:ea typeface="Calibri"/>
                 <a:cs typeface="Calibri"/>
               </a:rPr>
-              <a:t>Build a measurement helper with separate functions to show a menu, calculate rectangle area, and calculate rectangle perimeter. The main program collects length and width, selects one calculation, and displays a labelled result; include an invalid route.</a:t>
+              <a:t>Write </a:t>
+            </a:r>
+            <a:r>
+              <a:rPr sz="2400" b="0">
+                <a:solidFill>
+                  <a:srgbClr val="1750EB"/>
+                </a:solidFill>
+                <a:latin typeface="JetBrains Mono"/>
+                <a:ea typeface="JetBrains Mono"/>
+                <a:cs typeface="JetBrains Mono"/>
+              </a:rPr>
+              <a:t>show_menu()</a:t>
+            </a:r>
+            <a:r>
+              <a:rPr sz="2400" b="0">
+                <a:solidFill>
+                  <a:srgbClr val="080808"/>
+                </a:solidFill>
+                <a:latin typeface="Calibri"/>
+                <a:ea typeface="Calibri"/>
+                <a:cs typeface="Calibri"/>
+              </a:rPr>
+              <a:t> to display </a:t>
+            </a:r>
+            <a:r>
+              <a:rPr sz="2400" b="0">
+                <a:solidFill>
+                  <a:srgbClr val="067D17"/>
+                </a:solidFill>
+                <a:latin typeface="JetBrains Mono"/>
+                <a:ea typeface="JetBrains Mono"/>
+                <a:cs typeface="JetBrains Mono"/>
+              </a:rPr>
+              <a:t>"1: area, 2: perimeter"</a:t>
+            </a:r>
+            <a:r>
+              <a:rPr sz="2400" b="0">
+                <a:solidFill>
+                  <a:srgbClr val="080808"/>
+                </a:solidFill>
+                <a:latin typeface="Calibri"/>
+                <a:ea typeface="Calibri"/>
+                <a:cs typeface="Calibri"/>
+              </a:rPr>
+              <a:t>. Write </a:t>
+            </a:r>
+            <a:r>
+              <a:rPr sz="2400" b="0">
+                <a:solidFill>
+                  <a:srgbClr val="1750EB"/>
+                </a:solidFill>
+                <a:latin typeface="JetBrains Mono"/>
+                <a:ea typeface="JetBrains Mono"/>
+                <a:cs typeface="JetBrains Mono"/>
+              </a:rPr>
+              <a:t>area</a:t>
+            </a:r>
+            <a:r>
+              <a:rPr sz="2400" b="0">
+                <a:solidFill>
+                  <a:srgbClr val="080808"/>
+                </a:solidFill>
+                <a:latin typeface="Calibri"/>
+                <a:ea typeface="Calibri"/>
+                <a:cs typeface="Calibri"/>
+              </a:rPr>
+              <a:t>(length, width) to </a:t>
+            </a:r>
+            <a:r>
+              <a:rPr sz="2400" b="0">
+                <a:solidFill>
+                  <a:srgbClr val="1750EB"/>
+                </a:solidFill>
+                <a:latin typeface="JetBrains Mono"/>
+                <a:ea typeface="JetBrains Mono"/>
+                <a:cs typeface="JetBrains Mono"/>
+              </a:rPr>
+              <a:t>return</a:t>
+            </a:r>
+            <a:r>
+              <a:rPr sz="2400" b="0">
+                <a:solidFill>
+                  <a:srgbClr val="080808"/>
+                </a:solidFill>
+                <a:latin typeface="Calibri"/>
+                <a:ea typeface="Calibri"/>
+                <a:cs typeface="Calibri"/>
+              </a:rPr>
+              <a:t> length * width. Write </a:t>
+            </a:r>
+            <a:r>
+              <a:rPr sz="2400" b="0">
+                <a:solidFill>
+                  <a:srgbClr val="1750EB"/>
+                </a:solidFill>
+                <a:latin typeface="JetBrains Mono"/>
+                <a:ea typeface="JetBrains Mono"/>
+                <a:cs typeface="JetBrains Mono"/>
+              </a:rPr>
+              <a:t>perimeter</a:t>
+            </a:r>
+            <a:r>
+              <a:rPr sz="2400" b="0">
+                <a:solidFill>
+                  <a:srgbClr val="080808"/>
+                </a:solidFill>
+                <a:latin typeface="Calibri"/>
+                <a:ea typeface="Calibri"/>
+                <a:cs typeface="Calibri"/>
+              </a:rPr>
+              <a:t>(length, width) to </a:t>
+            </a:r>
+            <a:r>
+              <a:rPr sz="2400" b="0">
+                <a:solidFill>
+                  <a:srgbClr val="1750EB"/>
+                </a:solidFill>
+                <a:latin typeface="JetBrains Mono"/>
+                <a:ea typeface="JetBrains Mono"/>
+                <a:cs typeface="JetBrains Mono"/>
+              </a:rPr>
+              <a:t>return</a:t>
+            </a:r>
+            <a:r>
+              <a:rPr sz="2400" b="0">
+                <a:solidFill>
+                  <a:srgbClr val="080808"/>
+                </a:solidFill>
+                <a:latin typeface="Calibri"/>
+                <a:ea typeface="Calibri"/>
+                <a:cs typeface="Calibri"/>
+              </a:rPr>
+              <a:t> 2 * length + 2 * width. In the main program, call </a:t>
+            </a:r>
+            <a:r>
+              <a:rPr sz="2400" b="0">
+                <a:solidFill>
+                  <a:srgbClr val="1750EB"/>
+                </a:solidFill>
+                <a:latin typeface="JetBrains Mono"/>
+                <a:ea typeface="JetBrains Mono"/>
+                <a:cs typeface="JetBrains Mono"/>
+              </a:rPr>
+              <a:t>show_menu()</a:t>
+            </a:r>
+            <a:r>
+              <a:rPr sz="2400" b="0">
+                <a:solidFill>
+                  <a:srgbClr val="080808"/>
+                </a:solidFill>
+                <a:latin typeface="Calibri"/>
+                <a:ea typeface="Calibri"/>
+                <a:cs typeface="Calibri"/>
+              </a:rPr>
+              <a:t>, then ask for [choice], [length] and [width]. Display </a:t>
+            </a:r>
+            <a:r>
+              <a:rPr sz="2400" b="0">
+                <a:solidFill>
+                  <a:srgbClr val="067D17"/>
+                </a:solidFill>
+                <a:latin typeface="JetBrains Mono"/>
+                <a:ea typeface="JetBrains Mono"/>
+                <a:cs typeface="JetBrains Mono"/>
+              </a:rPr>
+              <a:t>"Area:"</a:t>
+            </a:r>
+            <a:r>
+              <a:rPr sz="2400" b="0">
+                <a:solidFill>
+                  <a:srgbClr val="080808"/>
+                </a:solidFill>
+                <a:latin typeface="Calibri"/>
+                <a:ea typeface="Calibri"/>
+                <a:cs typeface="Calibri"/>
+              </a:rPr>
+              <a:t> when [choice] is </a:t>
+            </a:r>
+            <a:r>
+              <a:rPr sz="2400" b="0">
+                <a:solidFill>
+                  <a:srgbClr val="067D17"/>
+                </a:solidFill>
+                <a:latin typeface="JetBrains Mono"/>
+                <a:ea typeface="JetBrains Mono"/>
+                <a:cs typeface="JetBrains Mono"/>
+              </a:rPr>
+              <a:t>"1"</a:t>
+            </a:r>
+            <a:r>
+              <a:rPr sz="2400" b="0">
+                <a:solidFill>
+                  <a:srgbClr val="080808"/>
+                </a:solidFill>
+                <a:latin typeface="Calibri"/>
+                <a:ea typeface="Calibri"/>
+                <a:cs typeface="Calibri"/>
+              </a:rPr>
+              <a:t>, </a:t>
+            </a:r>
+            <a:r>
+              <a:rPr sz="2400" b="0">
+                <a:solidFill>
+                  <a:srgbClr val="067D17"/>
+                </a:solidFill>
+                <a:latin typeface="JetBrains Mono"/>
+                <a:ea typeface="JetBrains Mono"/>
+                <a:cs typeface="JetBrains Mono"/>
+              </a:rPr>
+              <a:t>"Perimeter:"</a:t>
+            </a:r>
+            <a:r>
+              <a:rPr sz="2400" b="0">
+                <a:solidFill>
+                  <a:srgbClr val="080808"/>
+                </a:solidFill>
+                <a:latin typeface="Calibri"/>
+                <a:ea typeface="Calibri"/>
+                <a:cs typeface="Calibri"/>
+              </a:rPr>
+              <a:t> when [choice] is </a:t>
+            </a:r>
+            <a:r>
+              <a:rPr sz="2400" b="0">
+                <a:solidFill>
+                  <a:srgbClr val="067D17"/>
+                </a:solidFill>
+                <a:latin typeface="JetBrains Mono"/>
+                <a:ea typeface="JetBrains Mono"/>
+                <a:cs typeface="JetBrains Mono"/>
+              </a:rPr>
+              <a:t>"2"</a:t>
+            </a:r>
+            <a:r>
+              <a:rPr sz="2400" b="0">
+                <a:solidFill>
+                  <a:srgbClr val="080808"/>
+                </a:solidFill>
+                <a:latin typeface="Calibri"/>
+                <a:ea typeface="Calibri"/>
+                <a:cs typeface="Calibri"/>
+              </a:rPr>
+              <a:t>, and </a:t>
+            </a:r>
+            <a:r>
+              <a:rPr sz="2400" b="0">
+                <a:solidFill>
+                  <a:srgbClr val="067D17"/>
+                </a:solidFill>
+                <a:latin typeface="JetBrains Mono"/>
+                <a:ea typeface="JetBrains Mono"/>
+                <a:cs typeface="JetBrains Mono"/>
+              </a:rPr>
+              <a:t>"Invalid choice."</a:t>
+            </a:r>
+            <a:r>
+              <a:rPr sz="2400" b="0">
+                <a:solidFill>
+                  <a:srgbClr val="080808"/>
+                </a:solidFill>
+                <a:latin typeface="Calibri"/>
+                <a:ea typeface="Calibri"/>
+                <a:cs typeface="Calibri"/>
+              </a:rPr>
+              <a:t> for any other value. Test </a:t>
+            </a:r>
+            <a:r>
+              <a:rPr sz="2400" b="0">
+                <a:solidFill>
+                  <a:srgbClr val="067D17"/>
+                </a:solidFill>
+                <a:latin typeface="JetBrains Mono"/>
+                <a:ea typeface="JetBrains Mono"/>
+                <a:cs typeface="JetBrains Mono"/>
+              </a:rPr>
+              <a:t>"1"</a:t>
+            </a:r>
+            <a:r>
+              <a:rPr sz="2400" b="0">
+                <a:solidFill>
+                  <a:srgbClr val="080808"/>
+                </a:solidFill>
+                <a:latin typeface="Calibri"/>
+                <a:ea typeface="Calibri"/>
+                <a:cs typeface="Calibri"/>
+              </a:rPr>
+              <a:t>, 4 and 3; display </a:t>
+            </a:r>
+            <a:r>
+              <a:rPr sz="2400" b="0">
+                <a:solidFill>
+                  <a:srgbClr val="067D17"/>
+                </a:solidFill>
+                <a:latin typeface="JetBrains Mono"/>
+                <a:ea typeface="JetBrains Mono"/>
+                <a:cs typeface="JetBrains Mono"/>
+              </a:rPr>
+              <a:t>"Area: 12.0"</a:t>
+            </a:r>
+            <a:r>
+              <a:rPr sz="2400" b="0">
+                <a:solidFill>
+                  <a:srgbClr val="080808"/>
+                </a:solidFill>
+                <a:latin typeface="Calibri"/>
+                <a:ea typeface="Calibri"/>
+                <a:cs typeface="Calibri"/>
+              </a:rPr>
+              <a:t>. Test </a:t>
+            </a:r>
+            <a:r>
+              <a:rPr sz="2400" b="0">
+                <a:solidFill>
+                  <a:srgbClr val="067D17"/>
+                </a:solidFill>
+                <a:latin typeface="JetBrains Mono"/>
+                <a:ea typeface="JetBrains Mono"/>
+                <a:cs typeface="JetBrains Mono"/>
+              </a:rPr>
+              <a:t>"2"</a:t>
+            </a:r>
+            <a:r>
+              <a:rPr sz="2400" b="0">
+                <a:solidFill>
+                  <a:srgbClr val="080808"/>
+                </a:solidFill>
+                <a:latin typeface="Calibri"/>
+                <a:ea typeface="Calibri"/>
+                <a:cs typeface="Calibri"/>
+              </a:rPr>
+              <a:t>, 4 and 3; display </a:t>
+            </a:r>
+            <a:r>
+              <a:rPr sz="2400" b="0">
+                <a:solidFill>
+                  <a:srgbClr val="067D17"/>
+                </a:solidFill>
+                <a:latin typeface="JetBrains Mono"/>
+                <a:ea typeface="JetBrains Mono"/>
+                <a:cs typeface="JetBrains Mono"/>
+              </a:rPr>
+              <a:t>"Perimeter: 14.0"</a:t>
+            </a:r>
+            <a:r>
+              <a:rPr sz="2400" b="0">
+                <a:solidFill>
+                  <a:srgbClr val="080808"/>
+                </a:solidFill>
+                <a:latin typeface="Calibri"/>
+                <a:ea typeface="Calibri"/>
+                <a:cs typeface="Calibri"/>
+              </a:rPr>
+              <a:t>. Test </a:t>
+            </a:r>
+            <a:r>
+              <a:rPr sz="2400" b="0">
+                <a:solidFill>
+                  <a:srgbClr val="067D17"/>
+                </a:solidFill>
+                <a:latin typeface="JetBrains Mono"/>
+                <a:ea typeface="JetBrains Mono"/>
+                <a:cs typeface="JetBrains Mono"/>
+              </a:rPr>
+              <a:t>"x"</a:t>
+            </a:r>
+            <a:r>
+              <a:rPr sz="2400" b="0">
+                <a:solidFill>
+                  <a:srgbClr val="080808"/>
+                </a:solidFill>
+                <a:latin typeface="Calibri"/>
+                <a:ea typeface="Calibri"/>
+                <a:cs typeface="Calibri"/>
+              </a:rPr>
+              <a:t>, 4 and 3; display </a:t>
+            </a:r>
+            <a:r>
+              <a:rPr sz="2400" b="0">
+                <a:solidFill>
+                  <a:srgbClr val="067D17"/>
+                </a:solidFill>
+                <a:latin typeface="JetBrains Mono"/>
+                <a:ea typeface="JetBrains Mono"/>
+                <a:cs typeface="JetBrains Mono"/>
+              </a:rPr>
+              <a:t>"Invalid choice."</a:t>
             </a:r>
           </a:p>
         </p:txBody>

--- a/Mapped Curriculum Lessons/Grade 8/Lesson 34 - Several Functions/Several Functions - Slides.pptx
+++ b/Mapped Curriculum Lessons/Grade 8/Lesson 34 - Several Functions/Several Functions - Slides.pptx
@@ -2,28 +2,28 @@
 <file path=ppt/presentation.xml><?xml version="1.0" encoding="utf-8"?>
 <p:presentation xmlns:p="http://schemas.openxmlformats.org/presentationml/2006/main" embedTrueTypeFonts="1" saveSubsetFonts="0">
   <p:sldMasterIdLst>
-    <p:sldMasterId xmlns:r="http://schemas.openxmlformats.org/officeDocument/2006/relationships" id="2147483648" r:id="R45ffe869a63f4c96"/>
+    <p:sldMasterId xmlns:r="http://schemas.openxmlformats.org/officeDocument/2006/relationships" id="2147483648" r:id="Re585eb625de840ee"/>
   </p:sldMasterIdLst>
   <p:notesMasterIdLst>
-    <p:notesMasterId xmlns:r="http://schemas.openxmlformats.org/officeDocument/2006/relationships" r:id="Re5bc289951e94848"/>
+    <p:notesMasterId xmlns:r="http://schemas.openxmlformats.org/officeDocument/2006/relationships" r:id="R4ba32c2dfe434c8d"/>
   </p:notesMasterIdLst>
   <p:sldIdLst>
-    <p:sldId xmlns:r="http://schemas.openxmlformats.org/officeDocument/2006/relationships" id="256" r:id="Rbdfa514a8d144a2c"/>
-    <p:sldId xmlns:r="http://schemas.openxmlformats.org/officeDocument/2006/relationships" id="257" r:id="R0459351472cb472e"/>
-    <p:sldId xmlns:r="http://schemas.openxmlformats.org/officeDocument/2006/relationships" id="258" r:id="R345b265596ce4054"/>
-    <p:sldId xmlns:r="http://schemas.openxmlformats.org/officeDocument/2006/relationships" id="259" r:id="Rc14e0d567411460d"/>
-    <p:sldId xmlns:r="http://schemas.openxmlformats.org/officeDocument/2006/relationships" id="260" r:id="R329648580a574155"/>
-    <p:sldId xmlns:r="http://schemas.openxmlformats.org/officeDocument/2006/relationships" id="261" r:id="Ra1b31507783646c6"/>
-    <p:sldId xmlns:r="http://schemas.openxmlformats.org/officeDocument/2006/relationships" id="262" r:id="Rb6472a912367452d"/>
-    <p:sldId xmlns:r="http://schemas.openxmlformats.org/officeDocument/2006/relationships" id="263" r:id="Rf248d7f78fa64101"/>
-    <p:sldId xmlns:r="http://schemas.openxmlformats.org/officeDocument/2006/relationships" id="264" r:id="R44e48fe08a8e45cc"/>
+    <p:sldId xmlns:r="http://schemas.openxmlformats.org/officeDocument/2006/relationships" id="256" r:id="Ra4325281b3a24f9d"/>
+    <p:sldId xmlns:r="http://schemas.openxmlformats.org/officeDocument/2006/relationships" id="257" r:id="R7d86e8ce62864202"/>
+    <p:sldId xmlns:r="http://schemas.openxmlformats.org/officeDocument/2006/relationships" id="258" r:id="Rd2f1857d93e145e9"/>
+    <p:sldId xmlns:r="http://schemas.openxmlformats.org/officeDocument/2006/relationships" id="259" r:id="Rafaf8f541f314df8"/>
+    <p:sldId xmlns:r="http://schemas.openxmlformats.org/officeDocument/2006/relationships" id="260" r:id="Rb68ba8dd64a84126"/>
+    <p:sldId xmlns:r="http://schemas.openxmlformats.org/officeDocument/2006/relationships" id="261" r:id="Rdbffcb66a99c4187"/>
+    <p:sldId xmlns:r="http://schemas.openxmlformats.org/officeDocument/2006/relationships" id="262" r:id="R9dec86f3fda64a41"/>
+    <p:sldId xmlns:r="http://schemas.openxmlformats.org/officeDocument/2006/relationships" id="263" r:id="R4a1053cbe71e4c61"/>
+    <p:sldId xmlns:r="http://schemas.openxmlformats.org/officeDocument/2006/relationships" id="264" r:id="Re894e70df4fa4d55"/>
   </p:sldIdLst>
   <p:sldSz cx="12192000" cy="6858000"/>
   <p:notesSz cx="6858000" cy="9144000"/>
   <p:embeddedFontLst>
     <p:embeddedFont>
       <p:font typeface="JetBrains Mono"/>
-      <p:regular xmlns:r="http://schemas.openxmlformats.org/officeDocument/2006/relationships" r:id="R94ee8ff948a14d13"/>
+      <p:regular xmlns:r="http://schemas.openxmlformats.org/officeDocument/2006/relationships" r:id="R9ea4eb2f37a349a3"/>
     </p:embeddedFont>
   </p:embeddedFontLst>
 </p:presentation>
@@ -1071,7 +1071,7 @@
           <p:nvPr/>
         </p:nvPicPr>
         <p:blipFill rotWithShape="1">
-          <a:blip xmlns:r="http://schemas.openxmlformats.org/officeDocument/2006/relationships" xmlns:a="http://schemas.openxmlformats.org/drawingml/2006/main" r:embed="R57054305f33946a8"/>
+          <a:blip xmlns:r="http://schemas.openxmlformats.org/officeDocument/2006/relationships" xmlns:a="http://schemas.openxmlformats.org/drawingml/2006/main" r:embed="Re0ddf90c7e7e4c5f"/>
           <a:stretch xmlns:a="http://schemas.openxmlformats.org/drawingml/2006/main"/>
         </p:blipFill>
         <p:spPr>
@@ -1451,7 +1451,7 @@
           <p:nvPr/>
         </p:nvPicPr>
         <p:blipFill rotWithShape="1">
-          <a:blip xmlns:r="http://schemas.openxmlformats.org/officeDocument/2006/relationships" xmlns:a="http://schemas.openxmlformats.org/drawingml/2006/main" r:embed="R0ba15e93714444e4">
+          <a:blip xmlns:r="http://schemas.openxmlformats.org/officeDocument/2006/relationships" xmlns:a="http://schemas.openxmlformats.org/drawingml/2006/main" r:embed="Refc4789796144c5e">
             <a:alphaModFix amt="28000"/>
           </a:blip>
           <a:stretch xmlns:a="http://schemas.openxmlformats.org/drawingml/2006/main"/>
@@ -1664,7 +1664,7 @@
           <p:nvPr/>
         </p:nvPicPr>
         <p:blipFill rotWithShape="1">
-          <a:blip xmlns:r="http://schemas.openxmlformats.org/officeDocument/2006/relationships" xmlns:a="http://schemas.openxmlformats.org/drawingml/2006/main" r:embed="R65ac0b43aa5f45aa">
+          <a:blip xmlns:r="http://schemas.openxmlformats.org/officeDocument/2006/relationships" xmlns:a="http://schemas.openxmlformats.org/drawingml/2006/main" r:embed="R7be1375b4a9d49e3">
             <a:alphaModFix amt="28000"/>
           </a:blip>
           <a:stretch xmlns:a="http://schemas.openxmlformats.org/drawingml/2006/main"/>
@@ -1899,7 +1899,7 @@
           <p:nvPr/>
         </p:nvPicPr>
         <p:blipFill rotWithShape="1">
-          <a:blip xmlns:r="http://schemas.openxmlformats.org/officeDocument/2006/relationships" xmlns:a="http://schemas.openxmlformats.org/drawingml/2006/main" r:embed="Rff00d1551db14cee">
+          <a:blip xmlns:r="http://schemas.openxmlformats.org/officeDocument/2006/relationships" xmlns:a="http://schemas.openxmlformats.org/drawingml/2006/main" r:embed="R3a0cfd4d406443d0">
             <a:alphaModFix amt="28000"/>
           </a:blip>
           <a:stretch xmlns:a="http://schemas.openxmlformats.org/drawingml/2006/main"/>
@@ -2176,7 +2176,7 @@
           <p:nvPr/>
         </p:nvPicPr>
         <p:blipFill rotWithShape="1">
-          <a:blip xmlns:r="http://schemas.openxmlformats.org/officeDocument/2006/relationships" xmlns:a="http://schemas.openxmlformats.org/drawingml/2006/main" r:embed="R2d8469a7d7c84a49">
+          <a:blip xmlns:r="http://schemas.openxmlformats.org/officeDocument/2006/relationships" xmlns:a="http://schemas.openxmlformats.org/drawingml/2006/main" r:embed="Rec92430a2d0a4634">
             <a:alphaModFix amt="28000"/>
           </a:blip>
           <a:stretch xmlns:a="http://schemas.openxmlformats.org/drawingml/2006/main"/>
@@ -2451,7 +2451,7 @@
           <p:nvPr/>
         </p:nvPicPr>
         <p:blipFill rotWithShape="1">
-          <a:blip xmlns:r="http://schemas.openxmlformats.org/officeDocument/2006/relationships" xmlns:a="http://schemas.openxmlformats.org/drawingml/2006/main" r:embed="R8a2078b4468b4208">
+          <a:blip xmlns:r="http://schemas.openxmlformats.org/officeDocument/2006/relationships" xmlns:a="http://schemas.openxmlformats.org/drawingml/2006/main" r:embed="R6187acb4b0574c11">
             <a:alphaModFix amt="28000"/>
           </a:blip>
           <a:stretch xmlns:a="http://schemas.openxmlformats.org/drawingml/2006/main"/>
@@ -2875,7 +2875,7 @@
           <p:nvPr/>
         </p:nvPicPr>
         <p:blipFill rotWithShape="1">
-          <a:blip xmlns:r="http://schemas.openxmlformats.org/officeDocument/2006/relationships" xmlns:a="http://schemas.openxmlformats.org/drawingml/2006/main" r:embed="R2008bbdc780343f2">
+          <a:blip xmlns:r="http://schemas.openxmlformats.org/officeDocument/2006/relationships" xmlns:a="http://schemas.openxmlformats.org/drawingml/2006/main" r:embed="R043004ca11014e5e">
             <a:alphaModFix amt="28000"/>
           </a:blip>
           <a:stretch xmlns:a="http://schemas.openxmlformats.org/drawingml/2006/main"/>
@@ -3016,7 +3016,7 @@
           <p:nvPr/>
         </p:nvPicPr>
         <p:blipFill rotWithShape="1">
-          <a:blip xmlns:r="http://schemas.openxmlformats.org/officeDocument/2006/relationships" xmlns:a="http://schemas.openxmlformats.org/drawingml/2006/main" r:embed="R253b84dc1b5b4374">
+          <a:blip xmlns:r="http://schemas.openxmlformats.org/officeDocument/2006/relationships" xmlns:a="http://schemas.openxmlformats.org/drawingml/2006/main" r:embed="Rd446b4512e384d1c">
             <a:alphaModFix amt="28000"/>
           </a:blip>
           <a:stretch xmlns:a="http://schemas.openxmlformats.org/drawingml/2006/main"/>
@@ -3130,7 +3130,7 @@
           <p:nvPr/>
         </p:nvPicPr>
         <p:blipFill rotWithShape="1">
-          <a:blip xmlns:r="http://schemas.openxmlformats.org/officeDocument/2006/relationships" xmlns:a="http://schemas.openxmlformats.org/drawingml/2006/main" r:embed="R7a48d4b586fe426c">
+          <a:blip xmlns:r="http://schemas.openxmlformats.org/officeDocument/2006/relationships" xmlns:a="http://schemas.openxmlformats.org/drawingml/2006/main" r:embed="R709692f51d3a4fcc">
             <a:alphaModFix amt="28000"/>
           </a:blip>
           <a:stretch xmlns:a="http://schemas.openxmlformats.org/drawingml/2006/main"/>
@@ -3457,7 +3457,7 @@
           <p:nvPr/>
         </p:nvPicPr>
         <p:blipFill rotWithShape="1">
-          <a:blip xmlns:r="http://schemas.openxmlformats.org/officeDocument/2006/relationships" xmlns:a="http://schemas.openxmlformats.org/drawingml/2006/main" r:embed="R0434315b86c7498f">
+          <a:blip xmlns:r="http://schemas.openxmlformats.org/officeDocument/2006/relationships" xmlns:a="http://schemas.openxmlformats.org/drawingml/2006/main" r:embed="R7c741308fd1a46ff">
             <a:alphaModFix amt="28000"/>
           </a:blip>
           <a:stretch xmlns:a="http://schemas.openxmlformats.org/drawingml/2006/main"/>
@@ -3745,7 +3745,7 @@
           <p:nvPr/>
         </p:nvPicPr>
         <p:blipFill rotWithShape="1">
-          <a:blip xmlns:r="http://schemas.openxmlformats.org/officeDocument/2006/relationships" xmlns:a="http://schemas.openxmlformats.org/drawingml/2006/main" r:embed="R7cce93803806475c">
+          <a:blip xmlns:r="http://schemas.openxmlformats.org/officeDocument/2006/relationships" xmlns:a="http://schemas.openxmlformats.org/drawingml/2006/main" r:embed="R2e7994e51c4f4bb7">
             <a:alphaModFix amt="28000"/>
           </a:blip>
           <a:stretch xmlns:a="http://schemas.openxmlformats.org/drawingml/2006/main"/>
@@ -3982,17 +3982,17 @@
   </p:cSld>
   <p:clrMap bg1="lt1" tx1="dk1" bg2="lt2" tx2="dk2" accent1="accent1" accent2="accent2" accent3="accent3" accent4="accent4" accent5="accent5" accent6="accent6" hlink="hlink" folHlink="folHlink"/>
   <p:sldLayoutIdLst>
-    <p:sldLayoutId xmlns:r="http://schemas.openxmlformats.org/officeDocument/2006/relationships" id="2147483649" r:id="Rf2946a541e284372"/>
-    <p:sldLayoutId xmlns:r="http://schemas.openxmlformats.org/officeDocument/2006/relationships" id="2147483650" r:id="R3fa25fb34be84239"/>
-    <p:sldLayoutId xmlns:r="http://schemas.openxmlformats.org/officeDocument/2006/relationships" id="2147483651" r:id="R85c9ae4b4fec4318"/>
-    <p:sldLayoutId xmlns:r="http://schemas.openxmlformats.org/officeDocument/2006/relationships" id="2147483652" r:id="R1b2b0146f99f4760"/>
-    <p:sldLayoutId xmlns:r="http://schemas.openxmlformats.org/officeDocument/2006/relationships" id="2147483653" r:id="R53b944c9f2334b5c"/>
-    <p:sldLayoutId xmlns:r="http://schemas.openxmlformats.org/officeDocument/2006/relationships" id="2147483654" r:id="R99e71ef4f61c4372"/>
-    <p:sldLayoutId xmlns:r="http://schemas.openxmlformats.org/officeDocument/2006/relationships" id="2147483655" r:id="R077a04e139c74bc0"/>
-    <p:sldLayoutId xmlns:r="http://schemas.openxmlformats.org/officeDocument/2006/relationships" id="2147483656" r:id="R99749ca92d6344ae"/>
-    <p:sldLayoutId xmlns:r="http://schemas.openxmlformats.org/officeDocument/2006/relationships" id="2147483657" r:id="Rb4aee104bf524c4f"/>
-    <p:sldLayoutId xmlns:r="http://schemas.openxmlformats.org/officeDocument/2006/relationships" id="2147483658" r:id="R3f662266912e4887"/>
-    <p:sldLayoutId xmlns:r="http://schemas.openxmlformats.org/officeDocument/2006/relationships" id="2147483659" r:id="Rb9df7c9c3d8a461b"/>
+    <p:sldLayoutId xmlns:r="http://schemas.openxmlformats.org/officeDocument/2006/relationships" id="2147483649" r:id="Rfd496646d5bb4ae3"/>
+    <p:sldLayoutId xmlns:r="http://schemas.openxmlformats.org/officeDocument/2006/relationships" id="2147483650" r:id="Rf92a4291433e4037"/>
+    <p:sldLayoutId xmlns:r="http://schemas.openxmlformats.org/officeDocument/2006/relationships" id="2147483651" r:id="R268f75acba51470a"/>
+    <p:sldLayoutId xmlns:r="http://schemas.openxmlformats.org/officeDocument/2006/relationships" id="2147483652" r:id="R43e2963171484975"/>
+    <p:sldLayoutId xmlns:r="http://schemas.openxmlformats.org/officeDocument/2006/relationships" id="2147483653" r:id="R0562bc2652dd4f23"/>
+    <p:sldLayoutId xmlns:r="http://schemas.openxmlformats.org/officeDocument/2006/relationships" id="2147483654" r:id="R4ad516a50abb43df"/>
+    <p:sldLayoutId xmlns:r="http://schemas.openxmlformats.org/officeDocument/2006/relationships" id="2147483655" r:id="Rc59c2298f8f24240"/>
+    <p:sldLayoutId xmlns:r="http://schemas.openxmlformats.org/officeDocument/2006/relationships" id="2147483656" r:id="Rd0768b9936254fd3"/>
+    <p:sldLayoutId xmlns:r="http://schemas.openxmlformats.org/officeDocument/2006/relationships" id="2147483657" r:id="R890cf5de060d4ced"/>
+    <p:sldLayoutId xmlns:r="http://schemas.openxmlformats.org/officeDocument/2006/relationships" id="2147483658" r:id="R4b0fe9ba86774d22"/>
+    <p:sldLayoutId xmlns:r="http://schemas.openxmlformats.org/officeDocument/2006/relationships" id="2147483659" r:id="R3d4ccdf7d5d74057"/>
   </p:sldLayoutIdLst>
   <p:hf hdr="0" ftr="0" dt="0"/>
   <p:txStyles>
@@ -8379,10 +8379,10 @@
                 <a:ea typeface="Calibri"/>
                 <a:cs typeface="Calibri"/>
               </a:rPr>
-              <a:t>Rename </a:t>
-            </a:r>
-            <a:r>
-              <a:rPr sz="2400" b="0">
+              <a:t>Change the example's </a:t>
+            </a:r>
+            <a:r>
+              <a:rPr sz="2050" b="0">
                 <a:solidFill>
                   <a:srgbClr val="1750EB"/>
                 </a:solidFill>
@@ -8390,7 +8390,7 @@
                 <a:ea typeface="JetBrains Mono"/>
                 <a:cs typeface="JetBrains Mono"/>
               </a:rPr>
-              <a:t>square</a:t>
+              <a:t>square()</a:t>
             </a:r>
             <a:r>
               <a:rPr sz="2400" b="0">
@@ -8401,10 +8401,10 @@
                 <a:ea typeface="Calibri"/>
                 <a:cs typeface="Calibri"/>
               </a:rPr>
-              <a:t>(number) to </a:t>
-            </a:r>
-            <a:r>
-              <a:rPr sz="2400" b="0">
+              <a:t> function into </a:t>
+            </a:r>
+            <a:r>
+              <a:rPr sz="2050" b="0">
                 <a:solidFill>
                   <a:srgbClr val="1750EB"/>
                 </a:solidFill>
@@ -8423,10 +8423,10 @@
                 <a:ea typeface="Calibri"/>
                 <a:cs typeface="Calibri"/>
               </a:rPr>
-              <a:t>(number) and </a:t>
-            </a:r>
-            <a:r>
-              <a:rPr sz="2400" b="0">
+              <a:t>(number), which should </a:t>
+            </a:r>
+            <a:r>
+              <a:rPr sz="2050" b="0">
                 <a:solidFill>
                   <a:srgbClr val="1750EB"/>
                 </a:solidFill>
@@ -8445,10 +8445,10 @@
                 <a:ea typeface="Calibri"/>
                 <a:cs typeface="Calibri"/>
               </a:rPr>
-              <a:t> number * 3. Change menu option 2 from </a:t>
-            </a:r>
-            <a:r>
-              <a:rPr sz="2400" b="0">
+              <a:t> number * 3. Update the menu text and the function call so option </a:t>
+            </a:r>
+            <a:r>
+              <a:rPr sz="2050" b="0">
                 <a:solidFill>
                   <a:srgbClr val="067D17"/>
                 </a:solidFill>
@@ -8456,7 +8456,7 @@
                 <a:ea typeface="JetBrains Mono"/>
                 <a:cs typeface="JetBrains Mono"/>
               </a:rPr>
-              <a:t>"square"</a:t>
+              <a:t>"2"</a:t>
             </a:r>
             <a:r>
               <a:rPr sz="2400" b="0">
@@ -8467,10 +8467,10 @@
                 <a:ea typeface="Calibri"/>
                 <a:cs typeface="Calibri"/>
               </a:rPr>
-              <a:t> to </a:t>
-            </a:r>
-            <a:r>
-              <a:rPr sz="2400" b="0">
+              <a:t> triples. For example, </a:t>
+            </a:r>
+            <a:r>
+              <a:rPr sz="2050" b="0">
                 <a:solidFill>
                   <a:srgbClr val="067D17"/>
                 </a:solidFill>
@@ -8478,7 +8478,7 @@
                 <a:ea typeface="JetBrains Mono"/>
                 <a:cs typeface="JetBrains Mono"/>
               </a:rPr>
-              <a:t>"triple"</a:t>
+              <a:t>"2"</a:t>
             </a:r>
             <a:r>
               <a:rPr sz="2400" b="0">
@@ -8489,76 +8489,10 @@
                 <a:ea typeface="Calibri"/>
                 <a:cs typeface="Calibri"/>
               </a:rPr>
-              <a:t>, then call </a:t>
-            </a:r>
-            <a:r>
-              <a:rPr sz="2400" b="0">
-                <a:solidFill>
-                  <a:srgbClr val="1750EB"/>
-                </a:solidFill>
-                <a:latin typeface="JetBrains Mono"/>
-                <a:ea typeface="JetBrains Mono"/>
-                <a:cs typeface="JetBrains Mono"/>
-              </a:rPr>
-              <a:t>triple</a:t>
-            </a:r>
-            <a:r>
-              <a:rPr sz="2400" b="0">
-                <a:solidFill>
-                  <a:srgbClr val="080808"/>
-                </a:solidFill>
-                <a:latin typeface="Calibri"/>
-                <a:ea typeface="Calibri"/>
-                <a:cs typeface="Calibri"/>
-              </a:rPr>
-              <a:t>(value) when [choice] is </a:t>
-            </a:r>
-            <a:r>
-              <a:rPr sz="2400" b="0">
-                <a:solidFill>
-                  <a:srgbClr val="067D17"/>
-                </a:solidFill>
-                <a:latin typeface="JetBrains Mono"/>
-                <a:ea typeface="JetBrains Mono"/>
-                <a:cs typeface="JetBrains Mono"/>
-              </a:rPr>
-              <a:t>"2"</a:t>
-            </a:r>
-            <a:r>
-              <a:rPr sz="2400" b="0">
-                <a:solidFill>
-                  <a:srgbClr val="080808"/>
-                </a:solidFill>
-                <a:latin typeface="Calibri"/>
-                <a:ea typeface="Calibri"/>
-                <a:cs typeface="Calibri"/>
-              </a:rPr>
-              <a:t>. Test </a:t>
-            </a:r>
-            <a:r>
-              <a:rPr sz="2400" b="0">
-                <a:solidFill>
-                  <a:srgbClr val="067D17"/>
-                </a:solidFill>
-                <a:latin typeface="JetBrains Mono"/>
-                <a:ea typeface="JetBrains Mono"/>
-                <a:cs typeface="JetBrains Mono"/>
-              </a:rPr>
-              <a:t>"2"</a:t>
-            </a:r>
-            <a:r>
-              <a:rPr sz="2400" b="0">
-                <a:solidFill>
-                  <a:srgbClr val="080808"/>
-                </a:solidFill>
-                <a:latin typeface="Calibri"/>
-                <a:ea typeface="Calibri"/>
-                <a:cs typeface="Calibri"/>
-              </a:rPr>
-              <a:t> and 6; display </a:t>
-            </a:r>
-            <a:r>
-              <a:rPr sz="2400" b="0">
+              <a:t> and 6 display </a:t>
+            </a:r>
+            <a:r>
+              <a:rPr sz="2050" b="0">
                 <a:solidFill>
                   <a:srgbClr val="067D17"/>
                 </a:solidFill>
@@ -9536,10 +9470,10 @@
                 <a:ea typeface="Calibri"/>
                 <a:cs typeface="Calibri"/>
               </a:rPr>
-              <a:t>Add a function called </a:t>
-            </a:r>
-            <a:r>
-              <a:rPr sz="2400" b="0">
+              <a:t>Extend the example with </a:t>
+            </a:r>
+            <a:r>
+              <a:rPr sz="2050" b="0">
                 <a:solidFill>
                   <a:srgbClr val="1750EB"/>
                 </a:solidFill>
@@ -9558,18 +9492,18 @@
                 <a:ea typeface="Calibri"/>
                 <a:cs typeface="Calibri"/>
               </a:rPr>
-              <a:t>(number) that returns number / 2. Add </a:t>
-            </a:r>
-            <a:r>
-              <a:rPr sz="2400" b="0">
-                <a:solidFill>
-                  <a:srgbClr val="067D17"/>
-                </a:solidFill>
-                <a:latin typeface="JetBrains Mono"/>
-                <a:ea typeface="JetBrains Mono"/>
-                <a:cs typeface="JetBrains Mono"/>
-              </a:rPr>
-              <a:t>"3: half"</a:t>
+              <a:t>(number), which should </a:t>
+            </a:r>
+            <a:r>
+              <a:rPr sz="2050" b="0">
+                <a:solidFill>
+                  <a:srgbClr val="1750EB"/>
+                </a:solidFill>
+                <a:latin typeface="JetBrains Mono"/>
+                <a:ea typeface="JetBrains Mono"/>
+                <a:cs typeface="JetBrains Mono"/>
+              </a:rPr>
+              <a:t>return</a:t>
             </a:r>
             <a:r>
               <a:rPr sz="2400" b="0">
@@ -9580,18 +9514,18 @@
                 <a:ea typeface="Calibri"/>
                 <a:cs typeface="Calibri"/>
               </a:rPr>
-              <a:t> to the menu and use an </a:t>
-            </a:r>
-            <a:r>
-              <a:rPr sz="2400" b="0">
-                <a:solidFill>
-                  <a:srgbClr val="1750EB"/>
-                </a:solidFill>
-                <a:latin typeface="JetBrains Mono"/>
-                <a:ea typeface="JetBrains Mono"/>
-                <a:cs typeface="JetBrains Mono"/>
-              </a:rPr>
-              <a:t>elif</a:t>
+              <a:t> number / 2, and menu option </a:t>
+            </a:r>
+            <a:r>
+              <a:rPr sz="2050" b="0">
+                <a:solidFill>
+                  <a:srgbClr val="067D17"/>
+                </a:solidFill>
+                <a:latin typeface="JetBrains Mono"/>
+                <a:ea typeface="JetBrains Mono"/>
+                <a:cs typeface="JetBrains Mono"/>
+              </a:rPr>
+              <a:t>"3: half"</a:t>
             </a:r>
             <a:r>
               <a:rPr sz="2400" b="0">
@@ -9602,10 +9536,10 @@
                 <a:ea typeface="Calibri"/>
                 <a:cs typeface="Calibri"/>
               </a:rPr>
-              <a:t> condition to call </a:t>
-            </a:r>
-            <a:r>
-              <a:rPr sz="2400" b="0">
+              <a:t>. Use </a:t>
+            </a:r>
+            <a:r>
+              <a:rPr sz="2050" b="0">
                 <a:solidFill>
                   <a:srgbClr val="1750EB"/>
                 </a:solidFill>
@@ -9613,7 +9547,7 @@
                 <a:ea typeface="JetBrains Mono"/>
                 <a:cs typeface="JetBrains Mono"/>
               </a:rPr>
-              <a:t>half</a:t>
+              <a:t>if</a:t>
             </a:r>
             <a:r>
               <a:rPr sz="2400" b="0">
@@ -9624,18 +9558,18 @@
                 <a:ea typeface="Calibri"/>
                 <a:cs typeface="Calibri"/>
               </a:rPr>
-              <a:t>(value) when [choice] is </a:t>
-            </a:r>
-            <a:r>
-              <a:rPr sz="2400" b="0">
-                <a:solidFill>
-                  <a:srgbClr val="067D17"/>
-                </a:solidFill>
-                <a:latin typeface="JetBrains Mono"/>
-                <a:ea typeface="JetBrains Mono"/>
-                <a:cs typeface="JetBrains Mono"/>
-              </a:rPr>
-              <a:t>"3"</a:t>
+              <a:t> and </a:t>
+            </a:r>
+            <a:r>
+              <a:rPr sz="2050" b="0">
+                <a:solidFill>
+                  <a:srgbClr val="1750EB"/>
+                </a:solidFill>
+                <a:latin typeface="JetBrains Mono"/>
+                <a:ea typeface="JetBrains Mono"/>
+                <a:cs typeface="JetBrains Mono"/>
+              </a:rPr>
+              <a:t>elif</a:t>
             </a:r>
             <a:r>
               <a:rPr sz="2400" b="0">
@@ -9646,10 +9580,10 @@
                 <a:ea typeface="Calibri"/>
                 <a:cs typeface="Calibri"/>
               </a:rPr>
-              <a:t>. Add an </a:t>
-            </a:r>
-            <a:r>
-              <a:rPr sz="2400" b="0">
+              <a:t> to call the matching function, and </a:t>
+            </a:r>
+            <a:r>
+              <a:rPr sz="2050" b="0">
                 <a:solidFill>
                   <a:srgbClr val="1750EB"/>
                 </a:solidFill>
@@ -9668,10 +9602,10 @@
                 <a:ea typeface="Calibri"/>
                 <a:cs typeface="Calibri"/>
               </a:rPr>
-              <a:t> block that displays </a:t>
-            </a:r>
-            <a:r>
-              <a:rPr sz="2400" b="0">
+              <a:t> to display </a:t>
+            </a:r>
+            <a:r>
+              <a:rPr sz="2050" b="0">
                 <a:solidFill>
                   <a:srgbClr val="067D17"/>
                 </a:solidFill>
@@ -9690,10 +9624,10 @@
                 <a:ea typeface="Calibri"/>
                 <a:cs typeface="Calibri"/>
               </a:rPr>
-              <a:t> Test </a:t>
-            </a:r>
-            <a:r>
-              <a:rPr sz="2400" b="0">
+              <a:t> For example, </a:t>
+            </a:r>
+            <a:r>
+              <a:rPr sz="2050" b="0">
                 <a:solidFill>
                   <a:srgbClr val="067D17"/>
                 </a:solidFill>
@@ -9712,10 +9646,10 @@
                 <a:ea typeface="Calibri"/>
                 <a:cs typeface="Calibri"/>
               </a:rPr>
-              <a:t> and 5; display </a:t>
-            </a:r>
-            <a:r>
-              <a:rPr sz="2400" b="0">
+              <a:t> and 5 display </a:t>
+            </a:r>
+            <a:r>
+              <a:rPr sz="2050" b="0">
                 <a:solidFill>
                   <a:srgbClr val="067D17"/>
                 </a:solidFill>
@@ -9734,40 +9668,7 @@
                 <a:ea typeface="Calibri"/>
                 <a:cs typeface="Calibri"/>
               </a:rPr>
-              <a:t>. Test </a:t>
-            </a:r>
-            <a:r>
-              <a:rPr sz="2400" b="0">
-                <a:solidFill>
-                  <a:srgbClr val="067D17"/>
-                </a:solidFill>
-                <a:latin typeface="JetBrains Mono"/>
-                <a:ea typeface="JetBrains Mono"/>
-                <a:cs typeface="JetBrains Mono"/>
-              </a:rPr>
-              <a:t>"x"</a:t>
-            </a:r>
-            <a:r>
-              <a:rPr sz="2400" b="0">
-                <a:solidFill>
-                  <a:srgbClr val="080808"/>
-                </a:solidFill>
-                <a:latin typeface="Calibri"/>
-                <a:ea typeface="Calibri"/>
-                <a:cs typeface="Calibri"/>
-              </a:rPr>
-              <a:t> and 5; display </a:t>
-            </a:r>
-            <a:r>
-              <a:rPr sz="2400" b="0">
-                <a:solidFill>
-                  <a:srgbClr val="067D17"/>
-                </a:solidFill>
-                <a:latin typeface="JetBrains Mono"/>
-                <a:ea typeface="JetBrains Mono"/>
-                <a:cs typeface="JetBrains Mono"/>
-              </a:rPr>
-              <a:t>"Invalid choice."</a:t>
+              <a:t>.</a:t>
             </a:r>
           </a:p>
         </p:txBody>
@@ -10707,7 +10608,7 @@
         </p:spPr>
         <p:txBody>
           <a:bodyPr xmlns:a="http://schemas.openxmlformats.org/drawingml/2006/main">
-            <a:normAutofit fontScale="76855"/>
+            <a:normAutofit fontScale="100000"/>
           </a:bodyPr>
           <a:lstStyle xmlns:a="http://schemas.openxmlformats.org/drawingml/2006/main"/>
           <a:p xmlns:a="http://schemas.openxmlformats.org/drawingml/2006/main">
@@ -10726,10 +10627,10 @@
                 <a:ea typeface="Calibri"/>
                 <a:cs typeface="Calibri"/>
               </a:rPr>
-              <a:t>Write </a:t>
-            </a:r>
-            <a:r>
-              <a:rPr sz="2400" b="0">
+              <a:t>Create a room calculator with three functions: </a:t>
+            </a:r>
+            <a:r>
+              <a:rPr sz="2050" b="0">
                 <a:solidFill>
                   <a:srgbClr val="1750EB"/>
                 </a:solidFill>
@@ -10748,10 +10649,10 @@
                 <a:ea typeface="Calibri"/>
                 <a:cs typeface="Calibri"/>
               </a:rPr>
-              <a:t> to display </a:t>
-            </a:r>
-            <a:r>
-              <a:rPr sz="2400" b="0">
+              <a:t> displays </a:t>
+            </a:r>
+            <a:r>
+              <a:rPr sz="2050" b="0">
                 <a:solidFill>
                   <a:srgbClr val="067D17"/>
                 </a:solidFill>
@@ -10770,10 +10671,10 @@
                 <a:ea typeface="Calibri"/>
                 <a:cs typeface="Calibri"/>
               </a:rPr>
-              <a:t>. Write </a:t>
-            </a:r>
-            <a:r>
-              <a:rPr sz="2400" b="0">
+              <a:t>, and </a:t>
+            </a:r>
+            <a:r>
+              <a:rPr sz="2050" b="0">
                 <a:solidFill>
                   <a:srgbClr val="1750EB"/>
                 </a:solidFill>
@@ -10792,10 +10693,10 @@
                 <a:ea typeface="Calibri"/>
                 <a:cs typeface="Calibri"/>
               </a:rPr>
-              <a:t>(length, width) to </a:t>
-            </a:r>
-            <a:r>
-              <a:rPr sz="2400" b="0">
+              <a:t>(length, width) and </a:t>
+            </a:r>
+            <a:r>
+              <a:rPr sz="2050" b="0">
                 <a:solidFill>
                   <a:srgbClr val="1750EB"/>
                 </a:solidFill>
@@ -10803,7 +10704,7 @@
                 <a:ea typeface="JetBrains Mono"/>
                 <a:cs typeface="JetBrains Mono"/>
               </a:rPr>
-              <a:t>return</a:t>
+              <a:t>perimeter</a:t>
             </a:r>
             <a:r>
               <a:rPr sz="2400" b="0">
@@ -10814,10 +10715,10 @@
                 <a:ea typeface="Calibri"/>
                 <a:cs typeface="Calibri"/>
               </a:rPr>
-              <a:t> length * width. Write </a:t>
-            </a:r>
-            <a:r>
-              <a:rPr sz="2400" b="0">
+              <a:t>(length, width) each </a:t>
+            </a:r>
+            <a:r>
+              <a:rPr sz="2050" b="0">
                 <a:solidFill>
                   <a:srgbClr val="1750EB"/>
                 </a:solidFill>
@@ -10825,7 +10726,7 @@
                 <a:ea typeface="JetBrains Mono"/>
                 <a:cs typeface="JetBrains Mono"/>
               </a:rPr>
-              <a:t>perimeter</a:t>
+              <a:t>return</a:t>
             </a:r>
             <a:r>
               <a:rPr sz="2400" b="0">
@@ -10836,10 +10737,10 @@
                 <a:ea typeface="Calibri"/>
                 <a:cs typeface="Calibri"/>
               </a:rPr>
-              <a:t>(length, width) to </a:t>
-            </a:r>
-            <a:r>
-              <a:rPr sz="2400" b="0">
+              <a:t> a result. Call </a:t>
+            </a:r>
+            <a:r>
+              <a:rPr sz="2050" b="0">
                 <a:solidFill>
                   <a:srgbClr val="1750EB"/>
                 </a:solidFill>
@@ -10847,7 +10748,7 @@
                 <a:ea typeface="JetBrains Mono"/>
                 <a:cs typeface="JetBrains Mono"/>
               </a:rPr>
-              <a:t>return</a:t>
+              <a:t>show_menu()</a:t>
             </a:r>
             <a:r>
               <a:rPr sz="2400" b="0">
@@ -10858,252 +10759,10 @@
                 <a:ea typeface="Calibri"/>
                 <a:cs typeface="Calibri"/>
               </a:rPr>
-              <a:t> 2 * length + 2 * width. In the main program, call </a:t>
-            </a:r>
-            <a:r>
-              <a:rPr sz="2400" b="0">
-                <a:solidFill>
-                  <a:srgbClr val="1750EB"/>
-                </a:solidFill>
-                <a:latin typeface="JetBrains Mono"/>
-                <a:ea typeface="JetBrains Mono"/>
-                <a:cs typeface="JetBrains Mono"/>
-              </a:rPr>
-              <a:t>show_menu()</a:t>
-            </a:r>
-            <a:r>
-              <a:rPr sz="2400" b="0">
-                <a:solidFill>
-                  <a:srgbClr val="080808"/>
-                </a:solidFill>
-                <a:latin typeface="Calibri"/>
-                <a:ea typeface="Calibri"/>
-                <a:cs typeface="Calibri"/>
-              </a:rPr>
-              <a:t>, then ask for [choice], [length] and [width]. Display </a:t>
-            </a:r>
-            <a:r>
-              <a:rPr sz="2400" b="0">
-                <a:solidFill>
-                  <a:srgbClr val="067D17"/>
-                </a:solidFill>
-                <a:latin typeface="JetBrains Mono"/>
-                <a:ea typeface="JetBrains Mono"/>
-                <a:cs typeface="JetBrains Mono"/>
-              </a:rPr>
-              <a:t>"Area:"</a:t>
-            </a:r>
-            <a:r>
-              <a:rPr sz="2400" b="0">
-                <a:solidFill>
-                  <a:srgbClr val="080808"/>
-                </a:solidFill>
-                <a:latin typeface="Calibri"/>
-                <a:ea typeface="Calibri"/>
-                <a:cs typeface="Calibri"/>
-              </a:rPr>
-              <a:t> when [choice] is </a:t>
-            </a:r>
-            <a:r>
-              <a:rPr sz="2400" b="0">
-                <a:solidFill>
-                  <a:srgbClr val="067D17"/>
-                </a:solidFill>
-                <a:latin typeface="JetBrains Mono"/>
-                <a:ea typeface="JetBrains Mono"/>
-                <a:cs typeface="JetBrains Mono"/>
-              </a:rPr>
-              <a:t>"1"</a:t>
-            </a:r>
-            <a:r>
-              <a:rPr sz="2400" b="0">
-                <a:solidFill>
-                  <a:srgbClr val="080808"/>
-                </a:solidFill>
-                <a:latin typeface="Calibri"/>
-                <a:ea typeface="Calibri"/>
-                <a:cs typeface="Calibri"/>
-              </a:rPr>
-              <a:t>, </a:t>
-            </a:r>
-            <a:r>
-              <a:rPr sz="2400" b="0">
-                <a:solidFill>
-                  <a:srgbClr val="067D17"/>
-                </a:solidFill>
-                <a:latin typeface="JetBrains Mono"/>
-                <a:ea typeface="JetBrains Mono"/>
-                <a:cs typeface="JetBrains Mono"/>
-              </a:rPr>
-              <a:t>"Perimeter:"</a:t>
-            </a:r>
-            <a:r>
-              <a:rPr sz="2400" b="0">
-                <a:solidFill>
-                  <a:srgbClr val="080808"/>
-                </a:solidFill>
-                <a:latin typeface="Calibri"/>
-                <a:ea typeface="Calibri"/>
-                <a:cs typeface="Calibri"/>
-              </a:rPr>
-              <a:t> when [choice] is </a:t>
-            </a:r>
-            <a:r>
-              <a:rPr sz="2400" b="0">
-                <a:solidFill>
-                  <a:srgbClr val="067D17"/>
-                </a:solidFill>
-                <a:latin typeface="JetBrains Mono"/>
-                <a:ea typeface="JetBrains Mono"/>
-                <a:cs typeface="JetBrains Mono"/>
-              </a:rPr>
-              <a:t>"2"</a:t>
-            </a:r>
-            <a:r>
-              <a:rPr sz="2400" b="0">
-                <a:solidFill>
-                  <a:srgbClr val="080808"/>
-                </a:solidFill>
-                <a:latin typeface="Calibri"/>
-                <a:ea typeface="Calibri"/>
-                <a:cs typeface="Calibri"/>
-              </a:rPr>
-              <a:t>, and </a:t>
-            </a:r>
-            <a:r>
-              <a:rPr sz="2400" b="0">
-                <a:solidFill>
-                  <a:srgbClr val="067D17"/>
-                </a:solidFill>
-                <a:latin typeface="JetBrains Mono"/>
-                <a:ea typeface="JetBrains Mono"/>
-                <a:cs typeface="JetBrains Mono"/>
-              </a:rPr>
-              <a:t>"Invalid choice."</a:t>
-            </a:r>
-            <a:r>
-              <a:rPr sz="2400" b="0">
-                <a:solidFill>
-                  <a:srgbClr val="080808"/>
-                </a:solidFill>
-                <a:latin typeface="Calibri"/>
-                <a:ea typeface="Calibri"/>
-                <a:cs typeface="Calibri"/>
-              </a:rPr>
-              <a:t> for any other value. Test </a:t>
-            </a:r>
-            <a:r>
-              <a:rPr sz="2400" b="0">
-                <a:solidFill>
-                  <a:srgbClr val="067D17"/>
-                </a:solidFill>
-                <a:latin typeface="JetBrains Mono"/>
-                <a:ea typeface="JetBrains Mono"/>
-                <a:cs typeface="JetBrains Mono"/>
-              </a:rPr>
-              <a:t>"1"</a:t>
-            </a:r>
-            <a:r>
-              <a:rPr sz="2400" b="0">
-                <a:solidFill>
-                  <a:srgbClr val="080808"/>
-                </a:solidFill>
-                <a:latin typeface="Calibri"/>
-                <a:ea typeface="Calibri"/>
-                <a:cs typeface="Calibri"/>
-              </a:rPr>
-              <a:t>, 4 and 3; display </a:t>
-            </a:r>
-            <a:r>
-              <a:rPr sz="2400" b="0">
-                <a:solidFill>
-                  <a:srgbClr val="067D17"/>
-                </a:solidFill>
-                <a:latin typeface="JetBrains Mono"/>
-                <a:ea typeface="JetBrains Mono"/>
-                <a:cs typeface="JetBrains Mono"/>
-              </a:rPr>
-              <a:t>"Area: 12.0"</a:t>
-            </a:r>
-            <a:r>
-              <a:rPr sz="2400" b="0">
-                <a:solidFill>
-                  <a:srgbClr val="080808"/>
-                </a:solidFill>
-                <a:latin typeface="Calibri"/>
-                <a:ea typeface="Calibri"/>
-                <a:cs typeface="Calibri"/>
-              </a:rPr>
-              <a:t>. Test </a:t>
-            </a:r>
-            <a:r>
-              <a:rPr sz="2400" b="0">
-                <a:solidFill>
-                  <a:srgbClr val="067D17"/>
-                </a:solidFill>
-                <a:latin typeface="JetBrains Mono"/>
-                <a:ea typeface="JetBrains Mono"/>
-                <a:cs typeface="JetBrains Mono"/>
-              </a:rPr>
-              <a:t>"2"</a:t>
-            </a:r>
-            <a:r>
-              <a:rPr sz="2400" b="0">
-                <a:solidFill>
-                  <a:srgbClr val="080808"/>
-                </a:solidFill>
-                <a:latin typeface="Calibri"/>
-                <a:ea typeface="Calibri"/>
-                <a:cs typeface="Calibri"/>
-              </a:rPr>
-              <a:t>, 4 and 3; display </a:t>
-            </a:r>
-            <a:r>
-              <a:rPr sz="2400" b="0">
-                <a:solidFill>
-                  <a:srgbClr val="067D17"/>
-                </a:solidFill>
-                <a:latin typeface="JetBrains Mono"/>
-                <a:ea typeface="JetBrains Mono"/>
-                <a:cs typeface="JetBrains Mono"/>
-              </a:rPr>
-              <a:t>"Perimeter: 14.0"</a:t>
-            </a:r>
-            <a:r>
-              <a:rPr sz="2400" b="0">
-                <a:solidFill>
-                  <a:srgbClr val="080808"/>
-                </a:solidFill>
-                <a:latin typeface="Calibri"/>
-                <a:ea typeface="Calibri"/>
-                <a:cs typeface="Calibri"/>
-              </a:rPr>
-              <a:t>. Test </a:t>
-            </a:r>
-            <a:r>
-              <a:rPr sz="2400" b="0">
-                <a:solidFill>
-                  <a:srgbClr val="067D17"/>
-                </a:solidFill>
-                <a:latin typeface="JetBrains Mono"/>
-                <a:ea typeface="JetBrains Mono"/>
-                <a:cs typeface="JetBrains Mono"/>
-              </a:rPr>
-              <a:t>"x"</a:t>
-            </a:r>
-            <a:r>
-              <a:rPr sz="2400" b="0">
-                <a:solidFill>
-                  <a:srgbClr val="080808"/>
-                </a:solidFill>
-                <a:latin typeface="Calibri"/>
-                <a:ea typeface="Calibri"/>
-                <a:cs typeface="Calibri"/>
-              </a:rPr>
-              <a:t>, 4 and 3; display </a:t>
-            </a:r>
-            <a:r>
-              <a:rPr sz="2400" b="0">
+              <a:t>, ask for a choice, a length and a width, then call the matching function. Otherwise display </a:t>
+            </a:r>
+            <a:r>
+              <a:rPr sz="2050" b="0">
                 <a:solidFill>
                   <a:srgbClr val="067D17"/>
                 </a:solidFill>

--- a/Mapped Curriculum Lessons/Grade 8/Lesson 34 - Several Functions/Several Functions - Slides.pptx
+++ b/Mapped Curriculum Lessons/Grade 8/Lesson 34 - Several Functions/Several Functions - Slides.pptx
@@ -2,28 +2,28 @@
 <file path=ppt/presentation.xml><?xml version="1.0" encoding="utf-8"?>
 <p:presentation xmlns:p="http://schemas.openxmlformats.org/presentationml/2006/main" embedTrueTypeFonts="1" saveSubsetFonts="0">
   <p:sldMasterIdLst>
-    <p:sldMasterId xmlns:r="http://schemas.openxmlformats.org/officeDocument/2006/relationships" id="2147483648" r:id="Re585eb625de840ee"/>
+    <p:sldMasterId xmlns:r="http://schemas.openxmlformats.org/officeDocument/2006/relationships" id="2147483648" r:id="Rfa903587065f4c58"/>
   </p:sldMasterIdLst>
   <p:notesMasterIdLst>
-    <p:notesMasterId xmlns:r="http://schemas.openxmlformats.org/officeDocument/2006/relationships" r:id="R4ba32c2dfe434c8d"/>
+    <p:notesMasterId xmlns:r="http://schemas.openxmlformats.org/officeDocument/2006/relationships" r:id="Rb173e8bdb0a54089"/>
   </p:notesMasterIdLst>
   <p:sldIdLst>
-    <p:sldId xmlns:r="http://schemas.openxmlformats.org/officeDocument/2006/relationships" id="256" r:id="Ra4325281b3a24f9d"/>
-    <p:sldId xmlns:r="http://schemas.openxmlformats.org/officeDocument/2006/relationships" id="257" r:id="R7d86e8ce62864202"/>
-    <p:sldId xmlns:r="http://schemas.openxmlformats.org/officeDocument/2006/relationships" id="258" r:id="Rd2f1857d93e145e9"/>
-    <p:sldId xmlns:r="http://schemas.openxmlformats.org/officeDocument/2006/relationships" id="259" r:id="Rafaf8f541f314df8"/>
-    <p:sldId xmlns:r="http://schemas.openxmlformats.org/officeDocument/2006/relationships" id="260" r:id="Rb68ba8dd64a84126"/>
-    <p:sldId xmlns:r="http://schemas.openxmlformats.org/officeDocument/2006/relationships" id="261" r:id="Rdbffcb66a99c4187"/>
-    <p:sldId xmlns:r="http://schemas.openxmlformats.org/officeDocument/2006/relationships" id="262" r:id="R9dec86f3fda64a41"/>
-    <p:sldId xmlns:r="http://schemas.openxmlformats.org/officeDocument/2006/relationships" id="263" r:id="R4a1053cbe71e4c61"/>
-    <p:sldId xmlns:r="http://schemas.openxmlformats.org/officeDocument/2006/relationships" id="264" r:id="Re894e70df4fa4d55"/>
+    <p:sldId xmlns:r="http://schemas.openxmlformats.org/officeDocument/2006/relationships" id="256" r:id="R48331dadbf5747ab"/>
+    <p:sldId xmlns:r="http://schemas.openxmlformats.org/officeDocument/2006/relationships" id="257" r:id="R737ae14eb0d64906"/>
+    <p:sldId xmlns:r="http://schemas.openxmlformats.org/officeDocument/2006/relationships" id="258" r:id="R78c623d36b7e4ce2"/>
+    <p:sldId xmlns:r="http://schemas.openxmlformats.org/officeDocument/2006/relationships" id="259" r:id="R4e8438d375a74672"/>
+    <p:sldId xmlns:r="http://schemas.openxmlformats.org/officeDocument/2006/relationships" id="260" r:id="R9f6ba7805e914a0a"/>
+    <p:sldId xmlns:r="http://schemas.openxmlformats.org/officeDocument/2006/relationships" id="261" r:id="R28a48ecd5b2f40ae"/>
+    <p:sldId xmlns:r="http://schemas.openxmlformats.org/officeDocument/2006/relationships" id="262" r:id="Rd20f429fe14e4b5d"/>
+    <p:sldId xmlns:r="http://schemas.openxmlformats.org/officeDocument/2006/relationships" id="263" r:id="R26148cd9b6e74793"/>
+    <p:sldId xmlns:r="http://schemas.openxmlformats.org/officeDocument/2006/relationships" id="264" r:id="R414c5f3626574b5d"/>
   </p:sldIdLst>
   <p:sldSz cx="12192000" cy="6858000"/>
   <p:notesSz cx="6858000" cy="9144000"/>
   <p:embeddedFontLst>
     <p:embeddedFont>
       <p:font typeface="JetBrains Mono"/>
-      <p:regular xmlns:r="http://schemas.openxmlformats.org/officeDocument/2006/relationships" r:id="R9ea4eb2f37a349a3"/>
+      <p:regular xmlns:r="http://schemas.openxmlformats.org/officeDocument/2006/relationships" r:id="R5f1ec91fd2a9492a"/>
     </p:embeddedFont>
   </p:embeddedFontLst>
 </p:presentation>
@@ -1071,7 +1071,7 @@
           <p:nvPr/>
         </p:nvPicPr>
         <p:blipFill rotWithShape="1">
-          <a:blip xmlns:r="http://schemas.openxmlformats.org/officeDocument/2006/relationships" xmlns:a="http://schemas.openxmlformats.org/drawingml/2006/main" r:embed="Re0ddf90c7e7e4c5f"/>
+          <a:blip xmlns:r="http://schemas.openxmlformats.org/officeDocument/2006/relationships" xmlns:a="http://schemas.openxmlformats.org/drawingml/2006/main" r:embed="R11333d02287140bf"/>
           <a:stretch xmlns:a="http://schemas.openxmlformats.org/drawingml/2006/main"/>
         </p:blipFill>
         <p:spPr>
@@ -1451,7 +1451,7 @@
           <p:nvPr/>
         </p:nvPicPr>
         <p:blipFill rotWithShape="1">
-          <a:blip xmlns:r="http://schemas.openxmlformats.org/officeDocument/2006/relationships" xmlns:a="http://schemas.openxmlformats.org/drawingml/2006/main" r:embed="Refc4789796144c5e">
+          <a:blip xmlns:r="http://schemas.openxmlformats.org/officeDocument/2006/relationships" xmlns:a="http://schemas.openxmlformats.org/drawingml/2006/main" r:embed="R9d5d921273f847b1">
             <a:alphaModFix amt="28000"/>
           </a:blip>
           <a:stretch xmlns:a="http://schemas.openxmlformats.org/drawingml/2006/main"/>
@@ -1664,7 +1664,7 @@
           <p:nvPr/>
         </p:nvPicPr>
         <p:blipFill rotWithShape="1">
-          <a:blip xmlns:r="http://schemas.openxmlformats.org/officeDocument/2006/relationships" xmlns:a="http://schemas.openxmlformats.org/drawingml/2006/main" r:embed="R7be1375b4a9d49e3">
+          <a:blip xmlns:r="http://schemas.openxmlformats.org/officeDocument/2006/relationships" xmlns:a="http://schemas.openxmlformats.org/drawingml/2006/main" r:embed="Rc839ec6724ac4872">
             <a:alphaModFix amt="28000"/>
           </a:blip>
           <a:stretch xmlns:a="http://schemas.openxmlformats.org/drawingml/2006/main"/>
@@ -1899,7 +1899,7 @@
           <p:nvPr/>
         </p:nvPicPr>
         <p:blipFill rotWithShape="1">
-          <a:blip xmlns:r="http://schemas.openxmlformats.org/officeDocument/2006/relationships" xmlns:a="http://schemas.openxmlformats.org/drawingml/2006/main" r:embed="R3a0cfd4d406443d0">
+          <a:blip xmlns:r="http://schemas.openxmlformats.org/officeDocument/2006/relationships" xmlns:a="http://schemas.openxmlformats.org/drawingml/2006/main" r:embed="Re1dfc1d498ee494e">
             <a:alphaModFix amt="28000"/>
           </a:blip>
           <a:stretch xmlns:a="http://schemas.openxmlformats.org/drawingml/2006/main"/>
@@ -2176,7 +2176,7 @@
           <p:nvPr/>
         </p:nvPicPr>
         <p:blipFill rotWithShape="1">
-          <a:blip xmlns:r="http://schemas.openxmlformats.org/officeDocument/2006/relationships" xmlns:a="http://schemas.openxmlformats.org/drawingml/2006/main" r:embed="Rec92430a2d0a4634">
+          <a:blip xmlns:r="http://schemas.openxmlformats.org/officeDocument/2006/relationships" xmlns:a="http://schemas.openxmlformats.org/drawingml/2006/main" r:embed="Re8c034cde4d64cfe">
             <a:alphaModFix amt="28000"/>
           </a:blip>
           <a:stretch xmlns:a="http://schemas.openxmlformats.org/drawingml/2006/main"/>
@@ -2451,7 +2451,7 @@
           <p:nvPr/>
         </p:nvPicPr>
         <p:blipFill rotWithShape="1">
-          <a:blip xmlns:r="http://schemas.openxmlformats.org/officeDocument/2006/relationships" xmlns:a="http://schemas.openxmlformats.org/drawingml/2006/main" r:embed="R6187acb4b0574c11">
+          <a:blip xmlns:r="http://schemas.openxmlformats.org/officeDocument/2006/relationships" xmlns:a="http://schemas.openxmlformats.org/drawingml/2006/main" r:embed="Rca4e8718fa8440a3">
             <a:alphaModFix amt="28000"/>
           </a:blip>
           <a:stretch xmlns:a="http://schemas.openxmlformats.org/drawingml/2006/main"/>
@@ -2875,7 +2875,7 @@
           <p:nvPr/>
         </p:nvPicPr>
         <p:blipFill rotWithShape="1">
-          <a:blip xmlns:r="http://schemas.openxmlformats.org/officeDocument/2006/relationships" xmlns:a="http://schemas.openxmlformats.org/drawingml/2006/main" r:embed="R043004ca11014e5e">
+          <a:blip xmlns:r="http://schemas.openxmlformats.org/officeDocument/2006/relationships" xmlns:a="http://schemas.openxmlformats.org/drawingml/2006/main" r:embed="Rf263d02074214a49">
             <a:alphaModFix amt="28000"/>
           </a:blip>
           <a:stretch xmlns:a="http://schemas.openxmlformats.org/drawingml/2006/main"/>
@@ -3016,7 +3016,7 @@
           <p:nvPr/>
         </p:nvPicPr>
         <p:blipFill rotWithShape="1">
-          <a:blip xmlns:r="http://schemas.openxmlformats.org/officeDocument/2006/relationships" xmlns:a="http://schemas.openxmlformats.org/drawingml/2006/main" r:embed="Rd446b4512e384d1c">
+          <a:blip xmlns:r="http://schemas.openxmlformats.org/officeDocument/2006/relationships" xmlns:a="http://schemas.openxmlformats.org/drawingml/2006/main" r:embed="Rc0f3b751fa854147">
             <a:alphaModFix amt="28000"/>
           </a:blip>
           <a:stretch xmlns:a="http://schemas.openxmlformats.org/drawingml/2006/main"/>
@@ -3130,7 +3130,7 @@
           <p:nvPr/>
         </p:nvPicPr>
         <p:blipFill rotWithShape="1">
-          <a:blip xmlns:r="http://schemas.openxmlformats.org/officeDocument/2006/relationships" xmlns:a="http://schemas.openxmlformats.org/drawingml/2006/main" r:embed="R709692f51d3a4fcc">
+          <a:blip xmlns:r="http://schemas.openxmlformats.org/officeDocument/2006/relationships" xmlns:a="http://schemas.openxmlformats.org/drawingml/2006/main" r:embed="Re2bac2acdfe246de">
             <a:alphaModFix amt="28000"/>
           </a:blip>
           <a:stretch xmlns:a="http://schemas.openxmlformats.org/drawingml/2006/main"/>
@@ -3457,7 +3457,7 @@
           <p:nvPr/>
         </p:nvPicPr>
         <p:blipFill rotWithShape="1">
-          <a:blip xmlns:r="http://schemas.openxmlformats.org/officeDocument/2006/relationships" xmlns:a="http://schemas.openxmlformats.org/drawingml/2006/main" r:embed="R7c741308fd1a46ff">
+          <a:blip xmlns:r="http://schemas.openxmlformats.org/officeDocument/2006/relationships" xmlns:a="http://schemas.openxmlformats.org/drawingml/2006/main" r:embed="Rbe8705aff2a84bfe">
             <a:alphaModFix amt="28000"/>
           </a:blip>
           <a:stretch xmlns:a="http://schemas.openxmlformats.org/drawingml/2006/main"/>
@@ -3745,7 +3745,7 @@
           <p:nvPr/>
         </p:nvPicPr>
         <p:blipFill rotWithShape="1">
-          <a:blip xmlns:r="http://schemas.openxmlformats.org/officeDocument/2006/relationships" xmlns:a="http://schemas.openxmlformats.org/drawingml/2006/main" r:embed="R2e7994e51c4f4bb7">
+          <a:blip xmlns:r="http://schemas.openxmlformats.org/officeDocument/2006/relationships" xmlns:a="http://schemas.openxmlformats.org/drawingml/2006/main" r:embed="Rd3ff8a332a264189">
             <a:alphaModFix amt="28000"/>
           </a:blip>
           <a:stretch xmlns:a="http://schemas.openxmlformats.org/drawingml/2006/main"/>
@@ -3982,17 +3982,17 @@
   </p:cSld>
   <p:clrMap bg1="lt1" tx1="dk1" bg2="lt2" tx2="dk2" accent1="accent1" accent2="accent2" accent3="accent3" accent4="accent4" accent5="accent5" accent6="accent6" hlink="hlink" folHlink="folHlink"/>
   <p:sldLayoutIdLst>
-    <p:sldLayoutId xmlns:r="http://schemas.openxmlformats.org/officeDocument/2006/relationships" id="2147483649" r:id="Rfd496646d5bb4ae3"/>
-    <p:sldLayoutId xmlns:r="http://schemas.openxmlformats.org/officeDocument/2006/relationships" id="2147483650" r:id="Rf92a4291433e4037"/>
-    <p:sldLayoutId xmlns:r="http://schemas.openxmlformats.org/officeDocument/2006/relationships" id="2147483651" r:id="R268f75acba51470a"/>
-    <p:sldLayoutId xmlns:r="http://schemas.openxmlformats.org/officeDocument/2006/relationships" id="2147483652" r:id="R43e2963171484975"/>
-    <p:sldLayoutId xmlns:r="http://schemas.openxmlformats.org/officeDocument/2006/relationships" id="2147483653" r:id="R0562bc2652dd4f23"/>
-    <p:sldLayoutId xmlns:r="http://schemas.openxmlformats.org/officeDocument/2006/relationships" id="2147483654" r:id="R4ad516a50abb43df"/>
-    <p:sldLayoutId xmlns:r="http://schemas.openxmlformats.org/officeDocument/2006/relationships" id="2147483655" r:id="Rc59c2298f8f24240"/>
-    <p:sldLayoutId xmlns:r="http://schemas.openxmlformats.org/officeDocument/2006/relationships" id="2147483656" r:id="Rd0768b9936254fd3"/>
-    <p:sldLayoutId xmlns:r="http://schemas.openxmlformats.org/officeDocument/2006/relationships" id="2147483657" r:id="R890cf5de060d4ced"/>
-    <p:sldLayoutId xmlns:r="http://schemas.openxmlformats.org/officeDocument/2006/relationships" id="2147483658" r:id="R4b0fe9ba86774d22"/>
-    <p:sldLayoutId xmlns:r="http://schemas.openxmlformats.org/officeDocument/2006/relationships" id="2147483659" r:id="R3d4ccdf7d5d74057"/>
+    <p:sldLayoutId xmlns:r="http://schemas.openxmlformats.org/officeDocument/2006/relationships" id="2147483649" r:id="R84296a9d27554e0d"/>
+    <p:sldLayoutId xmlns:r="http://schemas.openxmlformats.org/officeDocument/2006/relationships" id="2147483650" r:id="R57ffef56beb44381"/>
+    <p:sldLayoutId xmlns:r="http://schemas.openxmlformats.org/officeDocument/2006/relationships" id="2147483651" r:id="R7376a7f293ee4f0d"/>
+    <p:sldLayoutId xmlns:r="http://schemas.openxmlformats.org/officeDocument/2006/relationships" id="2147483652" r:id="R7a2a5b1edaba4533"/>
+    <p:sldLayoutId xmlns:r="http://schemas.openxmlformats.org/officeDocument/2006/relationships" id="2147483653" r:id="Rd85f8426d40940ed"/>
+    <p:sldLayoutId xmlns:r="http://schemas.openxmlformats.org/officeDocument/2006/relationships" id="2147483654" r:id="R25acfad297c14328"/>
+    <p:sldLayoutId xmlns:r="http://schemas.openxmlformats.org/officeDocument/2006/relationships" id="2147483655" r:id="R301b7257297a40d1"/>
+    <p:sldLayoutId xmlns:r="http://schemas.openxmlformats.org/officeDocument/2006/relationships" id="2147483656" r:id="R6ef648f1865147b8"/>
+    <p:sldLayoutId xmlns:r="http://schemas.openxmlformats.org/officeDocument/2006/relationships" id="2147483657" r:id="R7292238953a94888"/>
+    <p:sldLayoutId xmlns:r="http://schemas.openxmlformats.org/officeDocument/2006/relationships" id="2147483658" r:id="Rc295349bc264429c"/>
+    <p:sldLayoutId xmlns:r="http://schemas.openxmlformats.org/officeDocument/2006/relationships" id="2147483659" r:id="R1b265d772f8749dd"/>
   </p:sldLayoutIdLst>
   <p:hf hdr="0" ftr="0" dt="0"/>
   <p:txStyles>
@@ -4898,7 +4898,7 @@
             <a:r>
               <a:rPr sz="2400">
                 <a:solidFill>
-                  <a:srgbClr val="1750EB"/>
+                  <a:srgbClr val="C45E00"/>
                 </a:solidFill>
                 <a:latin typeface="JetBrains Mono"/>
                 <a:ea typeface="JetBrains Mono"/>
@@ -4939,7 +4939,7 @@
             <a:r>
               <a:rPr sz="2400">
                 <a:solidFill>
-                  <a:srgbClr val="1750EB"/>
+                  <a:srgbClr val="C45E00"/>
                 </a:solidFill>
                 <a:latin typeface="JetBrains Mono"/>
                 <a:ea typeface="JetBrains Mono"/>
@@ -4969,7 +4969,7 @@
             <a:r>
               <a:rPr sz="2400">
                 <a:solidFill>
-                  <a:srgbClr val="1750EB"/>
+                  <a:srgbClr val="C45E00"/>
                 </a:solidFill>
                 <a:latin typeface="JetBrains Mono"/>
                 <a:ea typeface="JetBrains Mono"/>
@@ -5010,7 +5010,7 @@
             <a:r>
               <a:rPr sz="2400">
                 <a:solidFill>
-                  <a:srgbClr val="1750EB"/>
+                  <a:srgbClr val="C45E00"/>
                 </a:solidFill>
                 <a:latin typeface="JetBrains Mono"/>
                 <a:ea typeface="JetBrains Mono"/>
@@ -5240,7 +5240,7 @@
             <a:r>
               <a:rPr sz="2400">
                 <a:solidFill>
-                  <a:srgbClr val="1750EB"/>
+                  <a:srgbClr val="C45E00"/>
                 </a:solidFill>
                 <a:latin typeface="JetBrains Mono"/>
                 <a:ea typeface="JetBrains Mono"/>
@@ -5377,7 +5377,7 @@
             <a:r>
               <a:rPr sz="2400">
                 <a:solidFill>
-                  <a:srgbClr val="1750EB"/>
+                  <a:srgbClr val="C45E00"/>
                 </a:solidFill>
                 <a:latin typeface="JetBrains Mono"/>
                 <a:ea typeface="JetBrains Mono"/>
@@ -5747,7 +5747,7 @@
             <a:r>
               <a:rPr sz="2400">
                 <a:solidFill>
-                  <a:srgbClr val="1750EB"/>
+                  <a:srgbClr val="C45E00"/>
                 </a:solidFill>
                 <a:latin typeface="JetBrains Mono"/>
                 <a:ea typeface="JetBrains Mono"/>
@@ -5788,7 +5788,7 @@
             <a:r>
               <a:rPr sz="2400">
                 <a:solidFill>
-                  <a:srgbClr val="1750EB"/>
+                  <a:srgbClr val="C45E00"/>
                 </a:solidFill>
                 <a:latin typeface="JetBrains Mono"/>
                 <a:ea typeface="JetBrains Mono"/>
@@ -5818,7 +5818,7 @@
             <a:r>
               <a:rPr sz="2400">
                 <a:solidFill>
-                  <a:srgbClr val="1750EB"/>
+                  <a:srgbClr val="C45E00"/>
                 </a:solidFill>
                 <a:latin typeface="JetBrains Mono"/>
                 <a:ea typeface="JetBrains Mono"/>
@@ -5859,7 +5859,7 @@
             <a:r>
               <a:rPr sz="2400">
                 <a:solidFill>
-                  <a:srgbClr val="1750EB"/>
+                  <a:srgbClr val="C45E00"/>
                 </a:solidFill>
                 <a:latin typeface="JetBrains Mono"/>
                 <a:ea typeface="JetBrains Mono"/>
@@ -6089,7 +6089,7 @@
             <a:r>
               <a:rPr sz="2400">
                 <a:solidFill>
-                  <a:srgbClr val="1750EB"/>
+                  <a:srgbClr val="C45E00"/>
                 </a:solidFill>
                 <a:latin typeface="JetBrains Mono"/>
                 <a:ea typeface="JetBrains Mono"/>
@@ -6226,7 +6226,7 @@
             <a:r>
               <a:rPr sz="2400">
                 <a:solidFill>
-                  <a:srgbClr val="1750EB"/>
+                  <a:srgbClr val="C45E00"/>
                 </a:solidFill>
                 <a:latin typeface="JetBrains Mono"/>
                 <a:ea typeface="JetBrains Mono"/>
@@ -6596,7 +6596,7 @@
             <a:r>
               <a:rPr sz="2400">
                 <a:solidFill>
-                  <a:srgbClr val="1750EB"/>
+                  <a:srgbClr val="C45E00"/>
                 </a:solidFill>
                 <a:latin typeface="JetBrains Mono"/>
                 <a:ea typeface="JetBrains Mono"/>
@@ -6637,7 +6637,7 @@
             <a:r>
               <a:rPr sz="2400">
                 <a:solidFill>
-                  <a:srgbClr val="1750EB"/>
+                  <a:srgbClr val="C45E00"/>
                 </a:solidFill>
                 <a:latin typeface="JetBrains Mono"/>
                 <a:ea typeface="JetBrains Mono"/>
@@ -6667,7 +6667,7 @@
             <a:r>
               <a:rPr sz="2400">
                 <a:solidFill>
-                  <a:srgbClr val="1750EB"/>
+                  <a:srgbClr val="C45E00"/>
                 </a:solidFill>
                 <a:latin typeface="JetBrains Mono"/>
                 <a:ea typeface="JetBrains Mono"/>
@@ -6708,7 +6708,7 @@
             <a:r>
               <a:rPr sz="2400">
                 <a:solidFill>
-                  <a:srgbClr val="1750EB"/>
+                  <a:srgbClr val="C45E00"/>
                 </a:solidFill>
                 <a:latin typeface="JetBrains Mono"/>
                 <a:ea typeface="JetBrains Mono"/>
@@ -6938,7 +6938,7 @@
             <a:r>
               <a:rPr sz="2400">
                 <a:solidFill>
-                  <a:srgbClr val="1750EB"/>
+                  <a:srgbClr val="C45E00"/>
                 </a:solidFill>
                 <a:latin typeface="JetBrains Mono"/>
                 <a:ea typeface="JetBrains Mono"/>
@@ -7075,7 +7075,7 @@
             <a:r>
               <a:rPr sz="2400">
                 <a:solidFill>
-                  <a:srgbClr val="1750EB"/>
+                  <a:srgbClr val="C45E00"/>
                 </a:solidFill>
                 <a:latin typeface="JetBrains Mono"/>
                 <a:ea typeface="JetBrains Mono"/>
@@ -7696,24 +7696,196 @@
             <a:r>
               <a:rPr sz="1100">
                 <a:solidFill>
+                  <a:srgbClr val="C45E00"/>
+                </a:solidFill>
+                <a:latin typeface="JetBrains Mono"/>
+                <a:ea typeface="JetBrains Mono"/>
+                <a:cs typeface="JetBrains Mono"/>
+              </a:rPr>
+              <a:t>def</a:t>
+            </a:r>
+            <a:r>
+              <a:rPr sz="1100">
+                <a:solidFill>
+                  <a:srgbClr val="080808"/>
+                </a:solidFill>
+                <a:latin typeface="JetBrains Mono"/>
+                <a:ea typeface="JetBrains Mono"/>
+                <a:cs typeface="JetBrains Mono"/>
+              </a:rPr>
+              <a:t> double(number):</a:t>
+            </a:r>
+            <a:br>
+              <a:rPr sz="1100">
+                <a:solidFill>
+                  <a:srgbClr val="080808"/>
+                </a:solidFill>
+                <a:latin typeface="JetBrains Mono"/>
+                <a:ea typeface="JetBrains Mono"/>
+                <a:cs typeface="JetBrains Mono"/>
+              </a:rPr>
+            </a:br>
+            <a:r>
+              <a:rPr sz="1100">
+                <a:solidFill>
+                  <a:srgbClr val="080808"/>
+                </a:solidFill>
+                <a:latin typeface="JetBrains Mono"/>
+                <a:ea typeface="JetBrains Mono"/>
+                <a:cs typeface="JetBrains Mono"/>
+              </a:rPr>
+              <a:t>    </a:t>
+            </a:r>
+            <a:r>
+              <a:rPr sz="1100">
+                <a:solidFill>
+                  <a:srgbClr val="C45E00"/>
+                </a:solidFill>
+                <a:latin typeface="JetBrains Mono"/>
+                <a:ea typeface="JetBrains Mono"/>
+                <a:cs typeface="JetBrains Mono"/>
+              </a:rPr>
+              <a:t>return</a:t>
+            </a:r>
+            <a:r>
+              <a:rPr sz="1100">
+                <a:solidFill>
+                  <a:srgbClr val="080808"/>
+                </a:solidFill>
+                <a:latin typeface="JetBrains Mono"/>
+                <a:ea typeface="JetBrains Mono"/>
+                <a:cs typeface="JetBrains Mono"/>
+              </a:rPr>
+              <a:t> number * 2</a:t>
+            </a:r>
+            <a:br>
+              <a:rPr sz="1100">
+                <a:solidFill>
+                  <a:srgbClr val="080808"/>
+                </a:solidFill>
+                <a:latin typeface="JetBrains Mono"/>
+                <a:ea typeface="JetBrains Mono"/>
+                <a:cs typeface="JetBrains Mono"/>
+              </a:rPr>
+            </a:br>
+            <a:r>
+              <a:rPr sz="1100">
+                <a:solidFill>
+                  <a:srgbClr val="C45E00"/>
+                </a:solidFill>
+                <a:latin typeface="JetBrains Mono"/>
+                <a:ea typeface="JetBrains Mono"/>
+                <a:cs typeface="JetBrains Mono"/>
+              </a:rPr>
+              <a:t>def</a:t>
+            </a:r>
+            <a:r>
+              <a:rPr sz="1100">
+                <a:solidFill>
+                  <a:srgbClr val="080808"/>
+                </a:solidFill>
+                <a:latin typeface="JetBrains Mono"/>
+                <a:ea typeface="JetBrains Mono"/>
+                <a:cs typeface="JetBrains Mono"/>
+              </a:rPr>
+              <a:t> square(number):</a:t>
+            </a:r>
+            <a:br>
+              <a:rPr sz="1100">
+                <a:solidFill>
+                  <a:srgbClr val="080808"/>
+                </a:solidFill>
+                <a:latin typeface="JetBrains Mono"/>
+                <a:ea typeface="JetBrains Mono"/>
+                <a:cs typeface="JetBrains Mono"/>
+              </a:rPr>
+            </a:br>
+            <a:r>
+              <a:rPr sz="1100">
+                <a:solidFill>
+                  <a:srgbClr val="080808"/>
+                </a:solidFill>
+                <a:latin typeface="JetBrains Mono"/>
+                <a:ea typeface="JetBrains Mono"/>
+                <a:cs typeface="JetBrains Mono"/>
+              </a:rPr>
+              <a:t>    </a:t>
+            </a:r>
+            <a:r>
+              <a:rPr sz="1100">
+                <a:solidFill>
+                  <a:srgbClr val="C45E00"/>
+                </a:solidFill>
+                <a:latin typeface="JetBrains Mono"/>
+                <a:ea typeface="JetBrains Mono"/>
+                <a:cs typeface="JetBrains Mono"/>
+              </a:rPr>
+              <a:t>return</a:t>
+            </a:r>
+            <a:r>
+              <a:rPr sz="1100">
+                <a:solidFill>
+                  <a:srgbClr val="080808"/>
+                </a:solidFill>
+                <a:latin typeface="JetBrains Mono"/>
+                <a:ea typeface="JetBrains Mono"/>
+                <a:cs typeface="JetBrains Mono"/>
+              </a:rPr>
+              <a:t> number * number</a:t>
+            </a:r>
+            <a:br>
+              <a:rPr sz="1100">
+                <a:solidFill>
+                  <a:srgbClr val="080808"/>
+                </a:solidFill>
+                <a:latin typeface="JetBrains Mono"/>
+                <a:ea typeface="JetBrains Mono"/>
+                <a:cs typeface="JetBrains Mono"/>
+              </a:rPr>
+            </a:br>
+            <a:r>
+              <a:rPr sz="1100">
+                <a:solidFill>
                   <a:srgbClr val="1750EB"/>
                 </a:solidFill>
                 <a:latin typeface="JetBrains Mono"/>
                 <a:ea typeface="JetBrains Mono"/>
                 <a:cs typeface="JetBrains Mono"/>
               </a:rPr>
-              <a:t>def</a:t>
-            </a:r>
-            <a:r>
-              <a:rPr sz="1100">
-                <a:solidFill>
-                  <a:srgbClr val="080808"/>
-                </a:solidFill>
-                <a:latin typeface="JetBrains Mono"/>
-                <a:ea typeface="JetBrains Mono"/>
-                <a:cs typeface="JetBrains Mono"/>
-              </a:rPr>
-              <a:t> double(number):</a:t>
+              <a:t>print</a:t>
+            </a:r>
+            <a:r>
+              <a:rPr sz="1100">
+                <a:solidFill>
+                  <a:srgbClr val="080808"/>
+                </a:solidFill>
+                <a:latin typeface="JetBrains Mono"/>
+                <a:ea typeface="JetBrains Mono"/>
+                <a:cs typeface="JetBrains Mono"/>
+              </a:rPr>
+              <a:t>(</a:t>
+            </a:r>
+            <a:r>
+              <a:rPr sz="1100">
+                <a:solidFill>
+                  <a:srgbClr val="067D17"/>
+                </a:solidFill>
+                <a:latin typeface="JetBrains Mono"/>
+                <a:ea typeface="JetBrains Mono"/>
+                <a:cs typeface="JetBrains Mono"/>
+              </a:rPr>
+              <a:t>"1: double\n2: square"</a:t>
+            </a:r>
+            <a:r>
+              <a:rPr sz="1100">
+                <a:solidFill>
+                  <a:srgbClr val="080808"/>
+                </a:solidFill>
+                <a:latin typeface="JetBrains Mono"/>
+                <a:ea typeface="JetBrains Mono"/>
+                <a:cs typeface="JetBrains Mono"/>
+              </a:rPr>
+              <a:t>)</a:t>
             </a:r>
             <a:br>
               <a:rPr sz="1100">
@@ -7734,7 +7906,7 @@
                 <a:ea typeface="JetBrains Mono"/>
                 <a:cs typeface="JetBrains Mono"/>
               </a:rPr>
-              <a:t>    </a:t>
+              <a:t>choice = </a:t>
             </a:r>
             <a:r>
               <a:rPr sz="1100">
@@ -7745,18 +7917,40 @@
                 <a:ea typeface="JetBrains Mono"/>
                 <a:cs typeface="JetBrains Mono"/>
               </a:rPr>
-              <a:t>return</a:t>
-            </a:r>
-            <a:r>
-              <a:rPr sz="1100">
-                <a:solidFill>
-                  <a:srgbClr val="080808"/>
-                </a:solidFill>
-                <a:latin typeface="JetBrains Mono"/>
-                <a:ea typeface="JetBrains Mono"/>
-                <a:cs typeface="JetBrains Mono"/>
-              </a:rPr>
-              <a:t> number * 2</a:t>
+              <a:t>input</a:t>
+            </a:r>
+            <a:r>
+              <a:rPr sz="1100">
+                <a:solidFill>
+                  <a:srgbClr val="080808"/>
+                </a:solidFill>
+                <a:latin typeface="JetBrains Mono"/>
+                <a:ea typeface="JetBrains Mono"/>
+                <a:cs typeface="JetBrains Mono"/>
+              </a:rPr>
+              <a:t>(</a:t>
+            </a:r>
+            <a:r>
+              <a:rPr sz="1100">
+                <a:solidFill>
+                  <a:srgbClr val="067D17"/>
+                </a:solidFill>
+                <a:latin typeface="JetBrains Mono"/>
+                <a:ea typeface="JetBrains Mono"/>
+                <a:cs typeface="JetBrains Mono"/>
+              </a:rPr>
+              <a:t>"Choice: "</a:t>
+            </a:r>
+            <a:r>
+              <a:rPr sz="1100">
+                <a:solidFill>
+                  <a:srgbClr val="080808"/>
+                </a:solidFill>
+                <a:latin typeface="JetBrains Mono"/>
+                <a:ea typeface="JetBrains Mono"/>
+                <a:cs typeface="JetBrains Mono"/>
+              </a:rPr>
+              <a:t>)</a:t>
             </a:r>
             <a:br>
               <a:rPr sz="1100">
@@ -7771,24 +7965,79 @@
             <a:r>
               <a:rPr sz="1100">
                 <a:solidFill>
+                  <a:srgbClr val="080808"/>
+                </a:solidFill>
+                <a:latin typeface="JetBrains Mono"/>
+                <a:ea typeface="JetBrains Mono"/>
+                <a:cs typeface="JetBrains Mono"/>
+              </a:rPr>
+              <a:t>value = </a:t>
+            </a:r>
+            <a:r>
+              <a:rPr sz="1100">
+                <a:solidFill>
                   <a:srgbClr val="1750EB"/>
                 </a:solidFill>
                 <a:latin typeface="JetBrains Mono"/>
                 <a:ea typeface="JetBrains Mono"/>
                 <a:cs typeface="JetBrains Mono"/>
               </a:rPr>
-              <a:t>def</a:t>
-            </a:r>
-            <a:r>
-              <a:rPr sz="1100">
-                <a:solidFill>
-                  <a:srgbClr val="080808"/>
-                </a:solidFill>
-                <a:latin typeface="JetBrains Mono"/>
-                <a:ea typeface="JetBrains Mono"/>
-                <a:cs typeface="JetBrains Mono"/>
-              </a:rPr>
-              <a:t> square(number):</a:t>
+              <a:t>int</a:t>
+            </a:r>
+            <a:r>
+              <a:rPr sz="1100">
+                <a:solidFill>
+                  <a:srgbClr val="080808"/>
+                </a:solidFill>
+                <a:latin typeface="JetBrains Mono"/>
+                <a:ea typeface="JetBrains Mono"/>
+                <a:cs typeface="JetBrains Mono"/>
+              </a:rPr>
+              <a:t>(</a:t>
+            </a:r>
+            <a:r>
+              <a:rPr sz="1100">
+                <a:solidFill>
+                  <a:srgbClr val="1750EB"/>
+                </a:solidFill>
+                <a:latin typeface="JetBrains Mono"/>
+                <a:ea typeface="JetBrains Mono"/>
+                <a:cs typeface="JetBrains Mono"/>
+              </a:rPr>
+              <a:t>input</a:t>
+            </a:r>
+            <a:r>
+              <a:rPr sz="1100">
+                <a:solidFill>
+                  <a:srgbClr val="080808"/>
+                </a:solidFill>
+                <a:latin typeface="JetBrains Mono"/>
+                <a:ea typeface="JetBrains Mono"/>
+                <a:cs typeface="JetBrains Mono"/>
+              </a:rPr>
+              <a:t>(</a:t>
+            </a:r>
+            <a:r>
+              <a:rPr sz="1100">
+                <a:solidFill>
+                  <a:srgbClr val="067D17"/>
+                </a:solidFill>
+                <a:latin typeface="JetBrains Mono"/>
+                <a:ea typeface="JetBrains Mono"/>
+                <a:cs typeface="JetBrains Mono"/>
+              </a:rPr>
+              <a:t>"Number: "</a:t>
+            </a:r>
+            <a:r>
+              <a:rPr sz="1100">
+                <a:solidFill>
+                  <a:srgbClr val="080808"/>
+                </a:solidFill>
+                <a:latin typeface="JetBrains Mono"/>
+                <a:ea typeface="JetBrains Mono"/>
+                <a:cs typeface="JetBrains Mono"/>
+              </a:rPr>
+              <a:t>))</a:t>
             </a:r>
             <a:br>
               <a:rPr sz="1100">
@@ -7803,256 +8052,7 @@
             <a:r>
               <a:rPr sz="1100">
                 <a:solidFill>
-                  <a:srgbClr val="080808"/>
-                </a:solidFill>
-                <a:latin typeface="JetBrains Mono"/>
-                <a:ea typeface="JetBrains Mono"/>
-                <a:cs typeface="JetBrains Mono"/>
-              </a:rPr>
-              <a:t>    </a:t>
-            </a:r>
-            <a:r>
-              <a:rPr sz="1100">
-                <a:solidFill>
-                  <a:srgbClr val="1750EB"/>
-                </a:solidFill>
-                <a:latin typeface="JetBrains Mono"/>
-                <a:ea typeface="JetBrains Mono"/>
-                <a:cs typeface="JetBrains Mono"/>
-              </a:rPr>
-              <a:t>return</a:t>
-            </a:r>
-            <a:r>
-              <a:rPr sz="1100">
-                <a:solidFill>
-                  <a:srgbClr val="080808"/>
-                </a:solidFill>
-                <a:latin typeface="JetBrains Mono"/>
-                <a:ea typeface="JetBrains Mono"/>
-                <a:cs typeface="JetBrains Mono"/>
-              </a:rPr>
-              <a:t> number * number</a:t>
-            </a:r>
-            <a:br>
-              <a:rPr sz="1100">
-                <a:solidFill>
-                  <a:srgbClr val="080808"/>
-                </a:solidFill>
-                <a:latin typeface="JetBrains Mono"/>
-                <a:ea typeface="JetBrains Mono"/>
-                <a:cs typeface="JetBrains Mono"/>
-              </a:rPr>
-            </a:br>
-            <a:r>
-              <a:rPr sz="1100">
-                <a:solidFill>
-                  <a:srgbClr val="1750EB"/>
-                </a:solidFill>
-                <a:latin typeface="JetBrains Mono"/>
-                <a:ea typeface="JetBrains Mono"/>
-                <a:cs typeface="JetBrains Mono"/>
-              </a:rPr>
-              <a:t>print</a:t>
-            </a:r>
-            <a:r>
-              <a:rPr sz="1100">
-                <a:solidFill>
-                  <a:srgbClr val="080808"/>
-                </a:solidFill>
-                <a:latin typeface="JetBrains Mono"/>
-                <a:ea typeface="JetBrains Mono"/>
-                <a:cs typeface="JetBrains Mono"/>
-              </a:rPr>
-              <a:t>(</a:t>
-            </a:r>
-            <a:r>
-              <a:rPr sz="1100">
-                <a:solidFill>
-                  <a:srgbClr val="067D17"/>
-                </a:solidFill>
-                <a:latin typeface="JetBrains Mono"/>
-                <a:ea typeface="JetBrains Mono"/>
-                <a:cs typeface="JetBrains Mono"/>
-              </a:rPr>
-              <a:t>"1: double\n2: square"</a:t>
-            </a:r>
-            <a:r>
-              <a:rPr sz="1100">
-                <a:solidFill>
-                  <a:srgbClr val="080808"/>
-                </a:solidFill>
-                <a:latin typeface="JetBrains Mono"/>
-                <a:ea typeface="JetBrains Mono"/>
-                <a:cs typeface="JetBrains Mono"/>
-              </a:rPr>
-              <a:t>)</a:t>
-            </a:r>
-            <a:br>
-              <a:rPr sz="1100">
-                <a:solidFill>
-                  <a:srgbClr val="080808"/>
-                </a:solidFill>
-                <a:latin typeface="JetBrains Mono"/>
-                <a:ea typeface="JetBrains Mono"/>
-                <a:cs typeface="JetBrains Mono"/>
-              </a:rPr>
-            </a:br>
-            <a:r>
-              <a:rPr sz="1100">
-                <a:solidFill>
-                  <a:srgbClr val="080808"/>
-                </a:solidFill>
-                <a:latin typeface="JetBrains Mono"/>
-                <a:ea typeface="JetBrains Mono"/>
-                <a:cs typeface="JetBrains Mono"/>
-              </a:rPr>
-              <a:t>choice = </a:t>
-            </a:r>
-            <a:r>
-              <a:rPr sz="1100">
-                <a:solidFill>
-                  <a:srgbClr val="1750EB"/>
-                </a:solidFill>
-                <a:latin typeface="JetBrains Mono"/>
-                <a:ea typeface="JetBrains Mono"/>
-                <a:cs typeface="JetBrains Mono"/>
-              </a:rPr>
-              <a:t>input</a:t>
-            </a:r>
-            <a:r>
-              <a:rPr sz="1100">
-                <a:solidFill>
-                  <a:srgbClr val="080808"/>
-                </a:solidFill>
-                <a:latin typeface="JetBrains Mono"/>
-                <a:ea typeface="JetBrains Mono"/>
-                <a:cs typeface="JetBrains Mono"/>
-              </a:rPr>
-              <a:t>(</a:t>
-            </a:r>
-            <a:r>
-              <a:rPr sz="1100">
-                <a:solidFill>
-                  <a:srgbClr val="067D17"/>
-                </a:solidFill>
-                <a:latin typeface="JetBrains Mono"/>
-                <a:ea typeface="JetBrains Mono"/>
-                <a:cs typeface="JetBrains Mono"/>
-              </a:rPr>
-              <a:t>"Choice: "</a:t>
-            </a:r>
-            <a:r>
-              <a:rPr sz="1100">
-                <a:solidFill>
-                  <a:srgbClr val="080808"/>
-                </a:solidFill>
-                <a:latin typeface="JetBrains Mono"/>
-                <a:ea typeface="JetBrains Mono"/>
-                <a:cs typeface="JetBrains Mono"/>
-              </a:rPr>
-              <a:t>)</a:t>
-            </a:r>
-            <a:br>
-              <a:rPr sz="1100">
-                <a:solidFill>
-                  <a:srgbClr val="080808"/>
-                </a:solidFill>
-                <a:latin typeface="JetBrains Mono"/>
-                <a:ea typeface="JetBrains Mono"/>
-                <a:cs typeface="JetBrains Mono"/>
-              </a:rPr>
-            </a:br>
-            <a:r>
-              <a:rPr sz="1100">
-                <a:solidFill>
-                  <a:srgbClr val="080808"/>
-                </a:solidFill>
-                <a:latin typeface="JetBrains Mono"/>
-                <a:ea typeface="JetBrains Mono"/>
-                <a:cs typeface="JetBrains Mono"/>
-              </a:rPr>
-              <a:t>value = </a:t>
-            </a:r>
-            <a:r>
-              <a:rPr sz="1100">
-                <a:solidFill>
-                  <a:srgbClr val="1750EB"/>
-                </a:solidFill>
-                <a:latin typeface="JetBrains Mono"/>
-                <a:ea typeface="JetBrains Mono"/>
-                <a:cs typeface="JetBrains Mono"/>
-              </a:rPr>
-              <a:t>int</a:t>
-            </a:r>
-            <a:r>
-              <a:rPr sz="1100">
-                <a:solidFill>
-                  <a:srgbClr val="080808"/>
-                </a:solidFill>
-                <a:latin typeface="JetBrains Mono"/>
-                <a:ea typeface="JetBrains Mono"/>
-                <a:cs typeface="JetBrains Mono"/>
-              </a:rPr>
-              <a:t>(</a:t>
-            </a:r>
-            <a:r>
-              <a:rPr sz="1100">
-                <a:solidFill>
-                  <a:srgbClr val="1750EB"/>
-                </a:solidFill>
-                <a:latin typeface="JetBrains Mono"/>
-                <a:ea typeface="JetBrains Mono"/>
-                <a:cs typeface="JetBrains Mono"/>
-              </a:rPr>
-              <a:t>input</a:t>
-            </a:r>
-            <a:r>
-              <a:rPr sz="1100">
-                <a:solidFill>
-                  <a:srgbClr val="080808"/>
-                </a:solidFill>
-                <a:latin typeface="JetBrains Mono"/>
-                <a:ea typeface="JetBrains Mono"/>
-                <a:cs typeface="JetBrains Mono"/>
-              </a:rPr>
-              <a:t>(</a:t>
-            </a:r>
-            <a:r>
-              <a:rPr sz="1100">
-                <a:solidFill>
-                  <a:srgbClr val="067D17"/>
-                </a:solidFill>
-                <a:latin typeface="JetBrains Mono"/>
-                <a:ea typeface="JetBrains Mono"/>
-                <a:cs typeface="JetBrains Mono"/>
-              </a:rPr>
-              <a:t>"Number: "</a:t>
-            </a:r>
-            <a:r>
-              <a:rPr sz="1100">
-                <a:solidFill>
-                  <a:srgbClr val="080808"/>
-                </a:solidFill>
-                <a:latin typeface="JetBrains Mono"/>
-                <a:ea typeface="JetBrains Mono"/>
-                <a:cs typeface="JetBrains Mono"/>
-              </a:rPr>
-              <a:t>))</a:t>
-            </a:r>
-            <a:br>
-              <a:rPr sz="1100">
-                <a:solidFill>
-                  <a:srgbClr val="080808"/>
-                </a:solidFill>
-                <a:latin typeface="JetBrains Mono"/>
-                <a:ea typeface="JetBrains Mono"/>
-                <a:cs typeface="JetBrains Mono"/>
-              </a:rPr>
-            </a:br>
-            <a:r>
-              <a:rPr sz="1100">
-                <a:solidFill>
-                  <a:srgbClr val="1750EB"/>
+                  <a:srgbClr val="C45E00"/>
                 </a:solidFill>
                 <a:latin typeface="JetBrains Mono"/>
                 <a:ea typeface="JetBrains Mono"/>
@@ -8193,7 +8193,7 @@
             <a:r>
               <a:rPr sz="1100">
                 <a:solidFill>
-                  <a:srgbClr val="1750EB"/>
+                  <a:srgbClr val="C45E00"/>
                 </a:solidFill>
                 <a:latin typeface="JetBrains Mono"/>
                 <a:ea typeface="JetBrains Mono"/>
@@ -8428,7 +8428,7 @@
             <a:r>
               <a:rPr sz="2050" b="0">
                 <a:solidFill>
-                  <a:srgbClr val="1750EB"/>
+                  <a:srgbClr val="C45E00"/>
                 </a:solidFill>
                 <a:latin typeface="JetBrains Mono"/>
                 <a:ea typeface="JetBrains Mono"/>
@@ -8787,24 +8787,196 @@
             <a:r>
               <a:rPr sz="1100">
                 <a:solidFill>
+                  <a:srgbClr val="C45E00"/>
+                </a:solidFill>
+                <a:latin typeface="JetBrains Mono"/>
+                <a:ea typeface="JetBrains Mono"/>
+                <a:cs typeface="JetBrains Mono"/>
+              </a:rPr>
+              <a:t>def</a:t>
+            </a:r>
+            <a:r>
+              <a:rPr sz="1100">
+                <a:solidFill>
+                  <a:srgbClr val="080808"/>
+                </a:solidFill>
+                <a:latin typeface="JetBrains Mono"/>
+                <a:ea typeface="JetBrains Mono"/>
+                <a:cs typeface="JetBrains Mono"/>
+              </a:rPr>
+              <a:t> double(number):</a:t>
+            </a:r>
+            <a:br>
+              <a:rPr sz="1100">
+                <a:solidFill>
+                  <a:srgbClr val="080808"/>
+                </a:solidFill>
+                <a:latin typeface="JetBrains Mono"/>
+                <a:ea typeface="JetBrains Mono"/>
+                <a:cs typeface="JetBrains Mono"/>
+              </a:rPr>
+            </a:br>
+            <a:r>
+              <a:rPr sz="1100">
+                <a:solidFill>
+                  <a:srgbClr val="080808"/>
+                </a:solidFill>
+                <a:latin typeface="JetBrains Mono"/>
+                <a:ea typeface="JetBrains Mono"/>
+                <a:cs typeface="JetBrains Mono"/>
+              </a:rPr>
+              <a:t>    </a:t>
+            </a:r>
+            <a:r>
+              <a:rPr sz="1100">
+                <a:solidFill>
+                  <a:srgbClr val="C45E00"/>
+                </a:solidFill>
+                <a:latin typeface="JetBrains Mono"/>
+                <a:ea typeface="JetBrains Mono"/>
+                <a:cs typeface="JetBrains Mono"/>
+              </a:rPr>
+              <a:t>return</a:t>
+            </a:r>
+            <a:r>
+              <a:rPr sz="1100">
+                <a:solidFill>
+                  <a:srgbClr val="080808"/>
+                </a:solidFill>
+                <a:latin typeface="JetBrains Mono"/>
+                <a:ea typeface="JetBrains Mono"/>
+                <a:cs typeface="JetBrains Mono"/>
+              </a:rPr>
+              <a:t> number * 2</a:t>
+            </a:r>
+            <a:br>
+              <a:rPr sz="1100">
+                <a:solidFill>
+                  <a:srgbClr val="080808"/>
+                </a:solidFill>
+                <a:latin typeface="JetBrains Mono"/>
+                <a:ea typeface="JetBrains Mono"/>
+                <a:cs typeface="JetBrains Mono"/>
+              </a:rPr>
+            </a:br>
+            <a:r>
+              <a:rPr sz="1100">
+                <a:solidFill>
+                  <a:srgbClr val="C45E00"/>
+                </a:solidFill>
+                <a:latin typeface="JetBrains Mono"/>
+                <a:ea typeface="JetBrains Mono"/>
+                <a:cs typeface="JetBrains Mono"/>
+              </a:rPr>
+              <a:t>def</a:t>
+            </a:r>
+            <a:r>
+              <a:rPr sz="1100">
+                <a:solidFill>
+                  <a:srgbClr val="080808"/>
+                </a:solidFill>
+                <a:latin typeface="JetBrains Mono"/>
+                <a:ea typeface="JetBrains Mono"/>
+                <a:cs typeface="JetBrains Mono"/>
+              </a:rPr>
+              <a:t> square(number):</a:t>
+            </a:r>
+            <a:br>
+              <a:rPr sz="1100">
+                <a:solidFill>
+                  <a:srgbClr val="080808"/>
+                </a:solidFill>
+                <a:latin typeface="JetBrains Mono"/>
+                <a:ea typeface="JetBrains Mono"/>
+                <a:cs typeface="JetBrains Mono"/>
+              </a:rPr>
+            </a:br>
+            <a:r>
+              <a:rPr sz="1100">
+                <a:solidFill>
+                  <a:srgbClr val="080808"/>
+                </a:solidFill>
+                <a:latin typeface="JetBrains Mono"/>
+                <a:ea typeface="JetBrains Mono"/>
+                <a:cs typeface="JetBrains Mono"/>
+              </a:rPr>
+              <a:t>    </a:t>
+            </a:r>
+            <a:r>
+              <a:rPr sz="1100">
+                <a:solidFill>
+                  <a:srgbClr val="C45E00"/>
+                </a:solidFill>
+                <a:latin typeface="JetBrains Mono"/>
+                <a:ea typeface="JetBrains Mono"/>
+                <a:cs typeface="JetBrains Mono"/>
+              </a:rPr>
+              <a:t>return</a:t>
+            </a:r>
+            <a:r>
+              <a:rPr sz="1100">
+                <a:solidFill>
+                  <a:srgbClr val="080808"/>
+                </a:solidFill>
+                <a:latin typeface="JetBrains Mono"/>
+                <a:ea typeface="JetBrains Mono"/>
+                <a:cs typeface="JetBrains Mono"/>
+              </a:rPr>
+              <a:t> number * number</a:t>
+            </a:r>
+            <a:br>
+              <a:rPr sz="1100">
+                <a:solidFill>
+                  <a:srgbClr val="080808"/>
+                </a:solidFill>
+                <a:latin typeface="JetBrains Mono"/>
+                <a:ea typeface="JetBrains Mono"/>
+                <a:cs typeface="JetBrains Mono"/>
+              </a:rPr>
+            </a:br>
+            <a:r>
+              <a:rPr sz="1100">
+                <a:solidFill>
                   <a:srgbClr val="1750EB"/>
                 </a:solidFill>
                 <a:latin typeface="JetBrains Mono"/>
                 <a:ea typeface="JetBrains Mono"/>
                 <a:cs typeface="JetBrains Mono"/>
               </a:rPr>
-              <a:t>def</a:t>
-            </a:r>
-            <a:r>
-              <a:rPr sz="1100">
-                <a:solidFill>
-                  <a:srgbClr val="080808"/>
-                </a:solidFill>
-                <a:latin typeface="JetBrains Mono"/>
-                <a:ea typeface="JetBrains Mono"/>
-                <a:cs typeface="JetBrains Mono"/>
-              </a:rPr>
-              <a:t> double(number):</a:t>
+              <a:t>print</a:t>
+            </a:r>
+            <a:r>
+              <a:rPr sz="1100">
+                <a:solidFill>
+                  <a:srgbClr val="080808"/>
+                </a:solidFill>
+                <a:latin typeface="JetBrains Mono"/>
+                <a:ea typeface="JetBrains Mono"/>
+                <a:cs typeface="JetBrains Mono"/>
+              </a:rPr>
+              <a:t>(</a:t>
+            </a:r>
+            <a:r>
+              <a:rPr sz="1100">
+                <a:solidFill>
+                  <a:srgbClr val="067D17"/>
+                </a:solidFill>
+                <a:latin typeface="JetBrains Mono"/>
+                <a:ea typeface="JetBrains Mono"/>
+                <a:cs typeface="JetBrains Mono"/>
+              </a:rPr>
+              <a:t>"1: double\n2: square"</a:t>
+            </a:r>
+            <a:r>
+              <a:rPr sz="1100">
+                <a:solidFill>
+                  <a:srgbClr val="080808"/>
+                </a:solidFill>
+                <a:latin typeface="JetBrains Mono"/>
+                <a:ea typeface="JetBrains Mono"/>
+                <a:cs typeface="JetBrains Mono"/>
+              </a:rPr>
+              <a:t>)</a:t>
             </a:r>
             <a:br>
               <a:rPr sz="1100">
@@ -8825,7 +8997,7 @@
                 <a:ea typeface="JetBrains Mono"/>
                 <a:cs typeface="JetBrains Mono"/>
               </a:rPr>
-              <a:t>    </a:t>
+              <a:t>choice = </a:t>
             </a:r>
             <a:r>
               <a:rPr sz="1100">
@@ -8836,18 +9008,40 @@
                 <a:ea typeface="JetBrains Mono"/>
                 <a:cs typeface="JetBrains Mono"/>
               </a:rPr>
-              <a:t>return</a:t>
-            </a:r>
-            <a:r>
-              <a:rPr sz="1100">
-                <a:solidFill>
-                  <a:srgbClr val="080808"/>
-                </a:solidFill>
-                <a:latin typeface="JetBrains Mono"/>
-                <a:ea typeface="JetBrains Mono"/>
-                <a:cs typeface="JetBrains Mono"/>
-              </a:rPr>
-              <a:t> number * 2</a:t>
+              <a:t>input</a:t>
+            </a:r>
+            <a:r>
+              <a:rPr sz="1100">
+                <a:solidFill>
+                  <a:srgbClr val="080808"/>
+                </a:solidFill>
+                <a:latin typeface="JetBrains Mono"/>
+                <a:ea typeface="JetBrains Mono"/>
+                <a:cs typeface="JetBrains Mono"/>
+              </a:rPr>
+              <a:t>(</a:t>
+            </a:r>
+            <a:r>
+              <a:rPr sz="1100">
+                <a:solidFill>
+                  <a:srgbClr val="067D17"/>
+                </a:solidFill>
+                <a:latin typeface="JetBrains Mono"/>
+                <a:ea typeface="JetBrains Mono"/>
+                <a:cs typeface="JetBrains Mono"/>
+              </a:rPr>
+              <a:t>"Choice: "</a:t>
+            </a:r>
+            <a:r>
+              <a:rPr sz="1100">
+                <a:solidFill>
+                  <a:srgbClr val="080808"/>
+                </a:solidFill>
+                <a:latin typeface="JetBrains Mono"/>
+                <a:ea typeface="JetBrains Mono"/>
+                <a:cs typeface="JetBrains Mono"/>
+              </a:rPr>
+              <a:t>)</a:t>
             </a:r>
             <a:br>
               <a:rPr sz="1100">
@@ -8862,24 +9056,79 @@
             <a:r>
               <a:rPr sz="1100">
                 <a:solidFill>
+                  <a:srgbClr val="080808"/>
+                </a:solidFill>
+                <a:latin typeface="JetBrains Mono"/>
+                <a:ea typeface="JetBrains Mono"/>
+                <a:cs typeface="JetBrains Mono"/>
+              </a:rPr>
+              <a:t>value = </a:t>
+            </a:r>
+            <a:r>
+              <a:rPr sz="1100">
+                <a:solidFill>
                   <a:srgbClr val="1750EB"/>
                 </a:solidFill>
                 <a:latin typeface="JetBrains Mono"/>
                 <a:ea typeface="JetBrains Mono"/>
                 <a:cs typeface="JetBrains Mono"/>
               </a:rPr>
-              <a:t>def</a:t>
-            </a:r>
-            <a:r>
-              <a:rPr sz="1100">
-                <a:solidFill>
-                  <a:srgbClr val="080808"/>
-                </a:solidFill>
-                <a:latin typeface="JetBrains Mono"/>
-                <a:ea typeface="JetBrains Mono"/>
-                <a:cs typeface="JetBrains Mono"/>
-              </a:rPr>
-              <a:t> square(number):</a:t>
+              <a:t>int</a:t>
+            </a:r>
+            <a:r>
+              <a:rPr sz="1100">
+                <a:solidFill>
+                  <a:srgbClr val="080808"/>
+                </a:solidFill>
+                <a:latin typeface="JetBrains Mono"/>
+                <a:ea typeface="JetBrains Mono"/>
+                <a:cs typeface="JetBrains Mono"/>
+              </a:rPr>
+              <a:t>(</a:t>
+            </a:r>
+            <a:r>
+              <a:rPr sz="1100">
+                <a:solidFill>
+                  <a:srgbClr val="1750EB"/>
+                </a:solidFill>
+                <a:latin typeface="JetBrains Mono"/>
+                <a:ea typeface="JetBrains Mono"/>
+                <a:cs typeface="JetBrains Mono"/>
+              </a:rPr>
+              <a:t>input</a:t>
+            </a:r>
+            <a:r>
+              <a:rPr sz="1100">
+                <a:solidFill>
+                  <a:srgbClr val="080808"/>
+                </a:solidFill>
+                <a:latin typeface="JetBrains Mono"/>
+                <a:ea typeface="JetBrains Mono"/>
+                <a:cs typeface="JetBrains Mono"/>
+              </a:rPr>
+              <a:t>(</a:t>
+            </a:r>
+            <a:r>
+              <a:rPr sz="1100">
+                <a:solidFill>
+                  <a:srgbClr val="067D17"/>
+                </a:solidFill>
+                <a:latin typeface="JetBrains Mono"/>
+                <a:ea typeface="JetBrains Mono"/>
+                <a:cs typeface="JetBrains Mono"/>
+              </a:rPr>
+              <a:t>"Number: "</a:t>
+            </a:r>
+            <a:r>
+              <a:rPr sz="1100">
+                <a:solidFill>
+                  <a:srgbClr val="080808"/>
+                </a:solidFill>
+                <a:latin typeface="JetBrains Mono"/>
+                <a:ea typeface="JetBrains Mono"/>
+                <a:cs typeface="JetBrains Mono"/>
+              </a:rPr>
+              <a:t>))</a:t>
             </a:r>
             <a:br>
               <a:rPr sz="1100">
@@ -8894,256 +9143,7 @@
             <a:r>
               <a:rPr sz="1100">
                 <a:solidFill>
-                  <a:srgbClr val="080808"/>
-                </a:solidFill>
-                <a:latin typeface="JetBrains Mono"/>
-                <a:ea typeface="JetBrains Mono"/>
-                <a:cs typeface="JetBrains Mono"/>
-              </a:rPr>
-              <a:t>    </a:t>
-            </a:r>
-            <a:r>
-              <a:rPr sz="1100">
-                <a:solidFill>
-                  <a:srgbClr val="1750EB"/>
-                </a:solidFill>
-                <a:latin typeface="JetBrains Mono"/>
-                <a:ea typeface="JetBrains Mono"/>
-                <a:cs typeface="JetBrains Mono"/>
-              </a:rPr>
-              <a:t>return</a:t>
-            </a:r>
-            <a:r>
-              <a:rPr sz="1100">
-                <a:solidFill>
-                  <a:srgbClr val="080808"/>
-                </a:solidFill>
-                <a:latin typeface="JetBrains Mono"/>
-                <a:ea typeface="JetBrains Mono"/>
-                <a:cs typeface="JetBrains Mono"/>
-              </a:rPr>
-              <a:t> number * number</a:t>
-            </a:r>
-            <a:br>
-              <a:rPr sz="1100">
-                <a:solidFill>
-                  <a:srgbClr val="080808"/>
-                </a:solidFill>
-                <a:latin typeface="JetBrains Mono"/>
-                <a:ea typeface="JetBrains Mono"/>
-                <a:cs typeface="JetBrains Mono"/>
-              </a:rPr>
-            </a:br>
-            <a:r>
-              <a:rPr sz="1100">
-                <a:solidFill>
-                  <a:srgbClr val="1750EB"/>
-                </a:solidFill>
-                <a:latin typeface="JetBrains Mono"/>
-                <a:ea typeface="JetBrains Mono"/>
-                <a:cs typeface="JetBrains Mono"/>
-              </a:rPr>
-              <a:t>print</a:t>
-            </a:r>
-            <a:r>
-              <a:rPr sz="1100">
-                <a:solidFill>
-                  <a:srgbClr val="080808"/>
-                </a:solidFill>
-                <a:latin typeface="JetBrains Mono"/>
-                <a:ea typeface="JetBrains Mono"/>
-                <a:cs typeface="JetBrains Mono"/>
-              </a:rPr>
-              <a:t>(</a:t>
-            </a:r>
-            <a:r>
-              <a:rPr sz="1100">
-                <a:solidFill>
-                  <a:srgbClr val="067D17"/>
-                </a:solidFill>
-                <a:latin typeface="JetBrains Mono"/>
-                <a:ea typeface="JetBrains Mono"/>
-                <a:cs typeface="JetBrains Mono"/>
-              </a:rPr>
-              <a:t>"1: double\n2: square"</a:t>
-            </a:r>
-            <a:r>
-              <a:rPr sz="1100">
-                <a:solidFill>
-                  <a:srgbClr val="080808"/>
-                </a:solidFill>
-                <a:latin typeface="JetBrains Mono"/>
-                <a:ea typeface="JetBrains Mono"/>
-                <a:cs typeface="JetBrains Mono"/>
-              </a:rPr>
-              <a:t>)</a:t>
-            </a:r>
-            <a:br>
-              <a:rPr sz="1100">
-                <a:solidFill>
-                  <a:srgbClr val="080808"/>
-                </a:solidFill>
-                <a:latin typeface="JetBrains Mono"/>
-                <a:ea typeface="JetBrains Mono"/>
-                <a:cs typeface="JetBrains Mono"/>
-              </a:rPr>
-            </a:br>
-            <a:r>
-              <a:rPr sz="1100">
-                <a:solidFill>
-                  <a:srgbClr val="080808"/>
-                </a:solidFill>
-                <a:latin typeface="JetBrains Mono"/>
-                <a:ea typeface="JetBrains Mono"/>
-                <a:cs typeface="JetBrains Mono"/>
-              </a:rPr>
-              <a:t>choice = </a:t>
-            </a:r>
-            <a:r>
-              <a:rPr sz="1100">
-                <a:solidFill>
-                  <a:srgbClr val="1750EB"/>
-                </a:solidFill>
-                <a:latin typeface="JetBrains Mono"/>
-                <a:ea typeface="JetBrains Mono"/>
-                <a:cs typeface="JetBrains Mono"/>
-              </a:rPr>
-              <a:t>input</a:t>
-            </a:r>
-            <a:r>
-              <a:rPr sz="1100">
-                <a:solidFill>
-                  <a:srgbClr val="080808"/>
-                </a:solidFill>
-                <a:latin typeface="JetBrains Mono"/>
-                <a:ea typeface="JetBrains Mono"/>
-                <a:cs typeface="JetBrains Mono"/>
-              </a:rPr>
-              <a:t>(</a:t>
-            </a:r>
-            <a:r>
-              <a:rPr sz="1100">
-                <a:solidFill>
-                  <a:srgbClr val="067D17"/>
-                </a:solidFill>
-                <a:latin typeface="JetBrains Mono"/>
-                <a:ea typeface="JetBrains Mono"/>
-                <a:cs typeface="JetBrains Mono"/>
-              </a:rPr>
-              <a:t>"Choice: "</a:t>
-            </a:r>
-            <a:r>
-              <a:rPr sz="1100">
-                <a:solidFill>
-                  <a:srgbClr val="080808"/>
-                </a:solidFill>
-                <a:latin typeface="JetBrains Mono"/>
-                <a:ea typeface="JetBrains Mono"/>
-                <a:cs typeface="JetBrains Mono"/>
-              </a:rPr>
-              <a:t>)</a:t>
-            </a:r>
-            <a:br>
-              <a:rPr sz="1100">
-                <a:solidFill>
-                  <a:srgbClr val="080808"/>
-                </a:solidFill>
-                <a:latin typeface="JetBrains Mono"/>
-                <a:ea typeface="JetBrains Mono"/>
-                <a:cs typeface="JetBrains Mono"/>
-              </a:rPr>
-            </a:br>
-            <a:r>
-              <a:rPr sz="1100">
-                <a:solidFill>
-                  <a:srgbClr val="080808"/>
-                </a:solidFill>
-                <a:latin typeface="JetBrains Mono"/>
-                <a:ea typeface="JetBrains Mono"/>
-                <a:cs typeface="JetBrains Mono"/>
-              </a:rPr>
-              <a:t>value = </a:t>
-            </a:r>
-            <a:r>
-              <a:rPr sz="1100">
-                <a:solidFill>
-                  <a:srgbClr val="1750EB"/>
-                </a:solidFill>
-                <a:latin typeface="JetBrains Mono"/>
-                <a:ea typeface="JetBrains Mono"/>
-                <a:cs typeface="JetBrains Mono"/>
-              </a:rPr>
-              <a:t>int</a:t>
-            </a:r>
-            <a:r>
-              <a:rPr sz="1100">
-                <a:solidFill>
-                  <a:srgbClr val="080808"/>
-                </a:solidFill>
-                <a:latin typeface="JetBrains Mono"/>
-                <a:ea typeface="JetBrains Mono"/>
-                <a:cs typeface="JetBrains Mono"/>
-              </a:rPr>
-              <a:t>(</a:t>
-            </a:r>
-            <a:r>
-              <a:rPr sz="1100">
-                <a:solidFill>
-                  <a:srgbClr val="1750EB"/>
-                </a:solidFill>
-                <a:latin typeface="JetBrains Mono"/>
-                <a:ea typeface="JetBrains Mono"/>
-                <a:cs typeface="JetBrains Mono"/>
-              </a:rPr>
-              <a:t>input</a:t>
-            </a:r>
-            <a:r>
-              <a:rPr sz="1100">
-                <a:solidFill>
-                  <a:srgbClr val="080808"/>
-                </a:solidFill>
-                <a:latin typeface="JetBrains Mono"/>
-                <a:ea typeface="JetBrains Mono"/>
-                <a:cs typeface="JetBrains Mono"/>
-              </a:rPr>
-              <a:t>(</a:t>
-            </a:r>
-            <a:r>
-              <a:rPr sz="1100">
-                <a:solidFill>
-                  <a:srgbClr val="067D17"/>
-                </a:solidFill>
-                <a:latin typeface="JetBrains Mono"/>
-                <a:ea typeface="JetBrains Mono"/>
-                <a:cs typeface="JetBrains Mono"/>
-              </a:rPr>
-              <a:t>"Number: "</a:t>
-            </a:r>
-            <a:r>
-              <a:rPr sz="1100">
-                <a:solidFill>
-                  <a:srgbClr val="080808"/>
-                </a:solidFill>
-                <a:latin typeface="JetBrains Mono"/>
-                <a:ea typeface="JetBrains Mono"/>
-                <a:cs typeface="JetBrains Mono"/>
-              </a:rPr>
-              <a:t>))</a:t>
-            </a:r>
-            <a:br>
-              <a:rPr sz="1100">
-                <a:solidFill>
-                  <a:srgbClr val="080808"/>
-                </a:solidFill>
-                <a:latin typeface="JetBrains Mono"/>
-                <a:ea typeface="JetBrains Mono"/>
-                <a:cs typeface="JetBrains Mono"/>
-              </a:rPr>
-            </a:br>
-            <a:r>
-              <a:rPr sz="1100">
-                <a:solidFill>
-                  <a:srgbClr val="1750EB"/>
+                  <a:srgbClr val="C45E00"/>
                 </a:solidFill>
                 <a:latin typeface="JetBrains Mono"/>
                 <a:ea typeface="JetBrains Mono"/>
@@ -9284,7 +9284,7 @@
             <a:r>
               <a:rPr sz="1100">
                 <a:solidFill>
-                  <a:srgbClr val="1750EB"/>
+                  <a:srgbClr val="C45E00"/>
                 </a:solidFill>
                 <a:latin typeface="JetBrains Mono"/>
                 <a:ea typeface="JetBrains Mono"/>
@@ -9497,7 +9497,7 @@
             <a:r>
               <a:rPr sz="2050" b="0">
                 <a:solidFill>
-                  <a:srgbClr val="1750EB"/>
+                  <a:srgbClr val="C45E00"/>
                 </a:solidFill>
                 <a:latin typeface="JetBrains Mono"/>
                 <a:ea typeface="JetBrains Mono"/>
@@ -9541,7 +9541,7 @@
             <a:r>
               <a:rPr sz="2050" b="0">
                 <a:solidFill>
-                  <a:srgbClr val="1750EB"/>
+                  <a:srgbClr val="C45E00"/>
                 </a:solidFill>
                 <a:latin typeface="JetBrains Mono"/>
                 <a:ea typeface="JetBrains Mono"/>
@@ -9563,7 +9563,7 @@
             <a:r>
               <a:rPr sz="2050" b="0">
                 <a:solidFill>
-                  <a:srgbClr val="1750EB"/>
+                  <a:srgbClr val="C45E00"/>
                 </a:solidFill>
                 <a:latin typeface="JetBrains Mono"/>
                 <a:ea typeface="JetBrains Mono"/>
@@ -9585,7 +9585,7 @@
             <a:r>
               <a:rPr sz="2050" b="0">
                 <a:solidFill>
-                  <a:srgbClr val="1750EB"/>
+                  <a:srgbClr val="C45E00"/>
                 </a:solidFill>
                 <a:latin typeface="JetBrains Mono"/>
                 <a:ea typeface="JetBrains Mono"/>
@@ -9944,24 +9944,196 @@
             <a:r>
               <a:rPr sz="1100">
                 <a:solidFill>
+                  <a:srgbClr val="C45E00"/>
+                </a:solidFill>
+                <a:latin typeface="JetBrains Mono"/>
+                <a:ea typeface="JetBrains Mono"/>
+                <a:cs typeface="JetBrains Mono"/>
+              </a:rPr>
+              <a:t>def</a:t>
+            </a:r>
+            <a:r>
+              <a:rPr sz="1100">
+                <a:solidFill>
+                  <a:srgbClr val="080808"/>
+                </a:solidFill>
+                <a:latin typeface="JetBrains Mono"/>
+                <a:ea typeface="JetBrains Mono"/>
+                <a:cs typeface="JetBrains Mono"/>
+              </a:rPr>
+              <a:t> double(number):</a:t>
+            </a:r>
+            <a:br>
+              <a:rPr sz="1100">
+                <a:solidFill>
+                  <a:srgbClr val="080808"/>
+                </a:solidFill>
+                <a:latin typeface="JetBrains Mono"/>
+                <a:ea typeface="JetBrains Mono"/>
+                <a:cs typeface="JetBrains Mono"/>
+              </a:rPr>
+            </a:br>
+            <a:r>
+              <a:rPr sz="1100">
+                <a:solidFill>
+                  <a:srgbClr val="080808"/>
+                </a:solidFill>
+                <a:latin typeface="JetBrains Mono"/>
+                <a:ea typeface="JetBrains Mono"/>
+                <a:cs typeface="JetBrains Mono"/>
+              </a:rPr>
+              <a:t>    </a:t>
+            </a:r>
+            <a:r>
+              <a:rPr sz="1100">
+                <a:solidFill>
+                  <a:srgbClr val="C45E00"/>
+                </a:solidFill>
+                <a:latin typeface="JetBrains Mono"/>
+                <a:ea typeface="JetBrains Mono"/>
+                <a:cs typeface="JetBrains Mono"/>
+              </a:rPr>
+              <a:t>return</a:t>
+            </a:r>
+            <a:r>
+              <a:rPr sz="1100">
+                <a:solidFill>
+                  <a:srgbClr val="080808"/>
+                </a:solidFill>
+                <a:latin typeface="JetBrains Mono"/>
+                <a:ea typeface="JetBrains Mono"/>
+                <a:cs typeface="JetBrains Mono"/>
+              </a:rPr>
+              <a:t> number * 2</a:t>
+            </a:r>
+            <a:br>
+              <a:rPr sz="1100">
+                <a:solidFill>
+                  <a:srgbClr val="080808"/>
+                </a:solidFill>
+                <a:latin typeface="JetBrains Mono"/>
+                <a:ea typeface="JetBrains Mono"/>
+                <a:cs typeface="JetBrains Mono"/>
+              </a:rPr>
+            </a:br>
+            <a:r>
+              <a:rPr sz="1100">
+                <a:solidFill>
+                  <a:srgbClr val="C45E00"/>
+                </a:solidFill>
+                <a:latin typeface="JetBrains Mono"/>
+                <a:ea typeface="JetBrains Mono"/>
+                <a:cs typeface="JetBrains Mono"/>
+              </a:rPr>
+              <a:t>def</a:t>
+            </a:r>
+            <a:r>
+              <a:rPr sz="1100">
+                <a:solidFill>
+                  <a:srgbClr val="080808"/>
+                </a:solidFill>
+                <a:latin typeface="JetBrains Mono"/>
+                <a:ea typeface="JetBrains Mono"/>
+                <a:cs typeface="JetBrains Mono"/>
+              </a:rPr>
+              <a:t> square(number):</a:t>
+            </a:r>
+            <a:br>
+              <a:rPr sz="1100">
+                <a:solidFill>
+                  <a:srgbClr val="080808"/>
+                </a:solidFill>
+                <a:latin typeface="JetBrains Mono"/>
+                <a:ea typeface="JetBrains Mono"/>
+                <a:cs typeface="JetBrains Mono"/>
+              </a:rPr>
+            </a:br>
+            <a:r>
+              <a:rPr sz="1100">
+                <a:solidFill>
+                  <a:srgbClr val="080808"/>
+                </a:solidFill>
+                <a:latin typeface="JetBrains Mono"/>
+                <a:ea typeface="JetBrains Mono"/>
+                <a:cs typeface="JetBrains Mono"/>
+              </a:rPr>
+              <a:t>    </a:t>
+            </a:r>
+            <a:r>
+              <a:rPr sz="1100">
+                <a:solidFill>
+                  <a:srgbClr val="C45E00"/>
+                </a:solidFill>
+                <a:latin typeface="JetBrains Mono"/>
+                <a:ea typeface="JetBrains Mono"/>
+                <a:cs typeface="JetBrains Mono"/>
+              </a:rPr>
+              <a:t>return</a:t>
+            </a:r>
+            <a:r>
+              <a:rPr sz="1100">
+                <a:solidFill>
+                  <a:srgbClr val="080808"/>
+                </a:solidFill>
+                <a:latin typeface="JetBrains Mono"/>
+                <a:ea typeface="JetBrains Mono"/>
+                <a:cs typeface="JetBrains Mono"/>
+              </a:rPr>
+              <a:t> number * number</a:t>
+            </a:r>
+            <a:br>
+              <a:rPr sz="1100">
+                <a:solidFill>
+                  <a:srgbClr val="080808"/>
+                </a:solidFill>
+                <a:latin typeface="JetBrains Mono"/>
+                <a:ea typeface="JetBrains Mono"/>
+                <a:cs typeface="JetBrains Mono"/>
+              </a:rPr>
+            </a:br>
+            <a:r>
+              <a:rPr sz="1100">
+                <a:solidFill>
                   <a:srgbClr val="1750EB"/>
                 </a:solidFill>
                 <a:latin typeface="JetBrains Mono"/>
                 <a:ea typeface="JetBrains Mono"/>
                 <a:cs typeface="JetBrains Mono"/>
               </a:rPr>
-              <a:t>def</a:t>
-            </a:r>
-            <a:r>
-              <a:rPr sz="1100">
-                <a:solidFill>
-                  <a:srgbClr val="080808"/>
-                </a:solidFill>
-                <a:latin typeface="JetBrains Mono"/>
-                <a:ea typeface="JetBrains Mono"/>
-                <a:cs typeface="JetBrains Mono"/>
-              </a:rPr>
-              <a:t> double(number):</a:t>
+              <a:t>print</a:t>
+            </a:r>
+            <a:r>
+              <a:rPr sz="1100">
+                <a:solidFill>
+                  <a:srgbClr val="080808"/>
+                </a:solidFill>
+                <a:latin typeface="JetBrains Mono"/>
+                <a:ea typeface="JetBrains Mono"/>
+                <a:cs typeface="JetBrains Mono"/>
+              </a:rPr>
+              <a:t>(</a:t>
+            </a:r>
+            <a:r>
+              <a:rPr sz="1100">
+                <a:solidFill>
+                  <a:srgbClr val="067D17"/>
+                </a:solidFill>
+                <a:latin typeface="JetBrains Mono"/>
+                <a:ea typeface="JetBrains Mono"/>
+                <a:cs typeface="JetBrains Mono"/>
+              </a:rPr>
+              <a:t>"1: double\n2: square"</a:t>
+            </a:r>
+            <a:r>
+              <a:rPr sz="1100">
+                <a:solidFill>
+                  <a:srgbClr val="080808"/>
+                </a:solidFill>
+                <a:latin typeface="JetBrains Mono"/>
+                <a:ea typeface="JetBrains Mono"/>
+                <a:cs typeface="JetBrains Mono"/>
+              </a:rPr>
+              <a:t>)</a:t>
             </a:r>
             <a:br>
               <a:rPr sz="1100">
@@ -9982,7 +10154,7 @@
                 <a:ea typeface="JetBrains Mono"/>
                 <a:cs typeface="JetBrains Mono"/>
               </a:rPr>
-              <a:t>    </a:t>
+              <a:t>choice = </a:t>
             </a:r>
             <a:r>
               <a:rPr sz="1100">
@@ -9993,18 +10165,40 @@
                 <a:ea typeface="JetBrains Mono"/>
                 <a:cs typeface="JetBrains Mono"/>
               </a:rPr>
-              <a:t>return</a:t>
-            </a:r>
-            <a:r>
-              <a:rPr sz="1100">
-                <a:solidFill>
-                  <a:srgbClr val="080808"/>
-                </a:solidFill>
-                <a:latin typeface="JetBrains Mono"/>
-                <a:ea typeface="JetBrains Mono"/>
-                <a:cs typeface="JetBrains Mono"/>
-              </a:rPr>
-              <a:t> number * 2</a:t>
+              <a:t>input</a:t>
+            </a:r>
+            <a:r>
+              <a:rPr sz="1100">
+                <a:solidFill>
+                  <a:srgbClr val="080808"/>
+                </a:solidFill>
+                <a:latin typeface="JetBrains Mono"/>
+                <a:ea typeface="JetBrains Mono"/>
+                <a:cs typeface="JetBrains Mono"/>
+              </a:rPr>
+              <a:t>(</a:t>
+            </a:r>
+            <a:r>
+              <a:rPr sz="1100">
+                <a:solidFill>
+                  <a:srgbClr val="067D17"/>
+                </a:solidFill>
+                <a:latin typeface="JetBrains Mono"/>
+                <a:ea typeface="JetBrains Mono"/>
+                <a:cs typeface="JetBrains Mono"/>
+              </a:rPr>
+              <a:t>"Choice: "</a:t>
+            </a:r>
+            <a:r>
+              <a:rPr sz="1100">
+                <a:solidFill>
+                  <a:srgbClr val="080808"/>
+                </a:solidFill>
+                <a:latin typeface="JetBrains Mono"/>
+                <a:ea typeface="JetBrains Mono"/>
+                <a:cs typeface="JetBrains Mono"/>
+              </a:rPr>
+              <a:t>)</a:t>
             </a:r>
             <a:br>
               <a:rPr sz="1100">
@@ -10019,24 +10213,79 @@
             <a:r>
               <a:rPr sz="1100">
                 <a:solidFill>
+                  <a:srgbClr val="080808"/>
+                </a:solidFill>
+                <a:latin typeface="JetBrains Mono"/>
+                <a:ea typeface="JetBrains Mono"/>
+                <a:cs typeface="JetBrains Mono"/>
+              </a:rPr>
+              <a:t>value = </a:t>
+            </a:r>
+            <a:r>
+              <a:rPr sz="1100">
+                <a:solidFill>
                   <a:srgbClr val="1750EB"/>
                 </a:solidFill>
                 <a:latin typeface="JetBrains Mono"/>
                 <a:ea typeface="JetBrains Mono"/>
                 <a:cs typeface="JetBrains Mono"/>
               </a:rPr>
-              <a:t>def</a:t>
-            </a:r>
-            <a:r>
-              <a:rPr sz="1100">
-                <a:solidFill>
-                  <a:srgbClr val="080808"/>
-                </a:solidFill>
-                <a:latin typeface="JetBrains Mono"/>
-                <a:ea typeface="JetBrains Mono"/>
-                <a:cs typeface="JetBrains Mono"/>
-              </a:rPr>
-              <a:t> square(number):</a:t>
+              <a:t>int</a:t>
+            </a:r>
+            <a:r>
+              <a:rPr sz="1100">
+                <a:solidFill>
+                  <a:srgbClr val="080808"/>
+                </a:solidFill>
+                <a:latin typeface="JetBrains Mono"/>
+                <a:ea typeface="JetBrains Mono"/>
+                <a:cs typeface="JetBrains Mono"/>
+              </a:rPr>
+              <a:t>(</a:t>
+            </a:r>
+            <a:r>
+              <a:rPr sz="1100">
+                <a:solidFill>
+                  <a:srgbClr val="1750EB"/>
+                </a:solidFill>
+                <a:latin typeface="JetBrains Mono"/>
+                <a:ea typeface="JetBrains Mono"/>
+                <a:cs typeface="JetBrains Mono"/>
+              </a:rPr>
+              <a:t>input</a:t>
+            </a:r>
+            <a:r>
+              <a:rPr sz="1100">
+                <a:solidFill>
+                  <a:srgbClr val="080808"/>
+                </a:solidFill>
+                <a:latin typeface="JetBrains Mono"/>
+                <a:ea typeface="JetBrains Mono"/>
+                <a:cs typeface="JetBrains Mono"/>
+              </a:rPr>
+              <a:t>(</a:t>
+            </a:r>
+            <a:r>
+              <a:rPr sz="1100">
+                <a:solidFill>
+                  <a:srgbClr val="067D17"/>
+                </a:solidFill>
+                <a:latin typeface="JetBrains Mono"/>
+                <a:ea typeface="JetBrains Mono"/>
+                <a:cs typeface="JetBrains Mono"/>
+              </a:rPr>
+              <a:t>"Number: "</a:t>
+            </a:r>
+            <a:r>
+              <a:rPr sz="1100">
+                <a:solidFill>
+                  <a:srgbClr val="080808"/>
+                </a:solidFill>
+                <a:latin typeface="JetBrains Mono"/>
+                <a:ea typeface="JetBrains Mono"/>
+                <a:cs typeface="JetBrains Mono"/>
+              </a:rPr>
+              <a:t>))</a:t>
             </a:r>
             <a:br>
               <a:rPr sz="1100">
@@ -10051,256 +10300,7 @@
             <a:r>
               <a:rPr sz="1100">
                 <a:solidFill>
-                  <a:srgbClr val="080808"/>
-                </a:solidFill>
-                <a:latin typeface="JetBrains Mono"/>
-                <a:ea typeface="JetBrains Mono"/>
-                <a:cs typeface="JetBrains Mono"/>
-              </a:rPr>
-              <a:t>    </a:t>
-            </a:r>
-            <a:r>
-              <a:rPr sz="1100">
-                <a:solidFill>
-                  <a:srgbClr val="1750EB"/>
-                </a:solidFill>
-                <a:latin typeface="JetBrains Mono"/>
-                <a:ea typeface="JetBrains Mono"/>
-                <a:cs typeface="JetBrains Mono"/>
-              </a:rPr>
-              <a:t>return</a:t>
-            </a:r>
-            <a:r>
-              <a:rPr sz="1100">
-                <a:solidFill>
-                  <a:srgbClr val="080808"/>
-                </a:solidFill>
-                <a:latin typeface="JetBrains Mono"/>
-                <a:ea typeface="JetBrains Mono"/>
-                <a:cs typeface="JetBrains Mono"/>
-              </a:rPr>
-              <a:t> number * number</a:t>
-            </a:r>
-            <a:br>
-              <a:rPr sz="1100">
-                <a:solidFill>
-                  <a:srgbClr val="080808"/>
-                </a:solidFill>
-                <a:latin typeface="JetBrains Mono"/>
-                <a:ea typeface="JetBrains Mono"/>
-                <a:cs typeface="JetBrains Mono"/>
-              </a:rPr>
-            </a:br>
-            <a:r>
-              <a:rPr sz="1100">
-                <a:solidFill>
-                  <a:srgbClr val="1750EB"/>
-                </a:solidFill>
-                <a:latin typeface="JetBrains Mono"/>
-                <a:ea typeface="JetBrains Mono"/>
-                <a:cs typeface="JetBrains Mono"/>
-              </a:rPr>
-              <a:t>print</a:t>
-            </a:r>
-            <a:r>
-              <a:rPr sz="1100">
-                <a:solidFill>
-                  <a:srgbClr val="080808"/>
-                </a:solidFill>
-                <a:latin typeface="JetBrains Mono"/>
-                <a:ea typeface="JetBrains Mono"/>
-                <a:cs typeface="JetBrains Mono"/>
-              </a:rPr>
-              <a:t>(</a:t>
-            </a:r>
-            <a:r>
-              <a:rPr sz="1100">
-                <a:solidFill>
-                  <a:srgbClr val="067D17"/>
-                </a:solidFill>
-                <a:latin typeface="JetBrains Mono"/>
-                <a:ea typeface="JetBrains Mono"/>
-                <a:cs typeface="JetBrains Mono"/>
-              </a:rPr>
-              <a:t>"1: double\n2: square"</a:t>
-            </a:r>
-            <a:r>
-              <a:rPr sz="1100">
-                <a:solidFill>
-                  <a:srgbClr val="080808"/>
-                </a:solidFill>
-                <a:latin typeface="JetBrains Mono"/>
-                <a:ea typeface="JetBrains Mono"/>
-                <a:cs typeface="JetBrains Mono"/>
-              </a:rPr>
-              <a:t>)</a:t>
-            </a:r>
-            <a:br>
-              <a:rPr sz="1100">
-                <a:solidFill>
-                  <a:srgbClr val="080808"/>
-                </a:solidFill>
-                <a:latin typeface="JetBrains Mono"/>
-                <a:ea typeface="JetBrains Mono"/>
-                <a:cs typeface="JetBrains Mono"/>
-              </a:rPr>
-            </a:br>
-            <a:r>
-              <a:rPr sz="1100">
-                <a:solidFill>
-                  <a:srgbClr val="080808"/>
-                </a:solidFill>
-                <a:latin typeface="JetBrains Mono"/>
-                <a:ea typeface="JetBrains Mono"/>
-                <a:cs typeface="JetBrains Mono"/>
-              </a:rPr>
-              <a:t>choice = </a:t>
-            </a:r>
-            <a:r>
-              <a:rPr sz="1100">
-                <a:solidFill>
-                  <a:srgbClr val="1750EB"/>
-                </a:solidFill>
-                <a:latin typeface="JetBrains Mono"/>
-                <a:ea typeface="JetBrains Mono"/>
-                <a:cs typeface="JetBrains Mono"/>
-              </a:rPr>
-              <a:t>input</a:t>
-            </a:r>
-            <a:r>
-              <a:rPr sz="1100">
-                <a:solidFill>
-                  <a:srgbClr val="080808"/>
-                </a:solidFill>
-                <a:latin typeface="JetBrains Mono"/>
-                <a:ea typeface="JetBrains Mono"/>
-                <a:cs typeface="JetBrains Mono"/>
-              </a:rPr>
-              <a:t>(</a:t>
-            </a:r>
-            <a:r>
-              <a:rPr sz="1100">
-                <a:solidFill>
-                  <a:srgbClr val="067D17"/>
-                </a:solidFill>
-                <a:latin typeface="JetBrains Mono"/>
-                <a:ea typeface="JetBrains Mono"/>
-                <a:cs typeface="JetBrains Mono"/>
-              </a:rPr>
-              <a:t>"Choice: "</a:t>
-            </a:r>
-            <a:r>
-              <a:rPr sz="1100">
-                <a:solidFill>
-                  <a:srgbClr val="080808"/>
-                </a:solidFill>
-                <a:latin typeface="JetBrains Mono"/>
-                <a:ea typeface="JetBrains Mono"/>
-                <a:cs typeface="JetBrains Mono"/>
-              </a:rPr>
-              <a:t>)</a:t>
-            </a:r>
-            <a:br>
-              <a:rPr sz="1100">
-                <a:solidFill>
-                  <a:srgbClr val="080808"/>
-                </a:solidFill>
-                <a:latin typeface="JetBrains Mono"/>
-                <a:ea typeface="JetBrains Mono"/>
-                <a:cs typeface="JetBrains Mono"/>
-              </a:rPr>
-            </a:br>
-            <a:r>
-              <a:rPr sz="1100">
-                <a:solidFill>
-                  <a:srgbClr val="080808"/>
-                </a:solidFill>
-                <a:latin typeface="JetBrains Mono"/>
-                <a:ea typeface="JetBrains Mono"/>
-                <a:cs typeface="JetBrains Mono"/>
-              </a:rPr>
-              <a:t>value = </a:t>
-            </a:r>
-            <a:r>
-              <a:rPr sz="1100">
-                <a:solidFill>
-                  <a:srgbClr val="1750EB"/>
-                </a:solidFill>
-                <a:latin typeface="JetBrains Mono"/>
-                <a:ea typeface="JetBrains Mono"/>
-                <a:cs typeface="JetBrains Mono"/>
-              </a:rPr>
-              <a:t>int</a:t>
-            </a:r>
-            <a:r>
-              <a:rPr sz="1100">
-                <a:solidFill>
-                  <a:srgbClr val="080808"/>
-                </a:solidFill>
-                <a:latin typeface="JetBrains Mono"/>
-                <a:ea typeface="JetBrains Mono"/>
-                <a:cs typeface="JetBrains Mono"/>
-              </a:rPr>
-              <a:t>(</a:t>
-            </a:r>
-            <a:r>
-              <a:rPr sz="1100">
-                <a:solidFill>
-                  <a:srgbClr val="1750EB"/>
-                </a:solidFill>
-                <a:latin typeface="JetBrains Mono"/>
-                <a:ea typeface="JetBrains Mono"/>
-                <a:cs typeface="JetBrains Mono"/>
-              </a:rPr>
-              <a:t>input</a:t>
-            </a:r>
-            <a:r>
-              <a:rPr sz="1100">
-                <a:solidFill>
-                  <a:srgbClr val="080808"/>
-                </a:solidFill>
-                <a:latin typeface="JetBrains Mono"/>
-                <a:ea typeface="JetBrains Mono"/>
-                <a:cs typeface="JetBrains Mono"/>
-              </a:rPr>
-              <a:t>(</a:t>
-            </a:r>
-            <a:r>
-              <a:rPr sz="1100">
-                <a:solidFill>
-                  <a:srgbClr val="067D17"/>
-                </a:solidFill>
-                <a:latin typeface="JetBrains Mono"/>
-                <a:ea typeface="JetBrains Mono"/>
-                <a:cs typeface="JetBrains Mono"/>
-              </a:rPr>
-              <a:t>"Number: "</a:t>
-            </a:r>
-            <a:r>
-              <a:rPr sz="1100">
-                <a:solidFill>
-                  <a:srgbClr val="080808"/>
-                </a:solidFill>
-                <a:latin typeface="JetBrains Mono"/>
-                <a:ea typeface="JetBrains Mono"/>
-                <a:cs typeface="JetBrains Mono"/>
-              </a:rPr>
-              <a:t>))</a:t>
-            </a:r>
-            <a:br>
-              <a:rPr sz="1100">
-                <a:solidFill>
-                  <a:srgbClr val="080808"/>
-                </a:solidFill>
-                <a:latin typeface="JetBrains Mono"/>
-                <a:ea typeface="JetBrains Mono"/>
-                <a:cs typeface="JetBrains Mono"/>
-              </a:rPr>
-            </a:br>
-            <a:r>
-              <a:rPr sz="1100">
-                <a:solidFill>
-                  <a:srgbClr val="1750EB"/>
+                  <a:srgbClr val="C45E00"/>
                 </a:solidFill>
                 <a:latin typeface="JetBrains Mono"/>
                 <a:ea typeface="JetBrains Mono"/>
@@ -10441,7 +10441,7 @@
             <a:r>
               <a:rPr sz="1100">
                 <a:solidFill>
-                  <a:srgbClr val="1750EB"/>
+                  <a:srgbClr val="C45E00"/>
                 </a:solidFill>
                 <a:latin typeface="JetBrains Mono"/>
                 <a:ea typeface="JetBrains Mono"/>
@@ -10720,7 +10720,7 @@
             <a:r>
               <a:rPr sz="2050" b="0">
                 <a:solidFill>
-                  <a:srgbClr val="1750EB"/>
+                  <a:srgbClr val="C45E00"/>
                 </a:solidFill>
                 <a:latin typeface="JetBrains Mono"/>
                 <a:ea typeface="JetBrains Mono"/>
@@ -11046,24 +11046,196 @@
             <a:r>
               <a:rPr sz="1100">
                 <a:solidFill>
+                  <a:srgbClr val="C45E00"/>
+                </a:solidFill>
+                <a:latin typeface="JetBrains Mono"/>
+                <a:ea typeface="JetBrains Mono"/>
+                <a:cs typeface="JetBrains Mono"/>
+              </a:rPr>
+              <a:t>def</a:t>
+            </a:r>
+            <a:r>
+              <a:rPr sz="1100">
+                <a:solidFill>
+                  <a:srgbClr val="080808"/>
+                </a:solidFill>
+                <a:latin typeface="JetBrains Mono"/>
+                <a:ea typeface="JetBrains Mono"/>
+                <a:cs typeface="JetBrains Mono"/>
+              </a:rPr>
+              <a:t> double(number):</a:t>
+            </a:r>
+            <a:br>
+              <a:rPr sz="1100">
+                <a:solidFill>
+                  <a:srgbClr val="080808"/>
+                </a:solidFill>
+                <a:latin typeface="JetBrains Mono"/>
+                <a:ea typeface="JetBrains Mono"/>
+                <a:cs typeface="JetBrains Mono"/>
+              </a:rPr>
+            </a:br>
+            <a:r>
+              <a:rPr sz="1100">
+                <a:solidFill>
+                  <a:srgbClr val="080808"/>
+                </a:solidFill>
+                <a:latin typeface="JetBrains Mono"/>
+                <a:ea typeface="JetBrains Mono"/>
+                <a:cs typeface="JetBrains Mono"/>
+              </a:rPr>
+              <a:t>    </a:t>
+            </a:r>
+            <a:r>
+              <a:rPr sz="1100">
+                <a:solidFill>
+                  <a:srgbClr val="C45E00"/>
+                </a:solidFill>
+                <a:latin typeface="JetBrains Mono"/>
+                <a:ea typeface="JetBrains Mono"/>
+                <a:cs typeface="JetBrains Mono"/>
+              </a:rPr>
+              <a:t>return</a:t>
+            </a:r>
+            <a:r>
+              <a:rPr sz="1100">
+                <a:solidFill>
+                  <a:srgbClr val="080808"/>
+                </a:solidFill>
+                <a:latin typeface="JetBrains Mono"/>
+                <a:ea typeface="JetBrains Mono"/>
+                <a:cs typeface="JetBrains Mono"/>
+              </a:rPr>
+              <a:t> number * 2</a:t>
+            </a:r>
+            <a:br>
+              <a:rPr sz="1100">
+                <a:solidFill>
+                  <a:srgbClr val="080808"/>
+                </a:solidFill>
+                <a:latin typeface="JetBrains Mono"/>
+                <a:ea typeface="JetBrains Mono"/>
+                <a:cs typeface="JetBrains Mono"/>
+              </a:rPr>
+            </a:br>
+            <a:r>
+              <a:rPr sz="1100">
+                <a:solidFill>
+                  <a:srgbClr val="C45E00"/>
+                </a:solidFill>
+                <a:latin typeface="JetBrains Mono"/>
+                <a:ea typeface="JetBrains Mono"/>
+                <a:cs typeface="JetBrains Mono"/>
+              </a:rPr>
+              <a:t>def</a:t>
+            </a:r>
+            <a:r>
+              <a:rPr sz="1100">
+                <a:solidFill>
+                  <a:srgbClr val="080808"/>
+                </a:solidFill>
+                <a:latin typeface="JetBrains Mono"/>
+                <a:ea typeface="JetBrains Mono"/>
+                <a:cs typeface="JetBrains Mono"/>
+              </a:rPr>
+              <a:t> square(number):</a:t>
+            </a:r>
+            <a:br>
+              <a:rPr sz="1100">
+                <a:solidFill>
+                  <a:srgbClr val="080808"/>
+                </a:solidFill>
+                <a:latin typeface="JetBrains Mono"/>
+                <a:ea typeface="JetBrains Mono"/>
+                <a:cs typeface="JetBrains Mono"/>
+              </a:rPr>
+            </a:br>
+            <a:r>
+              <a:rPr sz="1100">
+                <a:solidFill>
+                  <a:srgbClr val="080808"/>
+                </a:solidFill>
+                <a:latin typeface="JetBrains Mono"/>
+                <a:ea typeface="JetBrains Mono"/>
+                <a:cs typeface="JetBrains Mono"/>
+              </a:rPr>
+              <a:t>    </a:t>
+            </a:r>
+            <a:r>
+              <a:rPr sz="1100">
+                <a:solidFill>
+                  <a:srgbClr val="C45E00"/>
+                </a:solidFill>
+                <a:latin typeface="JetBrains Mono"/>
+                <a:ea typeface="JetBrains Mono"/>
+                <a:cs typeface="JetBrains Mono"/>
+              </a:rPr>
+              <a:t>return</a:t>
+            </a:r>
+            <a:r>
+              <a:rPr sz="1100">
+                <a:solidFill>
+                  <a:srgbClr val="080808"/>
+                </a:solidFill>
+                <a:latin typeface="JetBrains Mono"/>
+                <a:ea typeface="JetBrains Mono"/>
+                <a:cs typeface="JetBrains Mono"/>
+              </a:rPr>
+              <a:t> number * number</a:t>
+            </a:r>
+            <a:br>
+              <a:rPr sz="1100">
+                <a:solidFill>
+                  <a:srgbClr val="080808"/>
+                </a:solidFill>
+                <a:latin typeface="JetBrains Mono"/>
+                <a:ea typeface="JetBrains Mono"/>
+                <a:cs typeface="JetBrains Mono"/>
+              </a:rPr>
+            </a:br>
+            <a:r>
+              <a:rPr sz="1100">
+                <a:solidFill>
                   <a:srgbClr val="1750EB"/>
                 </a:solidFill>
                 <a:latin typeface="JetBrains Mono"/>
                 <a:ea typeface="JetBrains Mono"/>
                 <a:cs typeface="JetBrains Mono"/>
               </a:rPr>
-              <a:t>def</a:t>
-            </a:r>
-            <a:r>
-              <a:rPr sz="1100">
-                <a:solidFill>
-                  <a:srgbClr val="080808"/>
-                </a:solidFill>
-                <a:latin typeface="JetBrains Mono"/>
-                <a:ea typeface="JetBrains Mono"/>
-                <a:cs typeface="JetBrains Mono"/>
-              </a:rPr>
-              <a:t> double(number):</a:t>
+              <a:t>print</a:t>
+            </a:r>
+            <a:r>
+              <a:rPr sz="1100">
+                <a:solidFill>
+                  <a:srgbClr val="080808"/>
+                </a:solidFill>
+                <a:latin typeface="JetBrains Mono"/>
+                <a:ea typeface="JetBrains Mono"/>
+                <a:cs typeface="JetBrains Mono"/>
+              </a:rPr>
+              <a:t>(</a:t>
+            </a:r>
+            <a:r>
+              <a:rPr sz="1100">
+                <a:solidFill>
+                  <a:srgbClr val="067D17"/>
+                </a:solidFill>
+                <a:latin typeface="JetBrains Mono"/>
+                <a:ea typeface="JetBrains Mono"/>
+                <a:cs typeface="JetBrains Mono"/>
+              </a:rPr>
+              <a:t>"1: double\n2: square"</a:t>
+            </a:r>
+            <a:r>
+              <a:rPr sz="1100">
+                <a:solidFill>
+                  <a:srgbClr val="080808"/>
+                </a:solidFill>
+                <a:latin typeface="JetBrains Mono"/>
+                <a:ea typeface="JetBrains Mono"/>
+                <a:cs typeface="JetBrains Mono"/>
+              </a:rPr>
+              <a:t>)</a:t>
             </a:r>
             <a:br>
               <a:rPr sz="1100">
@@ -11084,7 +11256,7 @@
                 <a:ea typeface="JetBrains Mono"/>
                 <a:cs typeface="JetBrains Mono"/>
               </a:rPr>
-              <a:t>    </a:t>
+              <a:t>choice = </a:t>
             </a:r>
             <a:r>
               <a:rPr sz="1100">
@@ -11095,18 +11267,40 @@
                 <a:ea typeface="JetBrains Mono"/>
                 <a:cs typeface="JetBrains Mono"/>
               </a:rPr>
-              <a:t>return</a:t>
-            </a:r>
-            <a:r>
-              <a:rPr sz="1100">
-                <a:solidFill>
-                  <a:srgbClr val="080808"/>
-                </a:solidFill>
-                <a:latin typeface="JetBrains Mono"/>
-                <a:ea typeface="JetBrains Mono"/>
-                <a:cs typeface="JetBrains Mono"/>
-              </a:rPr>
-              <a:t> number * 2</a:t>
+              <a:t>input</a:t>
+            </a:r>
+            <a:r>
+              <a:rPr sz="1100">
+                <a:solidFill>
+                  <a:srgbClr val="080808"/>
+                </a:solidFill>
+                <a:latin typeface="JetBrains Mono"/>
+                <a:ea typeface="JetBrains Mono"/>
+                <a:cs typeface="JetBrains Mono"/>
+              </a:rPr>
+              <a:t>(</a:t>
+            </a:r>
+            <a:r>
+              <a:rPr sz="1100">
+                <a:solidFill>
+                  <a:srgbClr val="067D17"/>
+                </a:solidFill>
+                <a:latin typeface="JetBrains Mono"/>
+                <a:ea typeface="JetBrains Mono"/>
+                <a:cs typeface="JetBrains Mono"/>
+              </a:rPr>
+              <a:t>"Choice: "</a:t>
+            </a:r>
+            <a:r>
+              <a:rPr sz="1100">
+                <a:solidFill>
+                  <a:srgbClr val="080808"/>
+                </a:solidFill>
+                <a:latin typeface="JetBrains Mono"/>
+                <a:ea typeface="JetBrains Mono"/>
+                <a:cs typeface="JetBrains Mono"/>
+              </a:rPr>
+              <a:t>)</a:t>
             </a:r>
             <a:br>
               <a:rPr sz="1100">
@@ -11121,24 +11315,79 @@
             <a:r>
               <a:rPr sz="1100">
                 <a:solidFill>
+                  <a:srgbClr val="080808"/>
+                </a:solidFill>
+                <a:latin typeface="JetBrains Mono"/>
+                <a:ea typeface="JetBrains Mono"/>
+                <a:cs typeface="JetBrains Mono"/>
+              </a:rPr>
+              <a:t>value = </a:t>
+            </a:r>
+            <a:r>
+              <a:rPr sz="1100">
+                <a:solidFill>
                   <a:srgbClr val="1750EB"/>
                 </a:solidFill>
                 <a:latin typeface="JetBrains Mono"/>
                 <a:ea typeface="JetBrains Mono"/>
                 <a:cs typeface="JetBrains Mono"/>
               </a:rPr>
-              <a:t>def</a:t>
-            </a:r>
-            <a:r>
-              <a:rPr sz="1100">
-                <a:solidFill>
-                  <a:srgbClr val="080808"/>
-                </a:solidFill>
-                <a:latin typeface="JetBrains Mono"/>
-                <a:ea typeface="JetBrains Mono"/>
-                <a:cs typeface="JetBrains Mono"/>
-              </a:rPr>
-              <a:t> square(number):</a:t>
+              <a:t>int</a:t>
+            </a:r>
+            <a:r>
+              <a:rPr sz="1100">
+                <a:solidFill>
+                  <a:srgbClr val="080808"/>
+                </a:solidFill>
+                <a:latin typeface="JetBrains Mono"/>
+                <a:ea typeface="JetBrains Mono"/>
+                <a:cs typeface="JetBrains Mono"/>
+              </a:rPr>
+              <a:t>(</a:t>
+            </a:r>
+            <a:r>
+              <a:rPr sz="1100">
+                <a:solidFill>
+                  <a:srgbClr val="1750EB"/>
+                </a:solidFill>
+                <a:latin typeface="JetBrains Mono"/>
+                <a:ea typeface="JetBrains Mono"/>
+                <a:cs typeface="JetBrains Mono"/>
+              </a:rPr>
+              <a:t>input</a:t>
+            </a:r>
+            <a:r>
+              <a:rPr sz="1100">
+                <a:solidFill>
+                  <a:srgbClr val="080808"/>
+                </a:solidFill>
+                <a:latin typeface="JetBrains Mono"/>
+                <a:ea typeface="JetBrains Mono"/>
+                <a:cs typeface="JetBrains Mono"/>
+              </a:rPr>
+              <a:t>(</a:t>
+            </a:r>
+            <a:r>
+              <a:rPr sz="1100">
+                <a:solidFill>
+                  <a:srgbClr val="067D17"/>
+                </a:solidFill>
+                <a:latin typeface="JetBrains Mono"/>
+                <a:ea typeface="JetBrains Mono"/>
+                <a:cs typeface="JetBrains Mono"/>
+              </a:rPr>
+              <a:t>"Number: "</a:t>
+            </a:r>
+            <a:r>
+              <a:rPr sz="1100">
+                <a:solidFill>
+                  <a:srgbClr val="080808"/>
+                </a:solidFill>
+                <a:latin typeface="JetBrains Mono"/>
+                <a:ea typeface="JetBrains Mono"/>
+                <a:cs typeface="JetBrains Mono"/>
+              </a:rPr>
+              <a:t>))</a:t>
             </a:r>
             <a:br>
               <a:rPr sz="1100">
@@ -11153,256 +11402,7 @@
             <a:r>
               <a:rPr sz="1100">
                 <a:solidFill>
-                  <a:srgbClr val="080808"/>
-                </a:solidFill>
-                <a:latin typeface="JetBrains Mono"/>
-                <a:ea typeface="JetBrains Mono"/>
-                <a:cs typeface="JetBrains Mono"/>
-              </a:rPr>
-              <a:t>    </a:t>
-            </a:r>
-            <a:r>
-              <a:rPr sz="1100">
-                <a:solidFill>
-                  <a:srgbClr val="1750EB"/>
-                </a:solidFill>
-                <a:latin typeface="JetBrains Mono"/>
-                <a:ea typeface="JetBrains Mono"/>
-                <a:cs typeface="JetBrains Mono"/>
-              </a:rPr>
-              <a:t>return</a:t>
-            </a:r>
-            <a:r>
-              <a:rPr sz="1100">
-                <a:solidFill>
-                  <a:srgbClr val="080808"/>
-                </a:solidFill>
-                <a:latin typeface="JetBrains Mono"/>
-                <a:ea typeface="JetBrains Mono"/>
-                <a:cs typeface="JetBrains Mono"/>
-              </a:rPr>
-              <a:t> number * number</a:t>
-            </a:r>
-            <a:br>
-              <a:rPr sz="1100">
-                <a:solidFill>
-                  <a:srgbClr val="080808"/>
-                </a:solidFill>
-                <a:latin typeface="JetBrains Mono"/>
-                <a:ea typeface="JetBrains Mono"/>
-                <a:cs typeface="JetBrains Mono"/>
-              </a:rPr>
-            </a:br>
-            <a:r>
-              <a:rPr sz="1100">
-                <a:solidFill>
-                  <a:srgbClr val="1750EB"/>
-                </a:solidFill>
-                <a:latin typeface="JetBrains Mono"/>
-                <a:ea typeface="JetBrains Mono"/>
-                <a:cs typeface="JetBrains Mono"/>
-              </a:rPr>
-              <a:t>print</a:t>
-            </a:r>
-            <a:r>
-              <a:rPr sz="1100">
-                <a:solidFill>
-                  <a:srgbClr val="080808"/>
-                </a:solidFill>
-                <a:latin typeface="JetBrains Mono"/>
-                <a:ea typeface="JetBrains Mono"/>
-                <a:cs typeface="JetBrains Mono"/>
-              </a:rPr>
-              <a:t>(</a:t>
-            </a:r>
-            <a:r>
-              <a:rPr sz="1100">
-                <a:solidFill>
-                  <a:srgbClr val="067D17"/>
-                </a:solidFill>
-                <a:latin typeface="JetBrains Mono"/>
-                <a:ea typeface="JetBrains Mono"/>
-                <a:cs typeface="JetBrains Mono"/>
-              </a:rPr>
-              <a:t>"1: double\n2: square"</a:t>
-            </a:r>
-            <a:r>
-              <a:rPr sz="1100">
-                <a:solidFill>
-                  <a:srgbClr val="080808"/>
-                </a:solidFill>
-                <a:latin typeface="JetBrains Mono"/>
-                <a:ea typeface="JetBrains Mono"/>
-                <a:cs typeface="JetBrains Mono"/>
-              </a:rPr>
-              <a:t>)</a:t>
-            </a:r>
-            <a:br>
-              <a:rPr sz="1100">
-                <a:solidFill>
-                  <a:srgbClr val="080808"/>
-                </a:solidFill>
-                <a:latin typeface="JetBrains Mono"/>
-                <a:ea typeface="JetBrains Mono"/>
-                <a:cs typeface="JetBrains Mono"/>
-              </a:rPr>
-            </a:br>
-            <a:r>
-              <a:rPr sz="1100">
-                <a:solidFill>
-                  <a:srgbClr val="080808"/>
-                </a:solidFill>
-                <a:latin typeface="JetBrains Mono"/>
-                <a:ea typeface="JetBrains Mono"/>
-                <a:cs typeface="JetBrains Mono"/>
-              </a:rPr>
-              <a:t>choice = </a:t>
-            </a:r>
-            <a:r>
-              <a:rPr sz="1100">
-                <a:solidFill>
-                  <a:srgbClr val="1750EB"/>
-                </a:solidFill>
-                <a:latin typeface="JetBrains Mono"/>
-                <a:ea typeface="JetBrains Mono"/>
-                <a:cs typeface="JetBrains Mono"/>
-              </a:rPr>
-              <a:t>input</a:t>
-            </a:r>
-            <a:r>
-              <a:rPr sz="1100">
-                <a:solidFill>
-                  <a:srgbClr val="080808"/>
-                </a:solidFill>
-                <a:latin typeface="JetBrains Mono"/>
-                <a:ea typeface="JetBrains Mono"/>
-                <a:cs typeface="JetBrains Mono"/>
-              </a:rPr>
-              <a:t>(</a:t>
-            </a:r>
-            <a:r>
-              <a:rPr sz="1100">
-                <a:solidFill>
-                  <a:srgbClr val="067D17"/>
-                </a:solidFill>
-                <a:latin typeface="JetBrains Mono"/>
-                <a:ea typeface="JetBrains Mono"/>
-                <a:cs typeface="JetBrains Mono"/>
-              </a:rPr>
-              <a:t>"Choice: "</a:t>
-            </a:r>
-            <a:r>
-              <a:rPr sz="1100">
-                <a:solidFill>
-                  <a:srgbClr val="080808"/>
-                </a:solidFill>
-                <a:latin typeface="JetBrains Mono"/>
-                <a:ea typeface="JetBrains Mono"/>
-                <a:cs typeface="JetBrains Mono"/>
-              </a:rPr>
-              <a:t>)</a:t>
-            </a:r>
-            <a:br>
-              <a:rPr sz="1100">
-                <a:solidFill>
-                  <a:srgbClr val="080808"/>
-                </a:solidFill>
-                <a:latin typeface="JetBrains Mono"/>
-                <a:ea typeface="JetBrains Mono"/>
-                <a:cs typeface="JetBrains Mono"/>
-              </a:rPr>
-            </a:br>
-            <a:r>
-              <a:rPr sz="1100">
-                <a:solidFill>
-                  <a:srgbClr val="080808"/>
-                </a:solidFill>
-                <a:latin typeface="JetBrains Mono"/>
-                <a:ea typeface="JetBrains Mono"/>
-                <a:cs typeface="JetBrains Mono"/>
-              </a:rPr>
-              <a:t>value = </a:t>
-            </a:r>
-            <a:r>
-              <a:rPr sz="1100">
-                <a:solidFill>
-                  <a:srgbClr val="1750EB"/>
-                </a:solidFill>
-                <a:latin typeface="JetBrains Mono"/>
-                <a:ea typeface="JetBrains Mono"/>
-                <a:cs typeface="JetBrains Mono"/>
-              </a:rPr>
-              <a:t>int</a:t>
-            </a:r>
-            <a:r>
-              <a:rPr sz="1100">
-                <a:solidFill>
-                  <a:srgbClr val="080808"/>
-                </a:solidFill>
-                <a:latin typeface="JetBrains Mono"/>
-                <a:ea typeface="JetBrains Mono"/>
-                <a:cs typeface="JetBrains Mono"/>
-              </a:rPr>
-              <a:t>(</a:t>
-            </a:r>
-            <a:r>
-              <a:rPr sz="1100">
-                <a:solidFill>
-                  <a:srgbClr val="1750EB"/>
-                </a:solidFill>
-                <a:latin typeface="JetBrains Mono"/>
-                <a:ea typeface="JetBrains Mono"/>
-                <a:cs typeface="JetBrains Mono"/>
-              </a:rPr>
-              <a:t>input</a:t>
-            </a:r>
-            <a:r>
-              <a:rPr sz="1100">
-                <a:solidFill>
-                  <a:srgbClr val="080808"/>
-                </a:solidFill>
-                <a:latin typeface="JetBrains Mono"/>
-                <a:ea typeface="JetBrains Mono"/>
-                <a:cs typeface="JetBrains Mono"/>
-              </a:rPr>
-              <a:t>(</a:t>
-            </a:r>
-            <a:r>
-              <a:rPr sz="1100">
-                <a:solidFill>
-                  <a:srgbClr val="067D17"/>
-                </a:solidFill>
-                <a:latin typeface="JetBrains Mono"/>
-                <a:ea typeface="JetBrains Mono"/>
-                <a:cs typeface="JetBrains Mono"/>
-              </a:rPr>
-              <a:t>"Number: "</a:t>
-            </a:r>
-            <a:r>
-              <a:rPr sz="1100">
-                <a:solidFill>
-                  <a:srgbClr val="080808"/>
-                </a:solidFill>
-                <a:latin typeface="JetBrains Mono"/>
-                <a:ea typeface="JetBrains Mono"/>
-                <a:cs typeface="JetBrains Mono"/>
-              </a:rPr>
-              <a:t>))</a:t>
-            </a:r>
-            <a:br>
-              <a:rPr sz="1100">
-                <a:solidFill>
-                  <a:srgbClr val="080808"/>
-                </a:solidFill>
-                <a:latin typeface="JetBrains Mono"/>
-                <a:ea typeface="JetBrains Mono"/>
-                <a:cs typeface="JetBrains Mono"/>
-              </a:rPr>
-            </a:br>
-            <a:r>
-              <a:rPr sz="1100">
-                <a:solidFill>
-                  <a:srgbClr val="1750EB"/>
+                  <a:srgbClr val="C45E00"/>
                 </a:solidFill>
                 <a:latin typeface="JetBrains Mono"/>
                 <a:ea typeface="JetBrains Mono"/>
@@ -11543,7 +11543,7 @@
             <a:r>
               <a:rPr sz="1100">
                 <a:solidFill>
-                  <a:srgbClr val="1750EB"/>
+                  <a:srgbClr val="C45E00"/>
                 </a:solidFill>
                 <a:latin typeface="JetBrains Mono"/>
                 <a:ea typeface="JetBrains Mono"/>
@@ -11763,7 +11763,7 @@
             <a:r>
               <a:rPr sz="1800">
                 <a:solidFill>
-                  <a:srgbClr val="1750EB"/>
+                  <a:srgbClr val="C45E00"/>
                 </a:solidFill>
                 <a:latin typeface="JetBrains Mono"/>
                 <a:ea typeface="JetBrains Mono"/>
@@ -11812,7 +11812,7 @@
             <a:r>
               <a:rPr sz="1800">
                 <a:solidFill>
-                  <a:srgbClr val="1750EB"/>
+                  <a:srgbClr val="C45E00"/>
                 </a:solidFill>
                 <a:latin typeface="JetBrains Mono"/>
                 <a:ea typeface="JetBrains Mono"/>
@@ -11853,7 +11853,7 @@
             <a:r>
               <a:rPr sz="1800">
                 <a:solidFill>
-                  <a:srgbClr val="1750EB"/>
+                  <a:srgbClr val="C45E00"/>
                 </a:solidFill>
                 <a:latin typeface="JetBrains Mono"/>
                 <a:ea typeface="JetBrains Mono"/>

--- a/Mapped Curriculum Lessons/Grade 8/Lesson 34 - Several Functions/Several Functions - Slides.pptx
+++ b/Mapped Curriculum Lessons/Grade 8/Lesson 34 - Several Functions/Several Functions - Slides.pptx
@@ -2,28 +2,28 @@
 <file path=ppt/presentation.xml><?xml version="1.0" encoding="utf-8"?>
 <p:presentation xmlns:p="http://schemas.openxmlformats.org/presentationml/2006/main" embedTrueTypeFonts="1" saveSubsetFonts="0">
   <p:sldMasterIdLst>
-    <p:sldMasterId xmlns:r="http://schemas.openxmlformats.org/officeDocument/2006/relationships" id="2147483648" r:id="Rfa903587065f4c58"/>
+    <p:sldMasterId xmlns:r="http://schemas.openxmlformats.org/officeDocument/2006/relationships" id="2147483648" r:id="Rae232d82d743487a"/>
   </p:sldMasterIdLst>
   <p:notesMasterIdLst>
-    <p:notesMasterId xmlns:r="http://schemas.openxmlformats.org/officeDocument/2006/relationships" r:id="Rb173e8bdb0a54089"/>
+    <p:notesMasterId xmlns:r="http://schemas.openxmlformats.org/officeDocument/2006/relationships" r:id="R3c16a8851fae4d70"/>
   </p:notesMasterIdLst>
   <p:sldIdLst>
-    <p:sldId xmlns:r="http://schemas.openxmlformats.org/officeDocument/2006/relationships" id="256" r:id="R48331dadbf5747ab"/>
-    <p:sldId xmlns:r="http://schemas.openxmlformats.org/officeDocument/2006/relationships" id="257" r:id="R737ae14eb0d64906"/>
-    <p:sldId xmlns:r="http://schemas.openxmlformats.org/officeDocument/2006/relationships" id="258" r:id="R78c623d36b7e4ce2"/>
-    <p:sldId xmlns:r="http://schemas.openxmlformats.org/officeDocument/2006/relationships" id="259" r:id="R4e8438d375a74672"/>
-    <p:sldId xmlns:r="http://schemas.openxmlformats.org/officeDocument/2006/relationships" id="260" r:id="R9f6ba7805e914a0a"/>
-    <p:sldId xmlns:r="http://schemas.openxmlformats.org/officeDocument/2006/relationships" id="261" r:id="R28a48ecd5b2f40ae"/>
-    <p:sldId xmlns:r="http://schemas.openxmlformats.org/officeDocument/2006/relationships" id="262" r:id="Rd20f429fe14e4b5d"/>
-    <p:sldId xmlns:r="http://schemas.openxmlformats.org/officeDocument/2006/relationships" id="263" r:id="R26148cd9b6e74793"/>
-    <p:sldId xmlns:r="http://schemas.openxmlformats.org/officeDocument/2006/relationships" id="264" r:id="R414c5f3626574b5d"/>
+    <p:sldId xmlns:r="http://schemas.openxmlformats.org/officeDocument/2006/relationships" id="256" r:id="R3aac8f7a1d9b4e3f"/>
+    <p:sldId xmlns:r="http://schemas.openxmlformats.org/officeDocument/2006/relationships" id="257" r:id="Radeb7a88b72c43cd"/>
+    <p:sldId xmlns:r="http://schemas.openxmlformats.org/officeDocument/2006/relationships" id="258" r:id="Rcfea86b8638c4b96"/>
+    <p:sldId xmlns:r="http://schemas.openxmlformats.org/officeDocument/2006/relationships" id="259" r:id="R2950761714764ec1"/>
+    <p:sldId xmlns:r="http://schemas.openxmlformats.org/officeDocument/2006/relationships" id="260" r:id="R39844d782829422b"/>
+    <p:sldId xmlns:r="http://schemas.openxmlformats.org/officeDocument/2006/relationships" id="261" r:id="R40ed8eac37794a2f"/>
+    <p:sldId xmlns:r="http://schemas.openxmlformats.org/officeDocument/2006/relationships" id="262" r:id="Rb63d45078eeb4844"/>
+    <p:sldId xmlns:r="http://schemas.openxmlformats.org/officeDocument/2006/relationships" id="263" r:id="Rb7556d5eb6844428"/>
+    <p:sldId xmlns:r="http://schemas.openxmlformats.org/officeDocument/2006/relationships" id="264" r:id="R6275ec6ef44b4344"/>
   </p:sldIdLst>
   <p:sldSz cx="12192000" cy="6858000"/>
   <p:notesSz cx="6858000" cy="9144000"/>
   <p:embeddedFontLst>
     <p:embeddedFont>
       <p:font typeface="JetBrains Mono"/>
-      <p:regular xmlns:r="http://schemas.openxmlformats.org/officeDocument/2006/relationships" r:id="R5f1ec91fd2a9492a"/>
+      <p:regular xmlns:r="http://schemas.openxmlformats.org/officeDocument/2006/relationships" r:id="R5009db131b5949c8"/>
     </p:embeddedFont>
   </p:embeddedFontLst>
 </p:presentation>
@@ -1071,7 +1071,7 @@
           <p:nvPr/>
         </p:nvPicPr>
         <p:blipFill rotWithShape="1">
-          <a:blip xmlns:r="http://schemas.openxmlformats.org/officeDocument/2006/relationships" xmlns:a="http://schemas.openxmlformats.org/drawingml/2006/main" r:embed="R11333d02287140bf"/>
+          <a:blip xmlns:r="http://schemas.openxmlformats.org/officeDocument/2006/relationships" xmlns:a="http://schemas.openxmlformats.org/drawingml/2006/main" r:embed="Rf05ed061c2744cf5"/>
           <a:stretch xmlns:a="http://schemas.openxmlformats.org/drawingml/2006/main"/>
         </p:blipFill>
         <p:spPr>
@@ -1451,7 +1451,7 @@
           <p:nvPr/>
         </p:nvPicPr>
         <p:blipFill rotWithShape="1">
-          <a:blip xmlns:r="http://schemas.openxmlformats.org/officeDocument/2006/relationships" xmlns:a="http://schemas.openxmlformats.org/drawingml/2006/main" r:embed="R9d5d921273f847b1">
+          <a:blip xmlns:r="http://schemas.openxmlformats.org/officeDocument/2006/relationships" xmlns:a="http://schemas.openxmlformats.org/drawingml/2006/main" r:embed="Ra236ec6325b64382">
             <a:alphaModFix amt="28000"/>
           </a:blip>
           <a:stretch xmlns:a="http://schemas.openxmlformats.org/drawingml/2006/main"/>
@@ -1664,7 +1664,7 @@
           <p:nvPr/>
         </p:nvPicPr>
         <p:blipFill rotWithShape="1">
-          <a:blip xmlns:r="http://schemas.openxmlformats.org/officeDocument/2006/relationships" xmlns:a="http://schemas.openxmlformats.org/drawingml/2006/main" r:embed="Rc839ec6724ac4872">
+          <a:blip xmlns:r="http://schemas.openxmlformats.org/officeDocument/2006/relationships" xmlns:a="http://schemas.openxmlformats.org/drawingml/2006/main" r:embed="Rb6b96e1a55bf4416">
             <a:alphaModFix amt="28000"/>
           </a:blip>
           <a:stretch xmlns:a="http://schemas.openxmlformats.org/drawingml/2006/main"/>
@@ -1899,7 +1899,7 @@
           <p:nvPr/>
         </p:nvPicPr>
         <p:blipFill rotWithShape="1">
-          <a:blip xmlns:r="http://schemas.openxmlformats.org/officeDocument/2006/relationships" xmlns:a="http://schemas.openxmlformats.org/drawingml/2006/main" r:embed="Re1dfc1d498ee494e">
+          <a:blip xmlns:r="http://schemas.openxmlformats.org/officeDocument/2006/relationships" xmlns:a="http://schemas.openxmlformats.org/drawingml/2006/main" r:embed="R3214129214464e66">
             <a:alphaModFix amt="28000"/>
           </a:blip>
           <a:stretch xmlns:a="http://schemas.openxmlformats.org/drawingml/2006/main"/>
@@ -2176,7 +2176,7 @@
           <p:nvPr/>
         </p:nvPicPr>
         <p:blipFill rotWithShape="1">
-          <a:blip xmlns:r="http://schemas.openxmlformats.org/officeDocument/2006/relationships" xmlns:a="http://schemas.openxmlformats.org/drawingml/2006/main" r:embed="Re8c034cde4d64cfe">
+          <a:blip xmlns:r="http://schemas.openxmlformats.org/officeDocument/2006/relationships" xmlns:a="http://schemas.openxmlformats.org/drawingml/2006/main" r:embed="Ra7a5d4fbc72848d3">
             <a:alphaModFix amt="28000"/>
           </a:blip>
           <a:stretch xmlns:a="http://schemas.openxmlformats.org/drawingml/2006/main"/>
@@ -2451,7 +2451,7 @@
           <p:nvPr/>
         </p:nvPicPr>
         <p:blipFill rotWithShape="1">
-          <a:blip xmlns:r="http://schemas.openxmlformats.org/officeDocument/2006/relationships" xmlns:a="http://schemas.openxmlformats.org/drawingml/2006/main" r:embed="Rca4e8718fa8440a3">
+          <a:blip xmlns:r="http://schemas.openxmlformats.org/officeDocument/2006/relationships" xmlns:a="http://schemas.openxmlformats.org/drawingml/2006/main" r:embed="R071a4f976c0a4137">
             <a:alphaModFix amt="28000"/>
           </a:blip>
           <a:stretch xmlns:a="http://schemas.openxmlformats.org/drawingml/2006/main"/>
@@ -2875,7 +2875,7 @@
           <p:nvPr/>
         </p:nvPicPr>
         <p:blipFill rotWithShape="1">
-          <a:blip xmlns:r="http://schemas.openxmlformats.org/officeDocument/2006/relationships" xmlns:a="http://schemas.openxmlformats.org/drawingml/2006/main" r:embed="Rf263d02074214a49">
+          <a:blip xmlns:r="http://schemas.openxmlformats.org/officeDocument/2006/relationships" xmlns:a="http://schemas.openxmlformats.org/drawingml/2006/main" r:embed="Rf897298d34b84788">
             <a:alphaModFix amt="28000"/>
           </a:blip>
           <a:stretch xmlns:a="http://schemas.openxmlformats.org/drawingml/2006/main"/>
@@ -3016,7 +3016,7 @@
           <p:nvPr/>
         </p:nvPicPr>
         <p:blipFill rotWithShape="1">
-          <a:blip xmlns:r="http://schemas.openxmlformats.org/officeDocument/2006/relationships" xmlns:a="http://schemas.openxmlformats.org/drawingml/2006/main" r:embed="Rc0f3b751fa854147">
+          <a:blip xmlns:r="http://schemas.openxmlformats.org/officeDocument/2006/relationships" xmlns:a="http://schemas.openxmlformats.org/drawingml/2006/main" r:embed="R87f00055448042a3">
             <a:alphaModFix amt="28000"/>
           </a:blip>
           <a:stretch xmlns:a="http://schemas.openxmlformats.org/drawingml/2006/main"/>
@@ -3130,7 +3130,7 @@
           <p:nvPr/>
         </p:nvPicPr>
         <p:blipFill rotWithShape="1">
-          <a:blip xmlns:r="http://schemas.openxmlformats.org/officeDocument/2006/relationships" xmlns:a="http://schemas.openxmlformats.org/drawingml/2006/main" r:embed="Re2bac2acdfe246de">
+          <a:blip xmlns:r="http://schemas.openxmlformats.org/officeDocument/2006/relationships" xmlns:a="http://schemas.openxmlformats.org/drawingml/2006/main" r:embed="R70adef3f3c184d30">
             <a:alphaModFix amt="28000"/>
           </a:blip>
           <a:stretch xmlns:a="http://schemas.openxmlformats.org/drawingml/2006/main"/>
@@ -3457,7 +3457,7 @@
           <p:nvPr/>
         </p:nvPicPr>
         <p:blipFill rotWithShape="1">
-          <a:blip xmlns:r="http://schemas.openxmlformats.org/officeDocument/2006/relationships" xmlns:a="http://schemas.openxmlformats.org/drawingml/2006/main" r:embed="Rbe8705aff2a84bfe">
+          <a:blip xmlns:r="http://schemas.openxmlformats.org/officeDocument/2006/relationships" xmlns:a="http://schemas.openxmlformats.org/drawingml/2006/main" r:embed="Ref9990b804fc4800">
             <a:alphaModFix amt="28000"/>
           </a:blip>
           <a:stretch xmlns:a="http://schemas.openxmlformats.org/drawingml/2006/main"/>
@@ -3745,7 +3745,7 @@
           <p:nvPr/>
         </p:nvPicPr>
         <p:blipFill rotWithShape="1">
-          <a:blip xmlns:r="http://schemas.openxmlformats.org/officeDocument/2006/relationships" xmlns:a="http://schemas.openxmlformats.org/drawingml/2006/main" r:embed="Rd3ff8a332a264189">
+          <a:blip xmlns:r="http://schemas.openxmlformats.org/officeDocument/2006/relationships" xmlns:a="http://schemas.openxmlformats.org/drawingml/2006/main" r:embed="Rd25afc963a9644bc">
             <a:alphaModFix amt="28000"/>
           </a:blip>
           <a:stretch xmlns:a="http://schemas.openxmlformats.org/drawingml/2006/main"/>
@@ -3982,17 +3982,17 @@
   </p:cSld>
   <p:clrMap bg1="lt1" tx1="dk1" bg2="lt2" tx2="dk2" accent1="accent1" accent2="accent2" accent3="accent3" accent4="accent4" accent5="accent5" accent6="accent6" hlink="hlink" folHlink="folHlink"/>
   <p:sldLayoutIdLst>
-    <p:sldLayoutId xmlns:r="http://schemas.openxmlformats.org/officeDocument/2006/relationships" id="2147483649" r:id="R84296a9d27554e0d"/>
-    <p:sldLayoutId xmlns:r="http://schemas.openxmlformats.org/officeDocument/2006/relationships" id="2147483650" r:id="R57ffef56beb44381"/>
-    <p:sldLayoutId xmlns:r="http://schemas.openxmlformats.org/officeDocument/2006/relationships" id="2147483651" r:id="R7376a7f293ee4f0d"/>
-    <p:sldLayoutId xmlns:r="http://schemas.openxmlformats.org/officeDocument/2006/relationships" id="2147483652" r:id="R7a2a5b1edaba4533"/>
-    <p:sldLayoutId xmlns:r="http://schemas.openxmlformats.org/officeDocument/2006/relationships" id="2147483653" r:id="Rd85f8426d40940ed"/>
-    <p:sldLayoutId xmlns:r="http://schemas.openxmlformats.org/officeDocument/2006/relationships" id="2147483654" r:id="R25acfad297c14328"/>
-    <p:sldLayoutId xmlns:r="http://schemas.openxmlformats.org/officeDocument/2006/relationships" id="2147483655" r:id="R301b7257297a40d1"/>
-    <p:sldLayoutId xmlns:r="http://schemas.openxmlformats.org/officeDocument/2006/relationships" id="2147483656" r:id="R6ef648f1865147b8"/>
-    <p:sldLayoutId xmlns:r="http://schemas.openxmlformats.org/officeDocument/2006/relationships" id="2147483657" r:id="R7292238953a94888"/>
-    <p:sldLayoutId xmlns:r="http://schemas.openxmlformats.org/officeDocument/2006/relationships" id="2147483658" r:id="Rc295349bc264429c"/>
-    <p:sldLayoutId xmlns:r="http://schemas.openxmlformats.org/officeDocument/2006/relationships" id="2147483659" r:id="R1b265d772f8749dd"/>
+    <p:sldLayoutId xmlns:r="http://schemas.openxmlformats.org/officeDocument/2006/relationships" id="2147483649" r:id="Rff5ebe2fd2084a2c"/>
+    <p:sldLayoutId xmlns:r="http://schemas.openxmlformats.org/officeDocument/2006/relationships" id="2147483650" r:id="Re9c9ad4bdc9b4123"/>
+    <p:sldLayoutId xmlns:r="http://schemas.openxmlformats.org/officeDocument/2006/relationships" id="2147483651" r:id="R5faaa4b19dc34f8e"/>
+    <p:sldLayoutId xmlns:r="http://schemas.openxmlformats.org/officeDocument/2006/relationships" id="2147483652" r:id="Ra1f2550b2bda4e5b"/>
+    <p:sldLayoutId xmlns:r="http://schemas.openxmlformats.org/officeDocument/2006/relationships" id="2147483653" r:id="R50db350aad8f42b1"/>
+    <p:sldLayoutId xmlns:r="http://schemas.openxmlformats.org/officeDocument/2006/relationships" id="2147483654" r:id="R9ccd8acc765a4346"/>
+    <p:sldLayoutId xmlns:r="http://schemas.openxmlformats.org/officeDocument/2006/relationships" id="2147483655" r:id="Ra3c4642cc70f42ec"/>
+    <p:sldLayoutId xmlns:r="http://schemas.openxmlformats.org/officeDocument/2006/relationships" id="2147483656" r:id="Rd3d41ec357a24cd4"/>
+    <p:sldLayoutId xmlns:r="http://schemas.openxmlformats.org/officeDocument/2006/relationships" id="2147483657" r:id="R2f186c40196d46b7"/>
+    <p:sldLayoutId xmlns:r="http://schemas.openxmlformats.org/officeDocument/2006/relationships" id="2147483658" r:id="R7dc0171911e64624"/>
+    <p:sldLayoutId xmlns:r="http://schemas.openxmlformats.org/officeDocument/2006/relationships" id="2147483659" r:id="Rd0ba3994e092414a"/>
   </p:sldLayoutIdLst>
   <p:hf hdr="0" ftr="0" dt="0"/>
   <p:txStyles>

--- a/Mapped Curriculum Lessons/Grade 8/Lesson 34 - Several Functions/Several Functions - Slides.pptx
+++ b/Mapped Curriculum Lessons/Grade 8/Lesson 34 - Several Functions/Several Functions - Slides.pptx
@@ -2,28 +2,28 @@
 <file path=ppt/presentation.xml><?xml version="1.0" encoding="utf-8"?>
 <p:presentation xmlns:p="http://schemas.openxmlformats.org/presentationml/2006/main" embedTrueTypeFonts="1" saveSubsetFonts="0">
   <p:sldMasterIdLst>
-    <p:sldMasterId xmlns:r="http://schemas.openxmlformats.org/officeDocument/2006/relationships" id="2147483648" r:id="Rae232d82d743487a"/>
+    <p:sldMasterId xmlns:r="http://schemas.openxmlformats.org/officeDocument/2006/relationships" id="2147483648" r:id="Rc7a1e4bfd24445b8"/>
   </p:sldMasterIdLst>
   <p:notesMasterIdLst>
-    <p:notesMasterId xmlns:r="http://schemas.openxmlformats.org/officeDocument/2006/relationships" r:id="R3c16a8851fae4d70"/>
+    <p:notesMasterId xmlns:r="http://schemas.openxmlformats.org/officeDocument/2006/relationships" r:id="R28f563b8dff24984"/>
   </p:notesMasterIdLst>
   <p:sldIdLst>
-    <p:sldId xmlns:r="http://schemas.openxmlformats.org/officeDocument/2006/relationships" id="256" r:id="R3aac8f7a1d9b4e3f"/>
-    <p:sldId xmlns:r="http://schemas.openxmlformats.org/officeDocument/2006/relationships" id="257" r:id="Radeb7a88b72c43cd"/>
-    <p:sldId xmlns:r="http://schemas.openxmlformats.org/officeDocument/2006/relationships" id="258" r:id="Rcfea86b8638c4b96"/>
-    <p:sldId xmlns:r="http://schemas.openxmlformats.org/officeDocument/2006/relationships" id="259" r:id="R2950761714764ec1"/>
-    <p:sldId xmlns:r="http://schemas.openxmlformats.org/officeDocument/2006/relationships" id="260" r:id="R39844d782829422b"/>
-    <p:sldId xmlns:r="http://schemas.openxmlformats.org/officeDocument/2006/relationships" id="261" r:id="R40ed8eac37794a2f"/>
-    <p:sldId xmlns:r="http://schemas.openxmlformats.org/officeDocument/2006/relationships" id="262" r:id="Rb63d45078eeb4844"/>
-    <p:sldId xmlns:r="http://schemas.openxmlformats.org/officeDocument/2006/relationships" id="263" r:id="Rb7556d5eb6844428"/>
-    <p:sldId xmlns:r="http://schemas.openxmlformats.org/officeDocument/2006/relationships" id="264" r:id="R6275ec6ef44b4344"/>
+    <p:sldId xmlns:r="http://schemas.openxmlformats.org/officeDocument/2006/relationships" id="256" r:id="R8b4e251b2385451d"/>
+    <p:sldId xmlns:r="http://schemas.openxmlformats.org/officeDocument/2006/relationships" id="257" r:id="R4d554c4a62244de8"/>
+    <p:sldId xmlns:r="http://schemas.openxmlformats.org/officeDocument/2006/relationships" id="258" r:id="R1f444de747c64b04"/>
+    <p:sldId xmlns:r="http://schemas.openxmlformats.org/officeDocument/2006/relationships" id="259" r:id="R49e4d9554977453f"/>
+    <p:sldId xmlns:r="http://schemas.openxmlformats.org/officeDocument/2006/relationships" id="260" r:id="R446bb5cd540c4099"/>
+    <p:sldId xmlns:r="http://schemas.openxmlformats.org/officeDocument/2006/relationships" id="261" r:id="Rc287432cdafc4ba2"/>
+    <p:sldId xmlns:r="http://schemas.openxmlformats.org/officeDocument/2006/relationships" id="262" r:id="R51c3f9a7f1fb418a"/>
+    <p:sldId xmlns:r="http://schemas.openxmlformats.org/officeDocument/2006/relationships" id="263" r:id="Rf350c94f9fbd4755"/>
+    <p:sldId xmlns:r="http://schemas.openxmlformats.org/officeDocument/2006/relationships" id="264" r:id="R24cabfb5cd6b4c81"/>
   </p:sldIdLst>
   <p:sldSz cx="12192000" cy="6858000"/>
   <p:notesSz cx="6858000" cy="9144000"/>
   <p:embeddedFontLst>
     <p:embeddedFont>
       <p:font typeface="JetBrains Mono"/>
-      <p:regular xmlns:r="http://schemas.openxmlformats.org/officeDocument/2006/relationships" r:id="R5009db131b5949c8"/>
+      <p:regular xmlns:r="http://schemas.openxmlformats.org/officeDocument/2006/relationships" r:id="Rc6b2b0805b6248a4"/>
     </p:embeddedFont>
   </p:embeddedFontLst>
 </p:presentation>
@@ -1071,7 +1071,7 @@
           <p:nvPr/>
         </p:nvPicPr>
         <p:blipFill rotWithShape="1">
-          <a:blip xmlns:r="http://schemas.openxmlformats.org/officeDocument/2006/relationships" xmlns:a="http://schemas.openxmlformats.org/drawingml/2006/main" r:embed="Rf05ed061c2744cf5"/>
+          <a:blip xmlns:r="http://schemas.openxmlformats.org/officeDocument/2006/relationships" xmlns:a="http://schemas.openxmlformats.org/drawingml/2006/main" r:embed="R9f0f6ee335bf45cf"/>
           <a:stretch xmlns:a="http://schemas.openxmlformats.org/drawingml/2006/main"/>
         </p:blipFill>
         <p:spPr>
@@ -1451,7 +1451,7 @@
           <p:nvPr/>
         </p:nvPicPr>
         <p:blipFill rotWithShape="1">
-          <a:blip xmlns:r="http://schemas.openxmlformats.org/officeDocument/2006/relationships" xmlns:a="http://schemas.openxmlformats.org/drawingml/2006/main" r:embed="Ra236ec6325b64382">
+          <a:blip xmlns:r="http://schemas.openxmlformats.org/officeDocument/2006/relationships" xmlns:a="http://schemas.openxmlformats.org/drawingml/2006/main" r:embed="Rd71c5699d9c14896">
             <a:alphaModFix amt="28000"/>
           </a:blip>
           <a:stretch xmlns:a="http://schemas.openxmlformats.org/drawingml/2006/main"/>
@@ -1664,7 +1664,7 @@
           <p:nvPr/>
         </p:nvPicPr>
         <p:blipFill rotWithShape="1">
-          <a:blip xmlns:r="http://schemas.openxmlformats.org/officeDocument/2006/relationships" xmlns:a="http://schemas.openxmlformats.org/drawingml/2006/main" r:embed="Rb6b96e1a55bf4416">
+          <a:blip xmlns:r="http://schemas.openxmlformats.org/officeDocument/2006/relationships" xmlns:a="http://schemas.openxmlformats.org/drawingml/2006/main" r:embed="R01052693078945c3">
             <a:alphaModFix amt="28000"/>
           </a:blip>
           <a:stretch xmlns:a="http://schemas.openxmlformats.org/drawingml/2006/main"/>
@@ -1899,7 +1899,7 @@
           <p:nvPr/>
         </p:nvPicPr>
         <p:blipFill rotWithShape="1">
-          <a:blip xmlns:r="http://schemas.openxmlformats.org/officeDocument/2006/relationships" xmlns:a="http://schemas.openxmlformats.org/drawingml/2006/main" r:embed="R3214129214464e66">
+          <a:blip xmlns:r="http://schemas.openxmlformats.org/officeDocument/2006/relationships" xmlns:a="http://schemas.openxmlformats.org/drawingml/2006/main" r:embed="Rce4143545e814424">
             <a:alphaModFix amt="28000"/>
           </a:blip>
           <a:stretch xmlns:a="http://schemas.openxmlformats.org/drawingml/2006/main"/>
@@ -2176,7 +2176,7 @@
           <p:nvPr/>
         </p:nvPicPr>
         <p:blipFill rotWithShape="1">
-          <a:blip xmlns:r="http://schemas.openxmlformats.org/officeDocument/2006/relationships" xmlns:a="http://schemas.openxmlformats.org/drawingml/2006/main" r:embed="Ra7a5d4fbc72848d3">
+          <a:blip xmlns:r="http://schemas.openxmlformats.org/officeDocument/2006/relationships" xmlns:a="http://schemas.openxmlformats.org/drawingml/2006/main" r:embed="R6ac8450019964e9c">
             <a:alphaModFix amt="28000"/>
           </a:blip>
           <a:stretch xmlns:a="http://schemas.openxmlformats.org/drawingml/2006/main"/>
@@ -2451,7 +2451,7 @@
           <p:nvPr/>
         </p:nvPicPr>
         <p:blipFill rotWithShape="1">
-          <a:blip xmlns:r="http://schemas.openxmlformats.org/officeDocument/2006/relationships" xmlns:a="http://schemas.openxmlformats.org/drawingml/2006/main" r:embed="R071a4f976c0a4137">
+          <a:blip xmlns:r="http://schemas.openxmlformats.org/officeDocument/2006/relationships" xmlns:a="http://schemas.openxmlformats.org/drawingml/2006/main" r:embed="R9671fb38460040db">
             <a:alphaModFix amt="28000"/>
           </a:blip>
           <a:stretch xmlns:a="http://schemas.openxmlformats.org/drawingml/2006/main"/>
@@ -2875,7 +2875,7 @@
           <p:nvPr/>
         </p:nvPicPr>
         <p:blipFill rotWithShape="1">
-          <a:blip xmlns:r="http://schemas.openxmlformats.org/officeDocument/2006/relationships" xmlns:a="http://schemas.openxmlformats.org/drawingml/2006/main" r:embed="Rf897298d34b84788">
+          <a:blip xmlns:r="http://schemas.openxmlformats.org/officeDocument/2006/relationships" xmlns:a="http://schemas.openxmlformats.org/drawingml/2006/main" r:embed="Rc764e602284748ca">
             <a:alphaModFix amt="28000"/>
           </a:blip>
           <a:stretch xmlns:a="http://schemas.openxmlformats.org/drawingml/2006/main"/>
@@ -3016,7 +3016,7 @@
           <p:nvPr/>
         </p:nvPicPr>
         <p:blipFill rotWithShape="1">
-          <a:blip xmlns:r="http://schemas.openxmlformats.org/officeDocument/2006/relationships" xmlns:a="http://schemas.openxmlformats.org/drawingml/2006/main" r:embed="R87f00055448042a3">
+          <a:blip xmlns:r="http://schemas.openxmlformats.org/officeDocument/2006/relationships" xmlns:a="http://schemas.openxmlformats.org/drawingml/2006/main" r:embed="R6f88c8e9c8964121">
             <a:alphaModFix amt="28000"/>
           </a:blip>
           <a:stretch xmlns:a="http://schemas.openxmlformats.org/drawingml/2006/main"/>
@@ -3130,7 +3130,7 @@
           <p:nvPr/>
         </p:nvPicPr>
         <p:blipFill rotWithShape="1">
-          <a:blip xmlns:r="http://schemas.openxmlformats.org/officeDocument/2006/relationships" xmlns:a="http://schemas.openxmlformats.org/drawingml/2006/main" r:embed="R70adef3f3c184d30">
+          <a:blip xmlns:r="http://schemas.openxmlformats.org/officeDocument/2006/relationships" xmlns:a="http://schemas.openxmlformats.org/drawingml/2006/main" r:embed="Re80afcc87e9c4c44">
             <a:alphaModFix amt="28000"/>
           </a:blip>
           <a:stretch xmlns:a="http://schemas.openxmlformats.org/drawingml/2006/main"/>
@@ -3457,7 +3457,7 @@
           <p:nvPr/>
         </p:nvPicPr>
         <p:blipFill rotWithShape="1">
-          <a:blip xmlns:r="http://schemas.openxmlformats.org/officeDocument/2006/relationships" xmlns:a="http://schemas.openxmlformats.org/drawingml/2006/main" r:embed="Ref9990b804fc4800">
+          <a:blip xmlns:r="http://schemas.openxmlformats.org/officeDocument/2006/relationships" xmlns:a="http://schemas.openxmlformats.org/drawingml/2006/main" r:embed="Re7e8efbcb8fe427b">
             <a:alphaModFix amt="28000"/>
           </a:blip>
           <a:stretch xmlns:a="http://schemas.openxmlformats.org/drawingml/2006/main"/>
@@ -3745,7 +3745,7 @@
           <p:nvPr/>
         </p:nvPicPr>
         <p:blipFill rotWithShape="1">
-          <a:blip xmlns:r="http://schemas.openxmlformats.org/officeDocument/2006/relationships" xmlns:a="http://schemas.openxmlformats.org/drawingml/2006/main" r:embed="Rd25afc963a9644bc">
+          <a:blip xmlns:r="http://schemas.openxmlformats.org/officeDocument/2006/relationships" xmlns:a="http://schemas.openxmlformats.org/drawingml/2006/main" r:embed="R201f178913d04ecb">
             <a:alphaModFix amt="28000"/>
           </a:blip>
           <a:stretch xmlns:a="http://schemas.openxmlformats.org/drawingml/2006/main"/>
@@ -3982,17 +3982,17 @@
   </p:cSld>
   <p:clrMap bg1="lt1" tx1="dk1" bg2="lt2" tx2="dk2" accent1="accent1" accent2="accent2" accent3="accent3" accent4="accent4" accent5="accent5" accent6="accent6" hlink="hlink" folHlink="folHlink"/>
   <p:sldLayoutIdLst>
-    <p:sldLayoutId xmlns:r="http://schemas.openxmlformats.org/officeDocument/2006/relationships" id="2147483649" r:id="Rff5ebe2fd2084a2c"/>
-    <p:sldLayoutId xmlns:r="http://schemas.openxmlformats.org/officeDocument/2006/relationships" id="2147483650" r:id="Re9c9ad4bdc9b4123"/>
-    <p:sldLayoutId xmlns:r="http://schemas.openxmlformats.org/officeDocument/2006/relationships" id="2147483651" r:id="R5faaa4b19dc34f8e"/>
-    <p:sldLayoutId xmlns:r="http://schemas.openxmlformats.org/officeDocument/2006/relationships" id="2147483652" r:id="Ra1f2550b2bda4e5b"/>
-    <p:sldLayoutId xmlns:r="http://schemas.openxmlformats.org/officeDocument/2006/relationships" id="2147483653" r:id="R50db350aad8f42b1"/>
-    <p:sldLayoutId xmlns:r="http://schemas.openxmlformats.org/officeDocument/2006/relationships" id="2147483654" r:id="R9ccd8acc765a4346"/>
-    <p:sldLayoutId xmlns:r="http://schemas.openxmlformats.org/officeDocument/2006/relationships" id="2147483655" r:id="Ra3c4642cc70f42ec"/>
-    <p:sldLayoutId xmlns:r="http://schemas.openxmlformats.org/officeDocument/2006/relationships" id="2147483656" r:id="Rd3d41ec357a24cd4"/>
-    <p:sldLayoutId xmlns:r="http://schemas.openxmlformats.org/officeDocument/2006/relationships" id="2147483657" r:id="R2f186c40196d46b7"/>
-    <p:sldLayoutId xmlns:r="http://schemas.openxmlformats.org/officeDocument/2006/relationships" id="2147483658" r:id="R7dc0171911e64624"/>
-    <p:sldLayoutId xmlns:r="http://schemas.openxmlformats.org/officeDocument/2006/relationships" id="2147483659" r:id="Rd0ba3994e092414a"/>
+    <p:sldLayoutId xmlns:r="http://schemas.openxmlformats.org/officeDocument/2006/relationships" id="2147483649" r:id="R469e70e60e344c9f"/>
+    <p:sldLayoutId xmlns:r="http://schemas.openxmlformats.org/officeDocument/2006/relationships" id="2147483650" r:id="Rf1cde7126dc045cf"/>
+    <p:sldLayoutId xmlns:r="http://schemas.openxmlformats.org/officeDocument/2006/relationships" id="2147483651" r:id="R35016cab54d54b32"/>
+    <p:sldLayoutId xmlns:r="http://schemas.openxmlformats.org/officeDocument/2006/relationships" id="2147483652" r:id="R360597c9f8a84b7b"/>
+    <p:sldLayoutId xmlns:r="http://schemas.openxmlformats.org/officeDocument/2006/relationships" id="2147483653" r:id="Rac264a7ad83c4b4f"/>
+    <p:sldLayoutId xmlns:r="http://schemas.openxmlformats.org/officeDocument/2006/relationships" id="2147483654" r:id="R81cd9a702ce84780"/>
+    <p:sldLayoutId xmlns:r="http://schemas.openxmlformats.org/officeDocument/2006/relationships" id="2147483655" r:id="Rb938c9b5260c4752"/>
+    <p:sldLayoutId xmlns:r="http://schemas.openxmlformats.org/officeDocument/2006/relationships" id="2147483656" r:id="Rbd3f5d15f1c64cd9"/>
+    <p:sldLayoutId xmlns:r="http://schemas.openxmlformats.org/officeDocument/2006/relationships" id="2147483657" r:id="R0711479370cc4bc1"/>
+    <p:sldLayoutId xmlns:r="http://schemas.openxmlformats.org/officeDocument/2006/relationships" id="2147483658" r:id="R54b529271d8c450d"/>
+    <p:sldLayoutId xmlns:r="http://schemas.openxmlformats.org/officeDocument/2006/relationships" id="2147483659" r:id="R53a13733f4174a5b"/>
   </p:sldLayoutIdLst>
   <p:hf hdr="0" ftr="0" dt="0"/>
   <p:txStyles>
@@ -4928,24 +4928,13 @@
             <a:r>
               <a:rPr sz="2400">
                 <a:solidFill>
-                  <a:srgbClr val="080808"/>
-                </a:solidFill>
-                <a:latin typeface="JetBrains Mono"/>
-                <a:ea typeface="JetBrains Mono"/>
-                <a:cs typeface="JetBrains Mono"/>
-              </a:rPr>
-              <a:t>    </a:t>
-            </a:r>
-            <a:r>
-              <a:rPr sz="2400">
-                <a:solidFill>
                   <a:srgbClr val="C45E00"/>
                 </a:solidFill>
                 <a:latin typeface="JetBrains Mono"/>
                 <a:ea typeface="JetBrains Mono"/>
                 <a:cs typeface="JetBrains Mono"/>
               </a:rPr>
-              <a:t>return</a:t>
+              <a:t>    return</a:t>
             </a:r>
             <a:r>
               <a:rPr sz="2400">
@@ -4999,24 +4988,13 @@
             <a:r>
               <a:rPr sz="2400">
                 <a:solidFill>
-                  <a:srgbClr val="080808"/>
-                </a:solidFill>
-                <a:latin typeface="JetBrains Mono"/>
-                <a:ea typeface="JetBrains Mono"/>
-                <a:cs typeface="JetBrains Mono"/>
-              </a:rPr>
-              <a:t>    </a:t>
-            </a:r>
-            <a:r>
-              <a:rPr sz="2400">
-                <a:solidFill>
                   <a:srgbClr val="C45E00"/>
                 </a:solidFill>
                 <a:latin typeface="JetBrains Mono"/>
                 <a:ea typeface="JetBrains Mono"/>
                 <a:cs typeface="JetBrains Mono"/>
               </a:rPr>
-              <a:t>return</a:t>
+              <a:t>    return</a:t>
             </a:r>
             <a:r>
               <a:rPr sz="2400">
@@ -5273,24 +5251,13 @@
             <a:r>
               <a:rPr sz="2400">
                 <a:solidFill>
-                  <a:srgbClr val="080808"/>
-                </a:solidFill>
-                <a:latin typeface="JetBrains Mono"/>
-                <a:ea typeface="JetBrains Mono"/>
-                <a:cs typeface="JetBrains Mono"/>
-              </a:rPr>
-              <a:t> </a:t>
-            </a:r>
-            <a:r>
-              <a:rPr sz="2400">
-                <a:solidFill>
                   <a:srgbClr val="067D17"/>
                 </a:solidFill>
                 <a:latin typeface="JetBrains Mono"/>
                 <a:ea typeface="JetBrains Mono"/>
                 <a:cs typeface="JetBrains Mono"/>
               </a:rPr>
-              <a:t>"1"</a:t>
+              <a:t> "1"</a:t>
             </a:r>
             <a:r>
               <a:rPr sz="2400">
@@ -5314,24 +5281,13 @@
             <a:r>
               <a:rPr sz="2400">
                 <a:solidFill>
-                  <a:srgbClr val="080808"/>
-                </a:solidFill>
-                <a:latin typeface="JetBrains Mono"/>
-                <a:ea typeface="JetBrains Mono"/>
-                <a:cs typeface="JetBrains Mono"/>
-              </a:rPr>
-              <a:t>    </a:t>
-            </a:r>
-            <a:r>
-              <a:rPr sz="2400">
-                <a:solidFill>
                   <a:srgbClr val="1750EB"/>
                 </a:solidFill>
                 <a:latin typeface="JetBrains Mono"/>
                 <a:ea typeface="JetBrains Mono"/>
                 <a:cs typeface="JetBrains Mono"/>
               </a:rPr>
-              <a:t>print</a:t>
+              <a:t>    print</a:t>
             </a:r>
             <a:r>
               <a:rPr sz="2400">
@@ -5407,24 +5363,13 @@
             <a:r>
               <a:rPr sz="2400">
                 <a:solidFill>
-                  <a:srgbClr val="080808"/>
-                </a:solidFill>
-                <a:latin typeface="JetBrains Mono"/>
-                <a:ea typeface="JetBrains Mono"/>
-                <a:cs typeface="JetBrains Mono"/>
-              </a:rPr>
-              <a:t>    </a:t>
-            </a:r>
-            <a:r>
-              <a:rPr sz="2400">
-                <a:solidFill>
                   <a:srgbClr val="1750EB"/>
                 </a:solidFill>
                 <a:latin typeface="JetBrains Mono"/>
                 <a:ea typeface="JetBrains Mono"/>
                 <a:cs typeface="JetBrains Mono"/>
               </a:rPr>
-              <a:t>print</a:t>
+              <a:t>    print</a:t>
             </a:r>
             <a:r>
               <a:rPr sz="2400">
@@ -5777,24 +5722,13 @@
             <a:r>
               <a:rPr sz="2400">
                 <a:solidFill>
-                  <a:srgbClr val="080808"/>
-                </a:solidFill>
-                <a:latin typeface="JetBrains Mono"/>
-                <a:ea typeface="JetBrains Mono"/>
-                <a:cs typeface="JetBrains Mono"/>
-              </a:rPr>
-              <a:t>    </a:t>
-            </a:r>
-            <a:r>
-              <a:rPr sz="2400">
-                <a:solidFill>
                   <a:srgbClr val="C45E00"/>
                 </a:solidFill>
                 <a:latin typeface="JetBrains Mono"/>
                 <a:ea typeface="JetBrains Mono"/>
                 <a:cs typeface="JetBrains Mono"/>
               </a:rPr>
-              <a:t>return</a:t>
+              <a:t>    return</a:t>
             </a:r>
             <a:r>
               <a:rPr sz="2400">
@@ -5848,24 +5782,13 @@
             <a:r>
               <a:rPr sz="2400">
                 <a:solidFill>
-                  <a:srgbClr val="080808"/>
-                </a:solidFill>
-                <a:latin typeface="JetBrains Mono"/>
-                <a:ea typeface="JetBrains Mono"/>
-                <a:cs typeface="JetBrains Mono"/>
-              </a:rPr>
-              <a:t>    </a:t>
-            </a:r>
-            <a:r>
-              <a:rPr sz="2400">
-                <a:solidFill>
                   <a:srgbClr val="C45E00"/>
                 </a:solidFill>
                 <a:latin typeface="JetBrains Mono"/>
                 <a:ea typeface="JetBrains Mono"/>
                 <a:cs typeface="JetBrains Mono"/>
               </a:rPr>
-              <a:t>return</a:t>
+              <a:t>    return</a:t>
             </a:r>
             <a:r>
               <a:rPr sz="2400">
@@ -6122,24 +6045,13 @@
             <a:r>
               <a:rPr sz="2400">
                 <a:solidFill>
-                  <a:srgbClr val="080808"/>
-                </a:solidFill>
-                <a:latin typeface="JetBrains Mono"/>
-                <a:ea typeface="JetBrains Mono"/>
-                <a:cs typeface="JetBrains Mono"/>
-              </a:rPr>
-              <a:t> </a:t>
-            </a:r>
-            <a:r>
-              <a:rPr sz="2400">
-                <a:solidFill>
                   <a:srgbClr val="067D17"/>
                 </a:solidFill>
                 <a:latin typeface="JetBrains Mono"/>
                 <a:ea typeface="JetBrains Mono"/>
                 <a:cs typeface="JetBrains Mono"/>
               </a:rPr>
-              <a:t>"1"</a:t>
+              <a:t> "1"</a:t>
             </a:r>
             <a:r>
               <a:rPr sz="2400">
@@ -6163,24 +6075,13 @@
             <a:r>
               <a:rPr sz="2400">
                 <a:solidFill>
-                  <a:srgbClr val="080808"/>
-                </a:solidFill>
-                <a:latin typeface="JetBrains Mono"/>
-                <a:ea typeface="JetBrains Mono"/>
-                <a:cs typeface="JetBrains Mono"/>
-              </a:rPr>
-              <a:t>    </a:t>
-            </a:r>
-            <a:r>
-              <a:rPr sz="2400">
-                <a:solidFill>
                   <a:srgbClr val="1750EB"/>
                 </a:solidFill>
                 <a:latin typeface="JetBrains Mono"/>
                 <a:ea typeface="JetBrains Mono"/>
                 <a:cs typeface="JetBrains Mono"/>
               </a:rPr>
-              <a:t>print</a:t>
+              <a:t>    print</a:t>
             </a:r>
             <a:r>
               <a:rPr sz="2400">
@@ -6256,24 +6157,13 @@
             <a:r>
               <a:rPr sz="2400">
                 <a:solidFill>
-                  <a:srgbClr val="080808"/>
-                </a:solidFill>
-                <a:latin typeface="JetBrains Mono"/>
-                <a:ea typeface="JetBrains Mono"/>
-                <a:cs typeface="JetBrains Mono"/>
-              </a:rPr>
-              <a:t>    </a:t>
-            </a:r>
-            <a:r>
-              <a:rPr sz="2400">
-                <a:solidFill>
                   <a:srgbClr val="1750EB"/>
                 </a:solidFill>
                 <a:latin typeface="JetBrains Mono"/>
                 <a:ea typeface="JetBrains Mono"/>
                 <a:cs typeface="JetBrains Mono"/>
               </a:rPr>
-              <a:t>print</a:t>
+              <a:t>    print</a:t>
             </a:r>
             <a:r>
               <a:rPr sz="2400">
@@ -6626,24 +6516,13 @@
             <a:r>
               <a:rPr sz="2400">
                 <a:solidFill>
-                  <a:srgbClr val="080808"/>
-                </a:solidFill>
-                <a:latin typeface="JetBrains Mono"/>
-                <a:ea typeface="JetBrains Mono"/>
-                <a:cs typeface="JetBrains Mono"/>
-              </a:rPr>
-              <a:t>    </a:t>
-            </a:r>
-            <a:r>
-              <a:rPr sz="2400">
-                <a:solidFill>
                   <a:srgbClr val="C45E00"/>
                 </a:solidFill>
                 <a:latin typeface="JetBrains Mono"/>
                 <a:ea typeface="JetBrains Mono"/>
                 <a:cs typeface="JetBrains Mono"/>
               </a:rPr>
-              <a:t>return</a:t>
+              <a:t>    return</a:t>
             </a:r>
             <a:r>
               <a:rPr sz="2400">
@@ -6697,24 +6576,13 @@
             <a:r>
               <a:rPr sz="2400">
                 <a:solidFill>
-                  <a:srgbClr val="080808"/>
-                </a:solidFill>
-                <a:latin typeface="JetBrains Mono"/>
-                <a:ea typeface="JetBrains Mono"/>
-                <a:cs typeface="JetBrains Mono"/>
-              </a:rPr>
-              <a:t>    </a:t>
-            </a:r>
-            <a:r>
-              <a:rPr sz="2400">
-                <a:solidFill>
                   <a:srgbClr val="C45E00"/>
                 </a:solidFill>
                 <a:latin typeface="JetBrains Mono"/>
                 <a:ea typeface="JetBrains Mono"/>
                 <a:cs typeface="JetBrains Mono"/>
               </a:rPr>
-              <a:t>return</a:t>
+              <a:t>    return</a:t>
             </a:r>
             <a:r>
               <a:rPr sz="2400">
@@ -6971,24 +6839,13 @@
             <a:r>
               <a:rPr sz="2400">
                 <a:solidFill>
-                  <a:srgbClr val="080808"/>
-                </a:solidFill>
-                <a:latin typeface="JetBrains Mono"/>
-                <a:ea typeface="JetBrains Mono"/>
-                <a:cs typeface="JetBrains Mono"/>
-              </a:rPr>
-              <a:t> </a:t>
-            </a:r>
-            <a:r>
-              <a:rPr sz="2400">
-                <a:solidFill>
                   <a:srgbClr val="067D17"/>
                 </a:solidFill>
                 <a:latin typeface="JetBrains Mono"/>
                 <a:ea typeface="JetBrains Mono"/>
                 <a:cs typeface="JetBrains Mono"/>
               </a:rPr>
-              <a:t>"1"</a:t>
+              <a:t> "1"</a:t>
             </a:r>
             <a:r>
               <a:rPr sz="2400">
@@ -7012,24 +6869,13 @@
             <a:r>
               <a:rPr sz="2400">
                 <a:solidFill>
-                  <a:srgbClr val="080808"/>
-                </a:solidFill>
-                <a:latin typeface="JetBrains Mono"/>
-                <a:ea typeface="JetBrains Mono"/>
-                <a:cs typeface="JetBrains Mono"/>
-              </a:rPr>
-              <a:t>    </a:t>
-            </a:r>
-            <a:r>
-              <a:rPr sz="2400">
-                <a:solidFill>
                   <a:srgbClr val="1750EB"/>
                 </a:solidFill>
                 <a:latin typeface="JetBrains Mono"/>
                 <a:ea typeface="JetBrains Mono"/>
                 <a:cs typeface="JetBrains Mono"/>
               </a:rPr>
-              <a:t>print</a:t>
+              <a:t>    print</a:t>
             </a:r>
             <a:r>
               <a:rPr sz="2400">
@@ -7105,24 +6951,13 @@
             <a:r>
               <a:rPr sz="2400">
                 <a:solidFill>
-                  <a:srgbClr val="080808"/>
-                </a:solidFill>
-                <a:latin typeface="JetBrains Mono"/>
-                <a:ea typeface="JetBrains Mono"/>
-                <a:cs typeface="JetBrains Mono"/>
-              </a:rPr>
-              <a:t>    </a:t>
-            </a:r>
-            <a:r>
-              <a:rPr sz="2400">
-                <a:solidFill>
                   <a:srgbClr val="1750EB"/>
                 </a:solidFill>
                 <a:latin typeface="JetBrains Mono"/>
                 <a:ea typeface="JetBrains Mono"/>
                 <a:cs typeface="JetBrains Mono"/>
               </a:rPr>
-              <a:t>print</a:t>
+              <a:t>    print</a:t>
             </a:r>
             <a:r>
               <a:rPr sz="2400">
@@ -7728,24 +7563,13 @@
             <a:r>
               <a:rPr sz="1100">
                 <a:solidFill>
-                  <a:srgbClr val="080808"/>
-                </a:solidFill>
-                <a:latin typeface="JetBrains Mono"/>
-                <a:ea typeface="JetBrains Mono"/>
-                <a:cs typeface="JetBrains Mono"/>
-              </a:rPr>
-              <a:t>    </a:t>
-            </a:r>
-            <a:r>
-              <a:rPr sz="1100">
-                <a:solidFill>
                   <a:srgbClr val="C45E00"/>
                 </a:solidFill>
                 <a:latin typeface="JetBrains Mono"/>
                 <a:ea typeface="JetBrains Mono"/>
                 <a:cs typeface="JetBrains Mono"/>
               </a:rPr>
-              <a:t>return</a:t>
+              <a:t>    return</a:t>
             </a:r>
             <a:r>
               <a:rPr sz="1100">
@@ -7803,24 +7627,13 @@
             <a:r>
               <a:rPr sz="1100">
                 <a:solidFill>
-                  <a:srgbClr val="080808"/>
-                </a:solidFill>
-                <a:latin typeface="JetBrains Mono"/>
-                <a:ea typeface="JetBrains Mono"/>
-                <a:cs typeface="JetBrains Mono"/>
-              </a:rPr>
-              <a:t>    </a:t>
-            </a:r>
-            <a:r>
-              <a:rPr sz="1100">
-                <a:solidFill>
                   <a:srgbClr val="C45E00"/>
                 </a:solidFill>
                 <a:latin typeface="JetBrains Mono"/>
                 <a:ea typeface="JetBrains Mono"/>
                 <a:cs typeface="JetBrains Mono"/>
               </a:rPr>
-              <a:t>return</a:t>
+              <a:t>    return</a:t>
             </a:r>
             <a:r>
               <a:rPr sz="1100">
@@ -8085,24 +7898,13 @@
             <a:r>
               <a:rPr sz="1100">
                 <a:solidFill>
-                  <a:srgbClr val="080808"/>
-                </a:solidFill>
-                <a:latin typeface="JetBrains Mono"/>
-                <a:ea typeface="JetBrains Mono"/>
-                <a:cs typeface="JetBrains Mono"/>
-              </a:rPr>
-              <a:t> </a:t>
-            </a:r>
-            <a:r>
-              <a:rPr sz="1100">
-                <a:solidFill>
                   <a:srgbClr val="067D17"/>
                 </a:solidFill>
                 <a:latin typeface="JetBrains Mono"/>
                 <a:ea typeface="JetBrains Mono"/>
                 <a:cs typeface="JetBrains Mono"/>
               </a:rPr>
-              <a:t>"1"</a:t>
+              <a:t> "1"</a:t>
             </a:r>
             <a:r>
               <a:rPr sz="1100">
@@ -8128,24 +7930,13 @@
             <a:r>
               <a:rPr sz="1100">
                 <a:solidFill>
-                  <a:srgbClr val="080808"/>
-                </a:solidFill>
-                <a:latin typeface="JetBrains Mono"/>
-                <a:ea typeface="JetBrains Mono"/>
-                <a:cs typeface="JetBrains Mono"/>
-              </a:rPr>
-              <a:t>    </a:t>
-            </a:r>
-            <a:r>
-              <a:rPr sz="1100">
-                <a:solidFill>
                   <a:srgbClr val="1750EB"/>
                 </a:solidFill>
                 <a:latin typeface="JetBrains Mono"/>
                 <a:ea typeface="JetBrains Mono"/>
                 <a:cs typeface="JetBrains Mono"/>
               </a:rPr>
-              <a:t>print</a:t>
+              <a:t>    print</a:t>
             </a:r>
             <a:r>
               <a:rPr sz="1100">
@@ -8225,24 +8016,13 @@
             <a:r>
               <a:rPr sz="1100">
                 <a:solidFill>
-                  <a:srgbClr val="080808"/>
-                </a:solidFill>
-                <a:latin typeface="JetBrains Mono"/>
-                <a:ea typeface="JetBrains Mono"/>
-                <a:cs typeface="JetBrains Mono"/>
-              </a:rPr>
-              <a:t>    </a:t>
-            </a:r>
-            <a:r>
-              <a:rPr sz="1100">
-                <a:solidFill>
                   <a:srgbClr val="1750EB"/>
                 </a:solidFill>
                 <a:latin typeface="JetBrains Mono"/>
                 <a:ea typeface="JetBrains Mono"/>
                 <a:cs typeface="JetBrains Mono"/>
               </a:rPr>
-              <a:t>print</a:t>
+              <a:t>    print</a:t>
             </a:r>
             <a:r>
               <a:rPr sz="1100">
@@ -8819,24 +8599,13 @@
             <a:r>
               <a:rPr sz="1100">
                 <a:solidFill>
-                  <a:srgbClr val="080808"/>
-                </a:solidFill>
-                <a:latin typeface="JetBrains Mono"/>
-                <a:ea typeface="JetBrains Mono"/>
-                <a:cs typeface="JetBrains Mono"/>
-              </a:rPr>
-              <a:t>    </a:t>
-            </a:r>
-            <a:r>
-              <a:rPr sz="1100">
-                <a:solidFill>
                   <a:srgbClr val="C45E00"/>
                 </a:solidFill>
                 <a:latin typeface="JetBrains Mono"/>
                 <a:ea typeface="JetBrains Mono"/>
                 <a:cs typeface="JetBrains Mono"/>
               </a:rPr>
-              <a:t>return</a:t>
+              <a:t>    return</a:t>
             </a:r>
             <a:r>
               <a:rPr sz="1100">
@@ -8894,24 +8663,13 @@
             <a:r>
               <a:rPr sz="1100">
                 <a:solidFill>
-                  <a:srgbClr val="080808"/>
-                </a:solidFill>
-                <a:latin typeface="JetBrains Mono"/>
-                <a:ea typeface="JetBrains Mono"/>
-                <a:cs typeface="JetBrains Mono"/>
-              </a:rPr>
-              <a:t>    </a:t>
-            </a:r>
-            <a:r>
-              <a:rPr sz="1100">
-                <a:solidFill>
                   <a:srgbClr val="C45E00"/>
                 </a:solidFill>
                 <a:latin typeface="JetBrains Mono"/>
                 <a:ea typeface="JetBrains Mono"/>
                 <a:cs typeface="JetBrains Mono"/>
               </a:rPr>
-              <a:t>return</a:t>
+              <a:t>    return</a:t>
             </a:r>
             <a:r>
               <a:rPr sz="1100">
@@ -9176,24 +8934,13 @@
             <a:r>
               <a:rPr sz="1100">
                 <a:solidFill>
-                  <a:srgbClr val="080808"/>
-                </a:solidFill>
-                <a:latin typeface="JetBrains Mono"/>
-                <a:ea typeface="JetBrains Mono"/>
-                <a:cs typeface="JetBrains Mono"/>
-              </a:rPr>
-              <a:t> </a:t>
-            </a:r>
-            <a:r>
-              <a:rPr sz="1100">
-                <a:solidFill>
                   <a:srgbClr val="067D17"/>
                 </a:solidFill>
                 <a:latin typeface="JetBrains Mono"/>
                 <a:ea typeface="JetBrains Mono"/>
                 <a:cs typeface="JetBrains Mono"/>
               </a:rPr>
-              <a:t>"1"</a:t>
+              <a:t> "1"</a:t>
             </a:r>
             <a:r>
               <a:rPr sz="1100">
@@ -9219,24 +8966,13 @@
             <a:r>
               <a:rPr sz="1100">
                 <a:solidFill>
-                  <a:srgbClr val="080808"/>
-                </a:solidFill>
-                <a:latin typeface="JetBrains Mono"/>
-                <a:ea typeface="JetBrains Mono"/>
-                <a:cs typeface="JetBrains Mono"/>
-              </a:rPr>
-              <a:t>    </a:t>
-            </a:r>
-            <a:r>
-              <a:rPr sz="1100">
-                <a:solidFill>
                   <a:srgbClr val="1750EB"/>
                 </a:solidFill>
                 <a:latin typeface="JetBrains Mono"/>
                 <a:ea typeface="JetBrains Mono"/>
                 <a:cs typeface="JetBrains Mono"/>
               </a:rPr>
-              <a:t>print</a:t>
+              <a:t>    print</a:t>
             </a:r>
             <a:r>
               <a:rPr sz="1100">
@@ -9316,24 +9052,13 @@
             <a:r>
               <a:rPr sz="1100">
                 <a:solidFill>
-                  <a:srgbClr val="080808"/>
-                </a:solidFill>
-                <a:latin typeface="JetBrains Mono"/>
-                <a:ea typeface="JetBrains Mono"/>
-                <a:cs typeface="JetBrains Mono"/>
-              </a:rPr>
-              <a:t>    </a:t>
-            </a:r>
-            <a:r>
-              <a:rPr sz="1100">
-                <a:solidFill>
                   <a:srgbClr val="1750EB"/>
                 </a:solidFill>
                 <a:latin typeface="JetBrains Mono"/>
                 <a:ea typeface="JetBrains Mono"/>
                 <a:cs typeface="JetBrains Mono"/>
               </a:rPr>
-              <a:t>print</a:t>
+              <a:t>    print</a:t>
             </a:r>
             <a:r>
               <a:rPr sz="1100">
@@ -9976,24 +9701,13 @@
             <a:r>
               <a:rPr sz="1100">
                 <a:solidFill>
-                  <a:srgbClr val="080808"/>
-                </a:solidFill>
-                <a:latin typeface="JetBrains Mono"/>
-                <a:ea typeface="JetBrains Mono"/>
-                <a:cs typeface="JetBrains Mono"/>
-              </a:rPr>
-              <a:t>    </a:t>
-            </a:r>
-            <a:r>
-              <a:rPr sz="1100">
-                <a:solidFill>
                   <a:srgbClr val="C45E00"/>
                 </a:solidFill>
                 <a:latin typeface="JetBrains Mono"/>
                 <a:ea typeface="JetBrains Mono"/>
                 <a:cs typeface="JetBrains Mono"/>
               </a:rPr>
-              <a:t>return</a:t>
+              <a:t>    return</a:t>
             </a:r>
             <a:r>
               <a:rPr sz="1100">
@@ -10051,24 +9765,13 @@
             <a:r>
               <a:rPr sz="1100">
                 <a:solidFill>
-                  <a:srgbClr val="080808"/>
-                </a:solidFill>
-                <a:latin typeface="JetBrains Mono"/>
-                <a:ea typeface="JetBrains Mono"/>
-                <a:cs typeface="JetBrains Mono"/>
-              </a:rPr>
-              <a:t>    </a:t>
-            </a:r>
-            <a:r>
-              <a:rPr sz="1100">
-                <a:solidFill>
                   <a:srgbClr val="C45E00"/>
                 </a:solidFill>
                 <a:latin typeface="JetBrains Mono"/>
                 <a:ea typeface="JetBrains Mono"/>
                 <a:cs typeface="JetBrains Mono"/>
               </a:rPr>
-              <a:t>return</a:t>
+              <a:t>    return</a:t>
             </a:r>
             <a:r>
               <a:rPr sz="1100">
@@ -10333,24 +10036,13 @@
             <a:r>
               <a:rPr sz="1100">
                 <a:solidFill>
-                  <a:srgbClr val="080808"/>
-                </a:solidFill>
-                <a:latin typeface="JetBrains Mono"/>
-                <a:ea typeface="JetBrains Mono"/>
-                <a:cs typeface="JetBrains Mono"/>
-              </a:rPr>
-              <a:t> </a:t>
-            </a:r>
-            <a:r>
-              <a:rPr sz="1100">
-                <a:solidFill>
                   <a:srgbClr val="067D17"/>
                 </a:solidFill>
                 <a:latin typeface="JetBrains Mono"/>
                 <a:ea typeface="JetBrains Mono"/>
                 <a:cs typeface="JetBrains Mono"/>
               </a:rPr>
-              <a:t>"1"</a:t>
+              <a:t> "1"</a:t>
             </a:r>
             <a:r>
               <a:rPr sz="1100">
@@ -10376,24 +10068,13 @@
             <a:r>
               <a:rPr sz="1100">
                 <a:solidFill>
-                  <a:srgbClr val="080808"/>
-                </a:solidFill>
-                <a:latin typeface="JetBrains Mono"/>
-                <a:ea typeface="JetBrains Mono"/>
-                <a:cs typeface="JetBrains Mono"/>
-              </a:rPr>
-              <a:t>    </a:t>
-            </a:r>
-            <a:r>
-              <a:rPr sz="1100">
-                <a:solidFill>
                   <a:srgbClr val="1750EB"/>
                 </a:solidFill>
                 <a:latin typeface="JetBrains Mono"/>
                 <a:ea typeface="JetBrains Mono"/>
                 <a:cs typeface="JetBrains Mono"/>
               </a:rPr>
-              <a:t>print</a:t>
+              <a:t>    print</a:t>
             </a:r>
             <a:r>
               <a:rPr sz="1100">
@@ -10473,24 +10154,13 @@
             <a:r>
               <a:rPr sz="1100">
                 <a:solidFill>
-                  <a:srgbClr val="080808"/>
-                </a:solidFill>
-                <a:latin typeface="JetBrains Mono"/>
-                <a:ea typeface="JetBrains Mono"/>
-                <a:cs typeface="JetBrains Mono"/>
-              </a:rPr>
-              <a:t>    </a:t>
-            </a:r>
-            <a:r>
-              <a:rPr sz="1100">
-                <a:solidFill>
                   <a:srgbClr val="1750EB"/>
                 </a:solidFill>
                 <a:latin typeface="JetBrains Mono"/>
                 <a:ea typeface="JetBrains Mono"/>
                 <a:cs typeface="JetBrains Mono"/>
               </a:rPr>
-              <a:t>print</a:t>
+              <a:t>    print</a:t>
             </a:r>
             <a:r>
               <a:rPr sz="1100">
@@ -11078,24 +10748,13 @@
             <a:r>
               <a:rPr sz="1100">
                 <a:solidFill>
-                  <a:srgbClr val="080808"/>
-                </a:solidFill>
-                <a:latin typeface="JetBrains Mono"/>
-                <a:ea typeface="JetBrains Mono"/>
-                <a:cs typeface="JetBrains Mono"/>
-              </a:rPr>
-              <a:t>    </a:t>
-            </a:r>
-            <a:r>
-              <a:rPr sz="1100">
-                <a:solidFill>
                   <a:srgbClr val="C45E00"/>
                 </a:solidFill>
                 <a:latin typeface="JetBrains Mono"/>
                 <a:ea typeface="JetBrains Mono"/>
                 <a:cs typeface="JetBrains Mono"/>
               </a:rPr>
-              <a:t>return</a:t>
+              <a:t>    return</a:t>
             </a:r>
             <a:r>
               <a:rPr sz="1100">
@@ -11153,24 +10812,13 @@
             <a:r>
               <a:rPr sz="1100">
                 <a:solidFill>
-                  <a:srgbClr val="080808"/>
-                </a:solidFill>
-                <a:latin typeface="JetBrains Mono"/>
-                <a:ea typeface="JetBrains Mono"/>
-                <a:cs typeface="JetBrains Mono"/>
-              </a:rPr>
-              <a:t>    </a:t>
-            </a:r>
-            <a:r>
-              <a:rPr sz="1100">
-                <a:solidFill>
                   <a:srgbClr val="C45E00"/>
                 </a:solidFill>
                 <a:latin typeface="JetBrains Mono"/>
                 <a:ea typeface="JetBrains Mono"/>
                 <a:cs typeface="JetBrains Mono"/>
               </a:rPr>
-              <a:t>return</a:t>
+              <a:t>    return</a:t>
             </a:r>
             <a:r>
               <a:rPr sz="1100">
@@ -11435,24 +11083,13 @@
             <a:r>
               <a:rPr sz="1100">
                 <a:solidFill>
-                  <a:srgbClr val="080808"/>
-                </a:solidFill>
-                <a:latin typeface="JetBrains Mono"/>
-                <a:ea typeface="JetBrains Mono"/>
-                <a:cs typeface="JetBrains Mono"/>
-              </a:rPr>
-              <a:t> </a:t>
-            </a:r>
-            <a:r>
-              <a:rPr sz="1100">
-                <a:solidFill>
                   <a:srgbClr val="067D17"/>
                 </a:solidFill>
                 <a:latin typeface="JetBrains Mono"/>
                 <a:ea typeface="JetBrains Mono"/>
                 <a:cs typeface="JetBrains Mono"/>
               </a:rPr>
-              <a:t>"1"</a:t>
+              <a:t> "1"</a:t>
             </a:r>
             <a:r>
               <a:rPr sz="1100">
@@ -11478,24 +11115,13 @@
             <a:r>
               <a:rPr sz="1100">
                 <a:solidFill>
-                  <a:srgbClr val="080808"/>
-                </a:solidFill>
-                <a:latin typeface="JetBrains Mono"/>
-                <a:ea typeface="JetBrains Mono"/>
-                <a:cs typeface="JetBrains Mono"/>
-              </a:rPr>
-              <a:t>    </a:t>
-            </a:r>
-            <a:r>
-              <a:rPr sz="1100">
-                <a:solidFill>
                   <a:srgbClr val="1750EB"/>
                 </a:solidFill>
                 <a:latin typeface="JetBrains Mono"/>
                 <a:ea typeface="JetBrains Mono"/>
                 <a:cs typeface="JetBrains Mono"/>
               </a:rPr>
-              <a:t>print</a:t>
+              <a:t>    print</a:t>
             </a:r>
             <a:r>
               <a:rPr sz="1100">
@@ -11575,24 +11201,13 @@
             <a:r>
               <a:rPr sz="1100">
                 <a:solidFill>
-                  <a:srgbClr val="080808"/>
-                </a:solidFill>
-                <a:latin typeface="JetBrains Mono"/>
-                <a:ea typeface="JetBrains Mono"/>
-                <a:cs typeface="JetBrains Mono"/>
-              </a:rPr>
-              <a:t>    </a:t>
-            </a:r>
-            <a:r>
-              <a:rPr sz="1100">
-                <a:solidFill>
                   <a:srgbClr val="1750EB"/>
                 </a:solidFill>
                 <a:latin typeface="JetBrains Mono"/>
                 <a:ea typeface="JetBrains Mono"/>
                 <a:cs typeface="JetBrains Mono"/>
               </a:rPr>
-              <a:t>print</a:t>
+              <a:t>    print</a:t>
             </a:r>
             <a:r>
               <a:rPr sz="1100">
@@ -11842,24 +11457,13 @@
             <a:r>
               <a:rPr sz="1800">
                 <a:solidFill>
-                  <a:srgbClr val="080808"/>
-                </a:solidFill>
-                <a:latin typeface="JetBrains Mono"/>
-                <a:ea typeface="JetBrains Mono"/>
-                <a:cs typeface="JetBrains Mono"/>
-              </a:rPr>
-              <a:t>    </a:t>
-            </a:r>
-            <a:r>
-              <a:rPr sz="1800">
-                <a:solidFill>
                   <a:srgbClr val="C45E00"/>
                 </a:solidFill>
                 <a:latin typeface="JetBrains Mono"/>
                 <a:ea typeface="JetBrains Mono"/>
                 <a:cs typeface="JetBrains Mono"/>
               </a:rPr>
-              <a:t>return</a:t>
+              <a:t>    return</a:t>
             </a:r>
             <a:r>
               <a:rPr sz="1800">
